--- a/media/module4/slides.pptx
+++ b/media/module4/slides.pptx
@@ -36,6 +36,19 @@
     <p:sldId id="284" r:id="rId36"/>
     <p:sldId id="285" r:id="rId37"/>
     <p:sldId id="286" r:id="rId38"/>
+    <p:sldId id="287" r:id="rId39"/>
+    <p:sldId id="288" r:id="rId40"/>
+    <p:sldId id="289" r:id="rId41"/>
+    <p:sldId id="290" r:id="rId42"/>
+    <p:sldId id="291" r:id="rId43"/>
+    <p:sldId id="292" r:id="rId44"/>
+    <p:sldId id="293" r:id="rId45"/>
+    <p:sldId id="294" r:id="rId46"/>
+    <p:sldId id="295" r:id="rId47"/>
+    <p:sldId id="296" r:id="rId48"/>
+    <p:sldId id="297" r:id="rId49"/>
+    <p:sldId id="298" r:id="rId50"/>
+    <p:sldId id="299" r:id="rId51"/>
   </p:sldIdLst>
   <p:sldSz cx="12191695" cy="6858000" type="screen4x3"/>
   <p:notesSz cx="6858000" cy="9144000"/>
@@ -602,7 +615,7 @@
           <a:lstStyle/>
           <a:p>
             <a:r>
-              <a:t>Run from course repository root.</a:t>
+              <a:t>From MODULE4 Verification &amp; Testing Methods.</a:t>
             </a:r>
           </a:p>
         </p:txBody>
@@ -672,7 +685,7 @@
           <a:lstStyle/>
           <a:p>
             <a:r>
-              <a:t>module4/examples/examples/uart_uvm/README.md</a:t>
+              <a:t>From MODULE4 Topics Covered.</a:t>
             </a:r>
           </a:p>
         </p:txBody>
@@ -742,7 +755,7 @@
           <a:lstStyle/>
           <a:p>
             <a:r>
-              <a:t>Hands-on: module4/examples/examples/uart_uvm/</a:t>
+              <a:t>From MODULE4 Topics Covered.</a:t>
             </a:r>
           </a:p>
         </p:txBody>
@@ -812,7 +825,427 @@
           <a:lstStyle/>
           <a:p>
             <a:r>
-              <a:t>From MODULE4 Learning Outcomes.</a:t>
+              <a:t>Run from course repository root.</a:t>
+            </a:r>
+          </a:p>
+        </p:txBody>
+      </p:sp>
+      <p:sp>
+        <p:nvSpPr>
+          <p:cNvPr id="4" name="Slide Number Placeholder 3"/>
+          <p:cNvSpPr>
+            <a:spLocks noGrp="1"/>
+          </p:cNvSpPr>
+          <p:nvPr>
+            <p:ph type="sldNum" idx="5" sz="quarter"/>
+          </p:nvPr>
+        </p:nvSpPr>
+        <p:spPr/>
+      </p:sp>
+    </p:spTree>
+  </p:cSld>
+  <p:clrMapOvr>
+    <a:masterClrMapping/>
+  </p:clrMapOvr>
+</p:notes>
+</file>
+
+<file path=ppt/notesSlides/notesSlide14.xml><?xml version="1.0" encoding="utf-8"?>
+<p:notes xmlns:a="http://schemas.openxmlformats.org/drawingml/2006/main" xmlns:p="http://schemas.openxmlformats.org/presentationml/2006/main" xmlns:r="http://schemas.openxmlformats.org/officeDocument/2006/relationships">
+  <p:cSld>
+    <p:spTree>
+      <p:nvGrpSpPr>
+        <p:cNvPr id="1" name=""/>
+        <p:cNvGrpSpPr/>
+        <p:nvPr/>
+      </p:nvGrpSpPr>
+      <p:grpSpPr>
+        <a:xfrm>
+          <a:off x="0" y="0"/>
+          <a:ext cx="0" cy="0"/>
+          <a:chOff x="0" y="0"/>
+          <a:chExt cx="0" cy="0"/>
+        </a:xfrm>
+      </p:grpSpPr>
+      <p:sp>
+        <p:nvSpPr>
+          <p:cNvPr id="2" name="Slide Image Placeholder 1"/>
+          <p:cNvSpPr>
+            <a:spLocks noGrp="1"/>
+          </p:cNvSpPr>
+          <p:nvPr>
+            <p:ph type="sldImg" idx="2"/>
+          </p:nvPr>
+        </p:nvSpPr>
+        <p:spPr/>
+      </p:sp>
+      <p:sp>
+        <p:nvSpPr>
+          <p:cNvPr id="3" name="Notes Placeholder 2"/>
+          <p:cNvSpPr>
+            <a:spLocks noGrp="1"/>
+          </p:cNvSpPr>
+          <p:nvPr>
+            <p:ph type="body" idx="3" sz="quarter"/>
+          </p:nvPr>
+        </p:nvSpPr>
+        <p:spPr/>
+        <p:txBody>
+          <a:bodyPr/>
+          <a:lstStyle/>
+          <a:p>
+            <a:r>
+              <a:t>module4/examples/uart_uvm/README.md</a:t>
+            </a:r>
+          </a:p>
+        </p:txBody>
+      </p:sp>
+      <p:sp>
+        <p:nvSpPr>
+          <p:cNvPr id="4" name="Slide Number Placeholder 3"/>
+          <p:cNvSpPr>
+            <a:spLocks noGrp="1"/>
+          </p:cNvSpPr>
+          <p:nvPr>
+            <p:ph type="sldNum" idx="5" sz="quarter"/>
+          </p:nvPr>
+        </p:nvSpPr>
+        <p:spPr/>
+      </p:sp>
+    </p:spTree>
+  </p:cSld>
+  <p:clrMapOvr>
+    <a:masterClrMapping/>
+  </p:clrMapOvr>
+</p:notes>
+</file>
+
+<file path=ppt/notesSlides/notesSlide15.xml><?xml version="1.0" encoding="utf-8"?>
+<p:notes xmlns:a="http://schemas.openxmlformats.org/drawingml/2006/main" xmlns:p="http://schemas.openxmlformats.org/presentationml/2006/main" xmlns:r="http://schemas.openxmlformats.org/officeDocument/2006/relationships">
+  <p:cSld>
+    <p:spTree>
+      <p:nvGrpSpPr>
+        <p:cNvPr id="1" name=""/>
+        <p:cNvGrpSpPr/>
+        <p:nvPr/>
+      </p:nvGrpSpPr>
+      <p:grpSpPr>
+        <a:xfrm>
+          <a:off x="0" y="0"/>
+          <a:ext cx="0" cy="0"/>
+          <a:chOff x="0" y="0"/>
+          <a:chExt cx="0" cy="0"/>
+        </a:xfrm>
+      </p:grpSpPr>
+      <p:sp>
+        <p:nvSpPr>
+          <p:cNvPr id="2" name="Slide Image Placeholder 1"/>
+          <p:cNvSpPr>
+            <a:spLocks noGrp="1"/>
+          </p:cNvSpPr>
+          <p:nvPr>
+            <p:ph type="sldImg" idx="2"/>
+          </p:nvPr>
+        </p:nvSpPr>
+        <p:spPr/>
+      </p:sp>
+      <p:sp>
+        <p:nvSpPr>
+          <p:cNvPr id="3" name="Notes Placeholder 2"/>
+          <p:cNvSpPr>
+            <a:spLocks noGrp="1"/>
+          </p:cNvSpPr>
+          <p:nvPr>
+            <p:ph type="body" idx="3" sz="quarter"/>
+          </p:nvPr>
+        </p:nvSpPr>
+        <p:spPr/>
+        <p:txBody>
+          <a:bodyPr/>
+          <a:lstStyle/>
+          <a:p>
+            <a:r>
+              <a:t>Hands-on: module4/examples/uart_uvm/</a:t>
+            </a:r>
+          </a:p>
+        </p:txBody>
+      </p:sp>
+      <p:sp>
+        <p:nvSpPr>
+          <p:cNvPr id="4" name="Slide Number Placeholder 3"/>
+          <p:cNvSpPr>
+            <a:spLocks noGrp="1"/>
+          </p:cNvSpPr>
+          <p:nvPr>
+            <p:ph type="sldNum" idx="5" sz="quarter"/>
+          </p:nvPr>
+        </p:nvSpPr>
+        <p:spPr/>
+      </p:sp>
+    </p:spTree>
+  </p:cSld>
+  <p:clrMapOvr>
+    <a:masterClrMapping/>
+  </p:clrMapOvr>
+</p:notes>
+</file>
+
+<file path=ppt/notesSlides/notesSlide16.xml><?xml version="1.0" encoding="utf-8"?>
+<p:notes xmlns:a="http://schemas.openxmlformats.org/drawingml/2006/main" xmlns:p="http://schemas.openxmlformats.org/presentationml/2006/main" xmlns:r="http://schemas.openxmlformats.org/officeDocument/2006/relationships">
+  <p:cSld>
+    <p:spTree>
+      <p:nvGrpSpPr>
+        <p:cNvPr id="1" name=""/>
+        <p:cNvGrpSpPr/>
+        <p:nvPr/>
+      </p:nvGrpSpPr>
+      <p:grpSpPr>
+        <a:xfrm>
+          <a:off x="0" y="0"/>
+          <a:ext cx="0" cy="0"/>
+          <a:chOff x="0" y="0"/>
+          <a:chExt cx="0" cy="0"/>
+        </a:xfrm>
+      </p:grpSpPr>
+      <p:sp>
+        <p:nvSpPr>
+          <p:cNvPr id="2" name="Slide Image Placeholder 1"/>
+          <p:cNvSpPr>
+            <a:spLocks noGrp="1"/>
+          </p:cNvSpPr>
+          <p:nvPr>
+            <p:ph type="sldImg" idx="2"/>
+          </p:nvPr>
+        </p:nvSpPr>
+        <p:spPr/>
+      </p:sp>
+      <p:sp>
+        <p:nvSpPr>
+          <p:cNvPr id="3" name="Notes Placeholder 2"/>
+          <p:cNvSpPr>
+            <a:spLocks noGrp="1"/>
+          </p:cNvSpPr>
+          <p:nvPr>
+            <p:ph type="body" idx="3" sz="quarter"/>
+          </p:nvPr>
+        </p:nvSpPr>
+        <p:spPr/>
+        <p:txBody>
+          <a:bodyPr/>
+          <a:lstStyle/>
+          <a:p>
+            <a:r>
+              <a:t>From MODULE4 Key Concepts.</a:t>
+            </a:r>
+          </a:p>
+        </p:txBody>
+      </p:sp>
+      <p:sp>
+        <p:nvSpPr>
+          <p:cNvPr id="4" name="Slide Number Placeholder 3"/>
+          <p:cNvSpPr>
+            <a:spLocks noGrp="1"/>
+          </p:cNvSpPr>
+          <p:nvPr>
+            <p:ph type="sldNum" idx="5" sz="quarter"/>
+          </p:nvPr>
+        </p:nvSpPr>
+        <p:spPr/>
+      </p:sp>
+    </p:spTree>
+  </p:cSld>
+  <p:clrMapOvr>
+    <a:masterClrMapping/>
+  </p:clrMapOvr>
+</p:notes>
+</file>
+
+<file path=ppt/notesSlides/notesSlide17.xml><?xml version="1.0" encoding="utf-8"?>
+<p:notes xmlns:a="http://schemas.openxmlformats.org/drawingml/2006/main" xmlns:p="http://schemas.openxmlformats.org/presentationml/2006/main" xmlns:r="http://schemas.openxmlformats.org/officeDocument/2006/relationships">
+  <p:cSld>
+    <p:spTree>
+      <p:nvGrpSpPr>
+        <p:cNvPr id="1" name=""/>
+        <p:cNvGrpSpPr/>
+        <p:nvPr/>
+      </p:nvGrpSpPr>
+      <p:grpSpPr>
+        <a:xfrm>
+          <a:off x="0" y="0"/>
+          <a:ext cx="0" cy="0"/>
+          <a:chOff x="0" y="0"/>
+          <a:chExt cx="0" cy="0"/>
+        </a:xfrm>
+      </p:grpSpPr>
+      <p:sp>
+        <p:nvSpPr>
+          <p:cNvPr id="2" name="Slide Image Placeholder 1"/>
+          <p:cNvSpPr>
+            <a:spLocks noGrp="1"/>
+          </p:cNvSpPr>
+          <p:nvPr>
+            <p:ph type="sldImg" idx="2"/>
+          </p:nvPr>
+        </p:nvSpPr>
+        <p:spPr/>
+      </p:sp>
+      <p:sp>
+        <p:nvSpPr>
+          <p:cNvPr id="3" name="Notes Placeholder 2"/>
+          <p:cNvSpPr>
+            <a:spLocks noGrp="1"/>
+          </p:cNvSpPr>
+          <p:nvPr>
+            <p:ph type="body" idx="3" sz="quarter"/>
+          </p:nvPr>
+        </p:nvSpPr>
+        <p:spPr/>
+        <p:txBody>
+          <a:bodyPr/>
+          <a:lstStyle/>
+          <a:p>
+            <a:r>
+              <a:t>From MODULE4 Key Concepts.</a:t>
+            </a:r>
+          </a:p>
+        </p:txBody>
+      </p:sp>
+      <p:sp>
+        <p:nvSpPr>
+          <p:cNvPr id="4" name="Slide Number Placeholder 3"/>
+          <p:cNvSpPr>
+            <a:spLocks noGrp="1"/>
+          </p:cNvSpPr>
+          <p:nvPr>
+            <p:ph type="sldNum" idx="5" sz="quarter"/>
+          </p:nvPr>
+        </p:nvSpPr>
+        <p:spPr/>
+      </p:sp>
+    </p:spTree>
+  </p:cSld>
+  <p:clrMapOvr>
+    <a:masterClrMapping/>
+  </p:clrMapOvr>
+</p:notes>
+</file>
+
+<file path=ppt/notesSlides/notesSlide18.xml><?xml version="1.0" encoding="utf-8"?>
+<p:notes xmlns:a="http://schemas.openxmlformats.org/drawingml/2006/main" xmlns:p="http://schemas.openxmlformats.org/presentationml/2006/main" xmlns:r="http://schemas.openxmlformats.org/officeDocument/2006/relationships">
+  <p:cSld>
+    <p:spTree>
+      <p:nvGrpSpPr>
+        <p:cNvPr id="1" name=""/>
+        <p:cNvGrpSpPr/>
+        <p:nvPr/>
+      </p:nvGrpSpPr>
+      <p:grpSpPr>
+        <a:xfrm>
+          <a:off x="0" y="0"/>
+          <a:ext cx="0" cy="0"/>
+          <a:chOff x="0" y="0"/>
+          <a:chExt cx="0" cy="0"/>
+        </a:xfrm>
+      </p:grpSpPr>
+      <p:sp>
+        <p:nvSpPr>
+          <p:cNvPr id="2" name="Slide Image Placeholder 1"/>
+          <p:cNvSpPr>
+            <a:spLocks noGrp="1"/>
+          </p:cNvSpPr>
+          <p:nvPr>
+            <p:ph type="sldImg" idx="2"/>
+          </p:nvPr>
+        </p:nvSpPr>
+        <p:spPr/>
+      </p:sp>
+      <p:sp>
+        <p:nvSpPr>
+          <p:cNvPr id="3" name="Notes Placeholder 2"/>
+          <p:cNvSpPr>
+            <a:spLocks noGrp="1"/>
+          </p:cNvSpPr>
+          <p:nvPr>
+            <p:ph type="body" idx="3" sz="quarter"/>
+          </p:nvPr>
+        </p:nvSpPr>
+        <p:spPr/>
+        <p:txBody>
+          <a:bodyPr/>
+          <a:lstStyle/>
+          <a:p>
+            <a:r>
+              <a:t>From MODULE4 Common Pitfalls.</a:t>
+            </a:r>
+          </a:p>
+        </p:txBody>
+      </p:sp>
+      <p:sp>
+        <p:nvSpPr>
+          <p:cNvPr id="4" name="Slide Number Placeholder 3"/>
+          <p:cNvSpPr>
+            <a:spLocks noGrp="1"/>
+          </p:cNvSpPr>
+          <p:nvPr>
+            <p:ph type="sldNum" idx="5" sz="quarter"/>
+          </p:nvPr>
+        </p:nvSpPr>
+        <p:spPr/>
+      </p:sp>
+    </p:spTree>
+  </p:cSld>
+  <p:clrMapOvr>
+    <a:masterClrMapping/>
+  </p:clrMapOvr>
+</p:notes>
+</file>
+
+<file path=ppt/notesSlides/notesSlide19.xml><?xml version="1.0" encoding="utf-8"?>
+<p:notes xmlns:a="http://schemas.openxmlformats.org/drawingml/2006/main" xmlns:p="http://schemas.openxmlformats.org/presentationml/2006/main" xmlns:r="http://schemas.openxmlformats.org/officeDocument/2006/relationships">
+  <p:cSld>
+    <p:spTree>
+      <p:nvGrpSpPr>
+        <p:cNvPr id="1" name=""/>
+        <p:cNvGrpSpPr/>
+        <p:nvPr/>
+      </p:nvGrpSpPr>
+      <p:grpSpPr>
+        <a:xfrm>
+          <a:off x="0" y="0"/>
+          <a:ext cx="0" cy="0"/>
+          <a:chOff x="0" y="0"/>
+          <a:chExt cx="0" cy="0"/>
+        </a:xfrm>
+      </p:grpSpPr>
+      <p:sp>
+        <p:nvSpPr>
+          <p:cNvPr id="2" name="Slide Image Placeholder 1"/>
+          <p:cNvSpPr>
+            <a:spLocks noGrp="1"/>
+          </p:cNvSpPr>
+          <p:nvPr>
+            <p:ph type="sldImg" idx="2"/>
+          </p:nvPr>
+        </p:nvSpPr>
+        <p:spPr/>
+      </p:sp>
+      <p:sp>
+        <p:nvSpPr>
+          <p:cNvPr id="3" name="Notes Placeholder 2"/>
+          <p:cNvSpPr>
+            <a:spLocks noGrp="1"/>
+          </p:cNvSpPr>
+          <p:nvPr>
+            <p:ph type="body" idx="3" sz="quarter"/>
+          </p:nvPr>
+        </p:nvSpPr>
+        <p:spPr/>
+        <p:txBody>
+          <a:bodyPr/>
+          <a:lstStyle/>
+          <a:p>
+            <a:r>
+              <a:t>From MODULE4 Common Pitfalls.</a:t>
             </a:r>
           </a:p>
         </p:txBody>
@@ -907,6 +1340,76 @@
 </p:notes>
 </file>
 
+<file path=ppt/notesSlides/notesSlide20.xml><?xml version="1.0" encoding="utf-8"?>
+<p:notes xmlns:a="http://schemas.openxmlformats.org/drawingml/2006/main" xmlns:p="http://schemas.openxmlformats.org/presentationml/2006/main" xmlns:r="http://schemas.openxmlformats.org/officeDocument/2006/relationships">
+  <p:cSld>
+    <p:spTree>
+      <p:nvGrpSpPr>
+        <p:cNvPr id="1" name=""/>
+        <p:cNvGrpSpPr/>
+        <p:nvPr/>
+      </p:nvGrpSpPr>
+      <p:grpSpPr>
+        <a:xfrm>
+          <a:off x="0" y="0"/>
+          <a:ext cx="0" cy="0"/>
+          <a:chOff x="0" y="0"/>
+          <a:chExt cx="0" cy="0"/>
+        </a:xfrm>
+      </p:grpSpPr>
+      <p:sp>
+        <p:nvSpPr>
+          <p:cNvPr id="2" name="Slide Image Placeholder 1"/>
+          <p:cNvSpPr>
+            <a:spLocks noGrp="1"/>
+          </p:cNvSpPr>
+          <p:nvPr>
+            <p:ph type="sldImg" idx="2"/>
+          </p:nvPr>
+        </p:nvSpPr>
+        <p:spPr/>
+      </p:sp>
+      <p:sp>
+        <p:nvSpPr>
+          <p:cNvPr id="3" name="Notes Placeholder 2"/>
+          <p:cNvSpPr>
+            <a:spLocks noGrp="1"/>
+          </p:cNvSpPr>
+          <p:nvPr>
+            <p:ph type="body" idx="3" sz="quarter"/>
+          </p:nvPr>
+        </p:nvSpPr>
+        <p:spPr/>
+        <p:txBody>
+          <a:bodyPr/>
+          <a:lstStyle/>
+          <a:p>
+            <a:r>
+              <a:t>From MODULE4 Learning Outcomes.</a:t>
+            </a:r>
+          </a:p>
+        </p:txBody>
+      </p:sp>
+      <p:sp>
+        <p:nvSpPr>
+          <p:cNvPr id="4" name="Slide Number Placeholder 3"/>
+          <p:cNvSpPr>
+            <a:spLocks noGrp="1"/>
+          </p:cNvSpPr>
+          <p:nvPr>
+            <p:ph type="sldNum" idx="5" sz="quarter"/>
+          </p:nvPr>
+        </p:nvSpPr>
+        <p:spPr/>
+      </p:sp>
+    </p:spTree>
+  </p:cSld>
+  <p:clrMapOvr>
+    <a:masterClrMapping/>
+  </p:clrMapOvr>
+</p:notes>
+</file>
+
 <file path=ppt/notesSlides/notesSlide3.xml><?xml version="1.0" encoding="utf-8"?>
 <p:notes xmlns:a="http://schemas.openxmlformats.org/drawingml/2006/main" xmlns:p="http://schemas.openxmlformats.org/presentationml/2006/main" xmlns:r="http://schemas.openxmlformats.org/officeDocument/2006/relationships">
   <p:cSld>
@@ -1092,7 +1595,7 @@
           <a:lstStyle/>
           <a:p>
             <a:r>
-              <a:t>From MODULE4 Verification &amp; Testing Methods.</a:t>
+              <a:t>From MODULE4 — execution and artifact layout.</a:t>
             </a:r>
           </a:p>
         </p:txBody>
@@ -1162,7 +1665,7 @@
           <a:lstStyle/>
           <a:p>
             <a:r>
-              <a:t>From MODULE4 Verification &amp; Testing Methods.</a:t>
+              <a:t>Match each path to files under module/examples/.</a:t>
             </a:r>
           </a:p>
         </p:txBody>
@@ -1232,7 +1735,7 @@
           <a:lstStyle/>
           <a:p>
             <a:r>
-              <a:t>From MODULE4 Verification &amp; Testing Methods.</a:t>
+              <a:t>Trace while running module4/EXAMPLES.md labs.</a:t>
             </a:r>
           </a:p>
         </p:txBody>
@@ -1302,7 +1805,7 @@
           <a:lstStyle/>
           <a:p>
             <a:r>
-              <a:t>From MODULE4 Topics Covered.</a:t>
+              <a:t>From MODULE4 Verification &amp; Testing Methods.</a:t>
             </a:r>
           </a:p>
         </p:txBody>
@@ -1372,7 +1875,7 @@
           <a:lstStyle/>
           <a:p>
             <a:r>
-              <a:t>From MODULE4 Topics Covered.</a:t>
+              <a:t>From MODULE4 Verification &amp; Testing Methods.</a:t>
             </a:r>
           </a:p>
         </p:txBody>
@@ -4530,14 +5033,208 @@
               </a:defRPr>
             </a:pPr>
             <a:r>
-              <a:t>Verification environment architecture</a:t>
+              <a:t>2. UVM testbench hierarchy</a:t>
+            </a:r>
+          </a:p>
+        </p:txBody>
+      </p:sp>
+      <p:sp>
+        <p:nvSpPr>
+          <p:cNvPr id="3" name="TextBox 2"/>
+          <p:cNvSpPr txBox="1"/>
+          <p:nvPr/>
+        </p:nvSpPr>
+        <p:spPr>
+          <a:xfrm>
+            <a:off x="548640" y="1234440"/>
+            <a:ext cx="5303520" cy="4754880"/>
+          </a:xfrm>
+          <a:prstGeom prst="rect">
+            <a:avLst/>
+          </a:prstGeom>
+          <a:noFill/>
+        </p:spPr>
+        <p:txBody>
+          <a:bodyPr wrap="square">
+            <a:noAutofit/>
+          </a:bodyPr>
+          <a:lstStyle/>
+          <a:p>
+            <a:pPr>
+              <a:lnSpc>
+                <a:spcPts val="2200"/>
+              </a:lnSpc>
+              <a:spcAft>
+                <a:spcPts val="1000"/>
+              </a:spcAft>
+              <a:defRPr sz="2000" b="0">
+                <a:solidFill>
+                  <a:srgbClr val="333333"/>
+                </a:solidFill>
+                <a:latin typeface="Calibri"/>
+              </a:defRPr>
+            </a:pPr>
+            <a:r>
+              <a:t>• uart_tx_if: virtual interface</a:t>
+            </a:r>
+          </a:p>
+          <a:p>
+            <a:pPr>
+              <a:lnSpc>
+                <a:spcPts val="2200"/>
+              </a:lnSpc>
+              <a:spcAft>
+                <a:spcPts val="1000"/>
+              </a:spcAft>
+              <a:defRPr sz="2000" b="0">
+                <a:solidFill>
+                  <a:srgbClr val="333333"/>
+                </a:solidFill>
+                <a:latin typeface="Calibri"/>
+              </a:defRPr>
+            </a:pPr>
+            <a:r>
+              <a:t>      for driver/monitor.</a:t>
+            </a:r>
+          </a:p>
+          <a:p>
+            <a:pPr>
+              <a:lnSpc>
+                <a:spcPts val="2200"/>
+              </a:lnSpc>
+              <a:spcAft>
+                <a:spcPts val="1000"/>
+              </a:spcAft>
+              <a:defRPr sz="2000" b="0">
+                <a:solidFill>
+                  <a:srgbClr val="333333"/>
+                </a:solidFill>
+                <a:latin typeface="Calibri"/>
+              </a:defRPr>
+            </a:pPr>
+            <a:r>
+              <a:t>• UartTxTransaction / Sequence /</a:t>
+            </a:r>
+          </a:p>
+          <a:p>
+            <a:pPr>
+              <a:lnSpc>
+                <a:spcPts val="2200"/>
+              </a:lnSpc>
+              <a:spcAft>
+                <a:spcPts val="1000"/>
+              </a:spcAft>
+              <a:defRPr sz="2000" b="0">
+                <a:solidFill>
+                  <a:srgbClr val="333333"/>
+                </a:solidFill>
+                <a:latin typeface="Calibri"/>
+              </a:defRPr>
+            </a:pPr>
+            <a:r>
+              <a:t>      Driver / Monitor / Scoreboard /</a:t>
+            </a:r>
+          </a:p>
+          <a:p>
+            <a:pPr>
+              <a:lnSpc>
+                <a:spcPts val="2200"/>
+              </a:lnSpc>
+              <a:spcAft>
+                <a:spcPts val="1000"/>
+              </a:spcAft>
+              <a:defRPr sz="2000" b="0">
+                <a:solidFill>
+                  <a:srgbClr val="333333"/>
+                </a:solidFill>
+                <a:latin typeface="Calibri"/>
+              </a:defRPr>
+            </a:pPr>
+            <a:r>
+              <a:t>      Agent / Env / Test — same</a:t>
+            </a:r>
+          </a:p>
+          <a:p>
+            <a:pPr>
+              <a:lnSpc>
+                <a:spcPts val="2200"/>
+              </a:lnSpc>
+              <a:spcAft>
+                <a:spcPts val="1000"/>
+              </a:spcAft>
+              <a:defRPr sz="2000" b="0">
+                <a:solidFill>
+                  <a:srgbClr val="333333"/>
+                </a:solidFill>
+                <a:latin typeface="Calibri"/>
+              </a:defRPr>
+            </a:pPr>
+            <a:r>
+              <a:t>      pattern as…</a:t>
+            </a:r>
+          </a:p>
+          <a:p>
+            <a:pPr>
+              <a:lnSpc>
+                <a:spcPts val="2200"/>
+              </a:lnSpc>
+              <a:spcAft>
+                <a:spcPts val="1000"/>
+              </a:spcAft>
+              <a:defRPr sz="2000" b="0">
+                <a:solidFill>
+                  <a:srgbClr val="333333"/>
+                </a:solidFill>
+                <a:latin typeface="Calibri"/>
+              </a:defRPr>
+            </a:pPr>
+            <a:r>
+              <a:t>• Monitor reconstructs bytes from</a:t>
+            </a:r>
+          </a:p>
+          <a:p>
+            <a:pPr>
+              <a:lnSpc>
+                <a:spcPts val="2200"/>
+              </a:lnSpc>
+              <a:spcAft>
+                <a:spcPts val="1000"/>
+              </a:spcAft>
+              <a:defRPr sz="2000" b="0">
+                <a:solidFill>
+                  <a:srgbClr val="333333"/>
+                </a:solidFill>
+                <a:latin typeface="Calibri"/>
+              </a:defRPr>
+            </a:pPr>
+            <a:r>
+              <a:t>      the serial `tx` line using UART</a:t>
+            </a:r>
+          </a:p>
+          <a:p>
+            <a:pPr>
+              <a:lnSpc>
+                <a:spcPts val="2200"/>
+              </a:lnSpc>
+              <a:spcAft>
+                <a:spcPts val="1000"/>
+              </a:spcAft>
+              <a:defRPr sz="2000" b="0">
+                <a:solidFill>
+                  <a:srgbClr val="333333"/>
+                </a:solidFill>
+                <a:latin typeface="Calibri"/>
+              </a:defRPr>
+            </a:pPr>
+            <a:r>
+              <a:t>      8N1 rules.</a:t>
             </a:r>
           </a:p>
         </p:txBody>
       </p:sp>
       <p:pic>
         <p:nvPicPr>
-          <p:cNvPr id="3" name="Picture 2" descr="verification_architecture.png"/>
+          <p:cNvPr id="4" name="Picture 3" descr="verification_architecture.png"/>
           <p:cNvPicPr>
             <a:picLocks noChangeAspect="1"/>
           </p:cNvPicPr>
@@ -4551,53 +5248,14 @@
         </p:blipFill>
         <p:spPr>
           <a:xfrm>
-            <a:off x="548640" y="1143000"/>
-            <a:ext cx="8128000" cy="4572000"/>
+            <a:off x="6172200" y="2094547"/>
+            <a:ext cx="5394960" cy="3034665"/>
           </a:xfrm>
           <a:prstGeom prst="rect">
             <a:avLst/>
           </a:prstGeom>
         </p:spPr>
       </p:pic>
-      <p:sp>
-        <p:nvSpPr>
-          <p:cNvPr id="4" name="TextBox 3"/>
-          <p:cNvSpPr txBox="1"/>
-          <p:nvPr/>
-        </p:nvSpPr>
-        <p:spPr>
-          <a:xfrm>
-            <a:off x="548640" y="5897880"/>
-            <a:ext cx="11064240" cy="411480"/>
-          </a:xfrm>
-          <a:prstGeom prst="rect">
-            <a:avLst/>
-          </a:prstGeom>
-          <a:noFill/>
-        </p:spPr>
-        <p:txBody>
-          <a:bodyPr wrap="square">
-            <a:noAutofit/>
-          </a:bodyPr>
-          <a:lstStyle/>
-          <a:p>
-            <a:pPr>
-              <a:lnSpc>
-                <a:spcPts val="2200"/>
-              </a:lnSpc>
-              <a:defRPr sz="1200" b="0">
-                <a:solidFill>
-                  <a:srgbClr val="333333"/>
-                </a:solidFill>
-                <a:latin typeface="Calibri"/>
-              </a:defRPr>
-            </a:pPr>
-            <a:r>
-              <a:t>Module 4: UVM layers, agents, and checkers for this phase.</a:t>
-            </a:r>
-          </a:p>
-        </p:txBody>
-      </p:sp>
       <p:sp>
         <p:nvSpPr>
           <p:cNvPr id="5" name="TextBox 4"/>
@@ -4689,7 +5347,7 @@
               </a:defRPr>
             </a:pPr>
             <a:r>
-              <a:t>1. UART DUT (reused from Module 3)</a:t>
+              <a:t>3. Dual check paths</a:t>
             </a:r>
           </a:p>
         </p:txBody>
@@ -4703,7 +5361,7 @@
         <p:spPr>
           <a:xfrm>
             <a:off x="548640" y="1234440"/>
-            <a:ext cx="11064240" cy="4937760"/>
+            <a:ext cx="5303520" cy="4754880"/>
           </a:xfrm>
           <a:prstGeom prst="rect">
             <a:avLst/>
@@ -4731,7 +5389,7 @@
               </a:defRPr>
             </a:pPr>
             <a:r>
-              <a:t>• dut/: `uart_tx`, `uart_rx`, `baud_gen` — identical</a:t>
+              <a:t>• TX path: sequence → driver → DUT</a:t>
             </a:r>
           </a:p>
           <a:p>
@@ -4750,7 +5408,7 @@
               </a:defRPr>
             </a:pPr>
             <a:r>
-              <a:t>      RTL to `uart_baseline`.</a:t>
+              <a:t>      → monitor → scoreboard</a:t>
             </a:r>
           </a:p>
           <a:p>
@@ -4769,7 +5427,7 @@
               </a:defRPr>
             </a:pPr>
             <a:r>
-              <a:t>• Loopback in top: `rx = tx` for closed-loop checking.</a:t>
+              <a:t>      (`observed_tx`).</a:t>
             </a:r>
           </a:p>
           <a:p>
@@ -4788,7 +5446,7 @@
               </a:defRPr>
             </a:pPr>
             <a:r>
-              <a:t>• Why reuse: Upgrade verification (UVM) without</a:t>
+              <a:t>• RX path: loopback into</a:t>
             </a:r>
           </a:p>
           <a:p>
@@ -4807,14 +5465,57 @@
               </a:defRPr>
             </a:pPr>
             <a:r>
-              <a:t>      touching proven RTL.</a:t>
-            </a:r>
-          </a:p>
-        </p:txBody>
-      </p:sp>
-      <p:sp>
-        <p:nvSpPr>
-          <p:cNvPr id="4" name="TextBox 3"/>
+              <a:t>      `uart_rx`; `check_rx_byte()`</a:t>
+            </a:r>
+          </a:p>
+          <a:p>
+            <a:pPr>
+              <a:lnSpc>
+                <a:spcPts val="2200"/>
+              </a:lnSpc>
+              <a:spcAft>
+                <a:spcPts val="1000"/>
+              </a:spcAft>
+              <a:defRPr sz="2000" b="0">
+                <a:solidFill>
+                  <a:srgbClr val="333333"/>
+                </a:solidFill>
+                <a:latin typeface="Calibri"/>
+              </a:defRPr>
+            </a:pPr>
+            <a:r>
+              <a:t>      when `data_valid` asserts.</a:t>
+            </a:r>
+          </a:p>
+        </p:txBody>
+      </p:sp>
+      <p:pic>
+        <p:nvPicPr>
+          <p:cNvPr id="4" name="Picture 3" descr="testing_methods.png"/>
+          <p:cNvPicPr>
+            <a:picLocks noChangeAspect="1"/>
+          </p:cNvPicPr>
+          <p:nvPr/>
+        </p:nvPicPr>
+        <p:blipFill>
+          <a:blip r:embed="rId2"/>
+          <a:stretch>
+            <a:fillRect/>
+          </a:stretch>
+        </p:blipFill>
+        <p:spPr>
+          <a:xfrm>
+            <a:off x="6172200" y="2094547"/>
+            <a:ext cx="5394960" cy="3034665"/>
+          </a:xfrm>
+          <a:prstGeom prst="rect">
+            <a:avLst/>
+          </a:prstGeom>
+        </p:spPr>
+      </p:pic>
+      <p:sp>
+        <p:nvSpPr>
+          <p:cNvPr id="5" name="TextBox 4"/>
           <p:cNvSpPr txBox="1"/>
           <p:nvPr/>
         </p:nvSpPr>
@@ -4903,21 +5604,45 @@
               </a:defRPr>
             </a:pPr>
             <a:r>
-              <a:t>2. UVM testbench hierarchy</a:t>
-            </a:r>
-          </a:p>
-        </p:txBody>
-      </p:sp>
-      <p:sp>
-        <p:nvSpPr>
-          <p:cNvPr id="3" name="TextBox 2"/>
+              <a:t>RTL block diagram (reference)</a:t>
+            </a:r>
+          </a:p>
+        </p:txBody>
+      </p:sp>
+      <p:pic>
+        <p:nvPicPr>
+          <p:cNvPr id="3" name="Picture 2" descr="rtl_architecture.png"/>
+          <p:cNvPicPr>
+            <a:picLocks noChangeAspect="1"/>
+          </p:cNvPicPr>
+          <p:nvPr/>
+        </p:nvPicPr>
+        <p:blipFill>
+          <a:blip r:embed="rId2"/>
+          <a:stretch>
+            <a:fillRect/>
+          </a:stretch>
+        </p:blipFill>
+        <p:spPr>
+          <a:xfrm>
+            <a:off x="548640" y="1143000"/>
+            <a:ext cx="8128000" cy="4572000"/>
+          </a:xfrm>
+          <a:prstGeom prst="rect">
+            <a:avLst/>
+          </a:prstGeom>
+        </p:spPr>
+      </p:pic>
+      <p:sp>
+        <p:nvSpPr>
+          <p:cNvPr id="4" name="TextBox 3"/>
           <p:cNvSpPr txBox="1"/>
           <p:nvPr/>
         </p:nvSpPr>
         <p:spPr>
           <a:xfrm>
-            <a:off x="548640" y="1234440"/>
-            <a:ext cx="11064240" cy="4937760"/>
+            <a:off x="548640" y="5897880"/>
+            <a:ext cx="11064240" cy="411480"/>
           </a:xfrm>
           <a:prstGeom prst="rect">
             <a:avLst/>
@@ -4934,101 +5659,22 @@
               <a:lnSpc>
                 <a:spcPts val="2200"/>
               </a:lnSpc>
-              <a:spcAft>
-                <a:spcPts val="1000"/>
-              </a:spcAft>
-              <a:defRPr sz="2000" b="0">
-                <a:solidFill>
-                  <a:srgbClr val="333333"/>
-                </a:solidFill>
-                <a:latin typeface="Calibri"/>
-              </a:defRPr>
-            </a:pPr>
-            <a:r>
-              <a:t>• uart_tx_if: virtual interface for driver/monitor.</a:t>
-            </a:r>
-          </a:p>
-          <a:p>
-            <a:pPr>
-              <a:lnSpc>
-                <a:spcPts val="2200"/>
-              </a:lnSpc>
-              <a:spcAft>
-                <a:spcPts val="1000"/>
-              </a:spcAft>
-              <a:defRPr sz="2000" b="0">
-                <a:solidFill>
-                  <a:srgbClr val="333333"/>
-                </a:solidFill>
-                <a:latin typeface="Calibri"/>
-              </a:defRPr>
-            </a:pPr>
-            <a:r>
-              <a:t>• UartTxTransaction / Sequence / Driver / Monitor /</a:t>
-            </a:r>
-          </a:p>
-          <a:p>
-            <a:pPr>
-              <a:lnSpc>
-                <a:spcPts val="2200"/>
-              </a:lnSpc>
-              <a:spcAft>
-                <a:spcPts val="1000"/>
-              </a:spcAft>
-              <a:defRPr sz="2000" b="0">
-                <a:solidFill>
-                  <a:srgbClr val="333333"/>
-                </a:solidFill>
-                <a:latin typeface="Calibri"/>
-              </a:defRPr>
-            </a:pPr>
-            <a:r>
-              <a:t>      Scoreboard / Agent / Env / Test — same pattern as…</a:t>
-            </a:r>
-          </a:p>
-          <a:p>
-            <a:pPr>
-              <a:lnSpc>
-                <a:spcPts val="2200"/>
-              </a:lnSpc>
-              <a:spcAft>
-                <a:spcPts val="1000"/>
-              </a:spcAft>
-              <a:defRPr sz="2000" b="0">
-                <a:solidFill>
-                  <a:srgbClr val="333333"/>
-                </a:solidFill>
-                <a:latin typeface="Calibri"/>
-              </a:defRPr>
-            </a:pPr>
-            <a:r>
-              <a:t>• Monitor reconstructs bytes from the serial `tx` line</a:t>
-            </a:r>
-          </a:p>
-          <a:p>
-            <a:pPr>
-              <a:lnSpc>
-                <a:spcPts val="2200"/>
-              </a:lnSpc>
-              <a:spcAft>
-                <a:spcPts val="1000"/>
-              </a:spcAft>
-              <a:defRPr sz="2000" b="0">
-                <a:solidFill>
-                  <a:srgbClr val="333333"/>
-                </a:solidFill>
-                <a:latin typeface="Calibri"/>
-              </a:defRPr>
-            </a:pPr>
-            <a:r>
-              <a:t>      using UART 8N1 rules.</a:t>
-            </a:r>
-          </a:p>
-        </p:txBody>
-      </p:sp>
-      <p:sp>
-        <p:nvSpPr>
-          <p:cNvPr id="4" name="TextBox 3"/>
+              <a:defRPr sz="1200" b="0">
+                <a:solidFill>
+                  <a:srgbClr val="333333"/>
+                </a:solidFill>
+                <a:latin typeface="Calibri"/>
+              </a:defRPr>
+            </a:pPr>
+            <a:r>
+              <a:t>Module 4: DUT hierarchy and signal flow.</a:t>
+            </a:r>
+          </a:p>
+        </p:txBody>
+      </p:sp>
+      <p:sp>
+        <p:nvSpPr>
+          <p:cNvPr id="5" name="TextBox 4"/>
           <p:cNvSpPr txBox="1"/>
           <p:nvPr/>
         </p:nvSpPr>
@@ -5117,21 +5763,45 @@
               </a:defRPr>
             </a:pPr>
             <a:r>
-              <a:t>3. Dual check paths</a:t>
-            </a:r>
-          </a:p>
-        </p:txBody>
-      </p:sp>
-      <p:sp>
-        <p:nvSpPr>
-          <p:cNvPr id="3" name="TextBox 2"/>
+              <a:t>Verification / testbench diagram (reference)</a:t>
+            </a:r>
+          </a:p>
+        </p:txBody>
+      </p:sp>
+      <p:pic>
+        <p:nvPicPr>
+          <p:cNvPr id="3" name="Picture 2" descr="verification_architecture.png"/>
+          <p:cNvPicPr>
+            <a:picLocks noChangeAspect="1"/>
+          </p:cNvPicPr>
+          <p:nvPr/>
+        </p:nvPicPr>
+        <p:blipFill>
+          <a:blip r:embed="rId2"/>
+          <a:stretch>
+            <a:fillRect/>
+          </a:stretch>
+        </p:blipFill>
+        <p:spPr>
+          <a:xfrm>
+            <a:off x="548640" y="1143000"/>
+            <a:ext cx="8128000" cy="4572000"/>
+          </a:xfrm>
+          <a:prstGeom prst="rect">
+            <a:avLst/>
+          </a:prstGeom>
+        </p:spPr>
+      </p:pic>
+      <p:sp>
+        <p:nvSpPr>
+          <p:cNvPr id="4" name="TextBox 3"/>
           <p:cNvSpPr txBox="1"/>
           <p:nvPr/>
         </p:nvSpPr>
         <p:spPr>
           <a:xfrm>
-            <a:off x="548640" y="1234440"/>
-            <a:ext cx="11064240" cy="4937760"/>
+            <a:off x="548640" y="5897880"/>
+            <a:ext cx="11064240" cy="411480"/>
           </a:xfrm>
           <a:prstGeom prst="rect">
             <a:avLst/>
@@ -5148,82 +5818,22 @@
               <a:lnSpc>
                 <a:spcPts val="2200"/>
               </a:lnSpc>
-              <a:spcAft>
-                <a:spcPts val="1000"/>
-              </a:spcAft>
-              <a:defRPr sz="2000" b="0">
-                <a:solidFill>
-                  <a:srgbClr val="333333"/>
-                </a:solidFill>
-                <a:latin typeface="Calibri"/>
-              </a:defRPr>
-            </a:pPr>
-            <a:r>
-              <a:t>• TX path: sequence → driver → DUT → monitor →</a:t>
-            </a:r>
-          </a:p>
-          <a:p>
-            <a:pPr>
-              <a:lnSpc>
-                <a:spcPts val="2200"/>
-              </a:lnSpc>
-              <a:spcAft>
-                <a:spcPts val="1000"/>
-              </a:spcAft>
-              <a:defRPr sz="2000" b="0">
-                <a:solidFill>
-                  <a:srgbClr val="333333"/>
-                </a:solidFill>
-                <a:latin typeface="Calibri"/>
-              </a:defRPr>
-            </a:pPr>
-            <a:r>
-              <a:t>      scoreboard (`observed_tx`).</a:t>
-            </a:r>
-          </a:p>
-          <a:p>
-            <a:pPr>
-              <a:lnSpc>
-                <a:spcPts val="2200"/>
-              </a:lnSpc>
-              <a:spcAft>
-                <a:spcPts val="1000"/>
-              </a:spcAft>
-              <a:defRPr sz="2000" b="0">
-                <a:solidFill>
-                  <a:srgbClr val="333333"/>
-                </a:solidFill>
-                <a:latin typeface="Calibri"/>
-              </a:defRPr>
-            </a:pPr>
-            <a:r>
-              <a:t>• RX path: loopback into `uart_rx`; `check_rx_byte()`</a:t>
-            </a:r>
-          </a:p>
-          <a:p>
-            <a:pPr>
-              <a:lnSpc>
-                <a:spcPts val="2200"/>
-              </a:lnSpc>
-              <a:spcAft>
-                <a:spcPts val="1000"/>
-              </a:spcAft>
-              <a:defRPr sz="2000" b="0">
-                <a:solidFill>
-                  <a:srgbClr val="333333"/>
-                </a:solidFill>
-                <a:latin typeface="Calibri"/>
-              </a:defRPr>
-            </a:pPr>
-            <a:r>
-              <a:t>      when `data_valid` asserts.</a:t>
-            </a:r>
-          </a:p>
-        </p:txBody>
-      </p:sp>
-      <p:sp>
-        <p:nvSpPr>
-          <p:cNvPr id="4" name="TextBox 3"/>
+              <a:defRPr sz="1200" b="0">
+                <a:solidFill>
+                  <a:srgbClr val="333333"/>
+                </a:solidFill>
+                <a:latin typeface="Calibri"/>
+              </a:defRPr>
+            </a:pPr>
+            <a:r>
+              <a:t>Module 4: stimulus, observation, and checking.</a:t>
+            </a:r>
+          </a:p>
+        </p:txBody>
+      </p:sp>
+      <p:sp>
+        <p:nvSpPr>
+          <p:cNvPr id="5" name="TextBox 4"/>
           <p:cNvSpPr txBox="1"/>
           <p:nvPr/>
         </p:nvSpPr>
@@ -5286,8 +5896,8 @@
         </p:nvSpPr>
         <p:spPr>
           <a:xfrm>
-            <a:off x="548640" y="2743200"/>
-            <a:ext cx="11064240" cy="1371600"/>
+            <a:off x="548640" y="411480"/>
+            <a:ext cx="11064240" cy="777240"/>
           </a:xfrm>
           <a:prstGeom prst="rect">
             <a:avLst/>
@@ -5300,11 +5910,11 @@
           </a:bodyPr>
           <a:lstStyle/>
           <a:p>
-            <a:pPr algn="ctr">
-              <a:lnSpc>
-                <a:spcPts val="2200"/>
-              </a:lnSpc>
-              <a:defRPr sz="3600" b="1">
+            <a:pPr>
+              <a:lnSpc>
+                <a:spcPts val="2200"/>
+              </a:lnSpc>
+              <a:defRPr sz="2800" b="1">
                 <a:solidFill>
                   <a:srgbClr val="1A1A2E"/>
                 </a:solidFill>
@@ -5312,7 +5922,7 @@
               </a:defRPr>
             </a:pPr>
             <a:r>
-              <a:t>Verification &amp; testing methods</a:t>
+              <a:t>UartTxDriver — bit timing</a:t>
             </a:r>
           </a:p>
         </p:txBody>
@@ -5320,6 +5930,364 @@
       <p:sp>
         <p:nvSpPr>
           <p:cNvPr id="3" name="TextBox 2"/>
+          <p:cNvSpPr txBox="1"/>
+          <p:nvPr/>
+        </p:nvSpPr>
+        <p:spPr>
+          <a:xfrm>
+            <a:off x="548640" y="1143000"/>
+            <a:ext cx="11064240" cy="5029200"/>
+          </a:xfrm>
+          <a:prstGeom prst="rect">
+            <a:avLst/>
+          </a:prstGeom>
+          <a:solidFill>
+            <a:srgbClr val="F4F4F4"/>
+          </a:solidFill>
+        </p:spPr>
+        <p:txBody>
+          <a:bodyPr wrap="square">
+            <a:noAutofit/>
+          </a:bodyPr>
+          <a:lstStyle/>
+          <a:p>
+            <a:pPr>
+              <a:lnSpc>
+                <a:spcPts val="2200"/>
+              </a:lnSpc>
+              <a:spcAft>
+                <a:spcPts val="400"/>
+              </a:spcAft>
+              <a:defRPr sz="2000" b="0">
+                <a:solidFill>
+                  <a:srgbClr val="333333"/>
+                </a:solidFill>
+                <a:latin typeface="Consolas"/>
+              </a:defRPr>
+            </a:pPr>
+            <a:r>
+              <a:t>txn.data = 8'hFF;</a:t>
+            </a:r>
+          </a:p>
+          <a:p>
+            <a:pPr>
+              <a:lnSpc>
+                <a:spcPts val="2200"/>
+              </a:lnSpc>
+              <a:spcAft>
+                <a:spcPts val="400"/>
+              </a:spcAft>
+              <a:defRPr sz="2000" b="0">
+                <a:solidFill>
+                  <a:srgbClr val="333333"/>
+                </a:solidFill>
+                <a:latin typeface="Consolas"/>
+              </a:defRPr>
+            </a:pPr>
+            <a:r>
+              <a:t>        start_item(txn);</a:t>
+            </a:r>
+          </a:p>
+          <a:p>
+            <a:pPr>
+              <a:lnSpc>
+                <a:spcPts val="2200"/>
+              </a:lnSpc>
+              <a:spcAft>
+                <a:spcPts val="400"/>
+              </a:spcAft>
+              <a:defRPr sz="2000" b="0">
+                <a:solidFill>
+                  <a:srgbClr val="333333"/>
+                </a:solidFill>
+                <a:latin typeface="Consolas"/>
+              </a:defRPr>
+            </a:pPr>
+            <a:r>
+              <a:t>        finish_item(txn);</a:t>
+            </a:r>
+          </a:p>
+          <a:p>
+            <a:pPr>
+              <a:lnSpc>
+                <a:spcPts val="2200"/>
+              </a:lnSpc>
+              <a:spcAft>
+                <a:spcPts val="400"/>
+              </a:spcAft>
+              <a:defRPr sz="2000" b="0">
+                <a:solidFill>
+                  <a:srgbClr val="333333"/>
+                </a:solidFill>
+                <a:latin typeface="Consolas"/>
+              </a:defRPr>
+            </a:pPr>
+            <a:r>
+              <a:t>    endtask</a:t>
+            </a:r>
+          </a:p>
+          <a:p>
+            <a:pPr>
+              <a:lnSpc>
+                <a:spcPts val="2200"/>
+              </a:lnSpc>
+              <a:spcAft>
+                <a:spcPts val="400"/>
+              </a:spcAft>
+              <a:defRPr sz="2000" b="0">
+                <a:solidFill>
+                  <a:srgbClr val="333333"/>
+                </a:solidFill>
+                <a:latin typeface="Consolas"/>
+              </a:defRPr>
+            </a:pPr>
+            <a:r>
+              <a:t>endclass</a:t>
+            </a:r>
+          </a:p>
+          <a:p>
+            <a:pPr>
+              <a:lnSpc>
+                <a:spcPts val="2200"/>
+              </a:lnSpc>
+              <a:spcAft>
+                <a:spcPts val="400"/>
+              </a:spcAft>
+              <a:defRPr sz="2000" b="0">
+                <a:solidFill>
+                  <a:srgbClr val="333333"/>
+                </a:solidFill>
+                <a:latin typeface="Consolas"/>
+              </a:defRPr>
+            </a:pPr>
+          </a:p>
+          <a:p>
+            <a:pPr>
+              <a:lnSpc>
+                <a:spcPts val="2200"/>
+              </a:lnSpc>
+              <a:spcAft>
+                <a:spcPts val="400"/>
+              </a:spcAft>
+              <a:defRPr sz="2000" b="0">
+                <a:solidFill>
+                  <a:srgbClr val="333333"/>
+                </a:solidFill>
+                <a:latin typeface="Consolas"/>
+              </a:defRPr>
+            </a:pPr>
+            <a:r>
+              <a:t>// ---------------------------------------------------------------------</a:t>
+            </a:r>
+          </a:p>
+          <a:p>
+            <a:pPr>
+              <a:lnSpc>
+                <a:spcPts val="2200"/>
+              </a:lnSpc>
+              <a:spcAft>
+                <a:spcPts val="400"/>
+              </a:spcAft>
+              <a:defRPr sz="2000" b="0">
+                <a:solidFill>
+                  <a:srgbClr val="333333"/>
+                </a:solidFill>
+                <a:latin typeface="Consolas"/>
+              </a:defRPr>
+            </a:pPr>
+            <a:r>
+              <a:t>--------</a:t>
+            </a:r>
+          </a:p>
+          <a:p>
+            <a:pPr>
+              <a:lnSpc>
+                <a:spcPts val="2200"/>
+              </a:lnSpc>
+              <a:spcAft>
+                <a:spcPts val="400"/>
+              </a:spcAft>
+              <a:defRPr sz="2000" b="0">
+                <a:solidFill>
+                  <a:srgbClr val="333333"/>
+                </a:solidFill>
+                <a:latin typeface="Consolas"/>
+              </a:defRPr>
+            </a:pPr>
+            <a:r>
+              <a:t>// Driver</a:t>
+            </a:r>
+          </a:p>
+          <a:p>
+            <a:pPr>
+              <a:lnSpc>
+                <a:spcPts val="2200"/>
+              </a:lnSpc>
+              <a:spcAft>
+                <a:spcPts val="400"/>
+              </a:spcAft>
+              <a:defRPr sz="2000" b="0">
+                <a:solidFill>
+                  <a:srgbClr val="333333"/>
+                </a:solidFill>
+                <a:latin typeface="Consolas"/>
+              </a:defRPr>
+            </a:pPr>
+            <a:r>
+              <a:t>// ---------------------------------------------------------------------</a:t>
+            </a:r>
+          </a:p>
+          <a:p>
+            <a:pPr>
+              <a:lnSpc>
+                <a:spcPts val="2200"/>
+              </a:lnSpc>
+              <a:spcAft>
+                <a:spcPts val="400"/>
+              </a:spcAft>
+              <a:defRPr sz="2000" b="0">
+                <a:solidFill>
+                  <a:srgbClr val="333333"/>
+                </a:solidFill>
+                <a:latin typeface="Consolas"/>
+              </a:defRPr>
+            </a:pPr>
+            <a:r>
+              <a:t>--------</a:t>
+            </a:r>
+          </a:p>
+          <a:p>
+            <a:pPr>
+              <a:lnSpc>
+                <a:spcPts val="2200"/>
+              </a:lnSpc>
+              <a:spcAft>
+                <a:spcPts val="400"/>
+              </a:spcAft>
+              <a:defRPr sz="2000" b="0">
+                <a:solidFill>
+                  <a:srgbClr val="333333"/>
+                </a:solidFill>
+                <a:latin typeface="Consolas"/>
+              </a:defRPr>
+            </a:pPr>
+            <a:r>
+              <a:t>class UartTxDriver extends uvm_driver #(UartTxTransaction);</a:t>
+            </a:r>
+          </a:p>
+          <a:p>
+            <a:pPr>
+              <a:lnSpc>
+                <a:spcPts val="2200"/>
+              </a:lnSpc>
+              <a:spcAft>
+                <a:spcPts val="400"/>
+              </a:spcAft>
+              <a:defRPr sz="2000" b="0">
+                <a:solidFill>
+                  <a:srgbClr val="333333"/>
+                </a:solidFill>
+                <a:latin typeface="Consolas"/>
+              </a:defRPr>
+            </a:pPr>
+            <a:r>
+              <a:t>    virtual uart_tx_if vif;</a:t>
+            </a:r>
+          </a:p>
+          <a:p>
+            <a:pPr>
+              <a:lnSpc>
+                <a:spcPts val="2200"/>
+              </a:lnSpc>
+              <a:spcAft>
+                <a:spcPts val="400"/>
+              </a:spcAft>
+              <a:defRPr sz="2000" b="0">
+                <a:solidFill>
+                  <a:srgbClr val="333333"/>
+                </a:solidFill>
+                <a:latin typeface="Consolas"/>
+              </a:defRPr>
+            </a:pPr>
+          </a:p>
+          <a:p>
+            <a:pPr>
+              <a:lnSpc>
+                <a:spcPts val="2200"/>
+              </a:lnSpc>
+              <a:spcAft>
+                <a:spcPts val="400"/>
+              </a:spcAft>
+              <a:defRPr sz="2000" b="0">
+                <a:solidFill>
+                  <a:srgbClr val="333333"/>
+                </a:solidFill>
+                <a:latin typeface="Consolas"/>
+              </a:defRPr>
+            </a:pPr>
+            <a:r>
+              <a:t>    `uvm_component_utils(UartTxDriver)</a:t>
+            </a:r>
+          </a:p>
+          <a:p>
+            <a:pPr>
+              <a:lnSpc>
+                <a:spcPts val="2200"/>
+              </a:lnSpc>
+              <a:spcAft>
+                <a:spcPts val="400"/>
+              </a:spcAft>
+              <a:defRPr sz="2000" b="0">
+                <a:solidFill>
+                  <a:srgbClr val="333333"/>
+                </a:solidFill>
+                <a:latin typeface="Consolas"/>
+              </a:defRPr>
+            </a:pPr>
+          </a:p>
+          <a:p>
+            <a:pPr>
+              <a:lnSpc>
+                <a:spcPts val="2200"/>
+              </a:lnSpc>
+              <a:spcAft>
+                <a:spcPts val="400"/>
+              </a:spcAft>
+              <a:defRPr sz="2000" b="0">
+                <a:solidFill>
+                  <a:srgbClr val="333333"/>
+                </a:solidFill>
+                <a:latin typeface="Consolas"/>
+              </a:defRPr>
+            </a:pPr>
+            <a:r>
+              <a:t>    function new(string name, uvm_component parent);</a:t>
+            </a:r>
+          </a:p>
+          <a:p>
+            <a:pPr>
+              <a:lnSpc>
+                <a:spcPts val="2200"/>
+              </a:lnSpc>
+              <a:spcAft>
+                <a:spcPts val="400"/>
+              </a:spcAft>
+              <a:defRPr sz="2000" b="0">
+                <a:solidFill>
+                  <a:srgbClr val="333333"/>
+                </a:solidFill>
+                <a:latin typeface="Consolas"/>
+              </a:defRPr>
+            </a:pPr>
+            <a:r>
+              <a:t>        super.new(name, parent);</a:t>
+            </a:r>
+          </a:p>
+        </p:txBody>
+      </p:sp>
+      <p:sp>
+        <p:nvSpPr>
+          <p:cNvPr id="4" name="TextBox 3"/>
           <p:cNvSpPr txBox="1"/>
           <p:nvPr/>
         </p:nvSpPr>
@@ -5408,50 +6376,28 @@
               </a:defRPr>
             </a:pPr>
             <a:r>
-              <a:t>Testing and closure flow</a:t>
-            </a:r>
-          </a:p>
-        </p:txBody>
-      </p:sp>
-      <p:pic>
-        <p:nvPicPr>
-          <p:cNvPr id="3" name="Picture 2" descr="testing_methods.png"/>
-          <p:cNvPicPr>
-            <a:picLocks noChangeAspect="1"/>
-          </p:cNvPicPr>
+              <a:t>UartTxTransaction &amp; agent</a:t>
+            </a:r>
+          </a:p>
+        </p:txBody>
+      </p:sp>
+      <p:sp>
+        <p:nvSpPr>
+          <p:cNvPr id="3" name="TextBox 2"/>
+          <p:cNvSpPr txBox="1"/>
           <p:nvPr/>
-        </p:nvPicPr>
-        <p:blipFill>
-          <a:blip r:embed="rId2"/>
-          <a:stretch>
-            <a:fillRect/>
-          </a:stretch>
-        </p:blipFill>
+        </p:nvSpPr>
         <p:spPr>
           <a:xfrm>
             <a:off x="548640" y="1143000"/>
-            <a:ext cx="8128000" cy="4572000"/>
+            <a:ext cx="11064240" cy="5029200"/>
           </a:xfrm>
           <a:prstGeom prst="rect">
             <a:avLst/>
           </a:prstGeom>
-        </p:spPr>
-      </p:pic>
-      <p:sp>
-        <p:nvSpPr>
-          <p:cNvPr id="4" name="TextBox 3"/>
-          <p:cNvSpPr txBox="1"/>
-          <p:nvPr/>
-        </p:nvSpPr>
-        <p:spPr>
-          <a:xfrm>
-            <a:off x="548640" y="5897880"/>
-            <a:ext cx="11064240" cy="411480"/>
-          </a:xfrm>
-          <a:prstGeom prst="rect">
-            <a:avLst/>
-          </a:prstGeom>
-          <a:noFill/>
+          <a:solidFill>
+            <a:srgbClr val="F4F4F4"/>
+          </a:solidFill>
         </p:spPr>
         <p:txBody>
           <a:bodyPr wrap="square">
@@ -5463,22 +6409,339 @@
               <a:lnSpc>
                 <a:spcPts val="2200"/>
               </a:lnSpc>
-              <a:defRPr sz="1200" b="0">
-                <a:solidFill>
-                  <a:srgbClr val="333333"/>
-                </a:solidFill>
-                <a:latin typeface="Calibri"/>
-              </a:defRPr>
-            </a:pPr>
-            <a:r>
-              <a:t>Module 4: how tests, checks, and metrics close verification goals.</a:t>
-            </a:r>
-          </a:p>
-        </p:txBody>
-      </p:sp>
-      <p:sp>
-        <p:nvSpPr>
-          <p:cNvPr id="5" name="TextBox 4"/>
+              <a:spcAft>
+                <a:spcPts val="400"/>
+              </a:spcAft>
+              <a:defRPr sz="2000" b="0">
+                <a:solidFill>
+                  <a:srgbClr val="333333"/>
+                </a:solidFill>
+                <a:latin typeface="Consolas"/>
+              </a:defRPr>
+            </a:pPr>
+            <a:r>
+              <a:t>/**</a:t>
+            </a:r>
+          </a:p>
+          <a:p>
+            <a:pPr>
+              <a:lnSpc>
+                <a:spcPts val="2200"/>
+              </a:lnSpc>
+              <a:spcAft>
+                <a:spcPts val="400"/>
+              </a:spcAft>
+              <a:defRPr sz="2000" b="0">
+                <a:solidFill>
+                  <a:srgbClr val="333333"/>
+                </a:solidFill>
+                <a:latin typeface="Consolas"/>
+              </a:defRPr>
+            </a:pPr>
+            <a:r>
+              <a:t> * Module 4: UART TX/RX UVM test (Verilator)</a:t>
+            </a:r>
+          </a:p>
+          <a:p>
+            <a:pPr>
+              <a:lnSpc>
+                <a:spcPts val="2200"/>
+              </a:lnSpc>
+              <a:spcAft>
+                <a:spcPts val="400"/>
+              </a:spcAft>
+              <a:defRPr sz="2000" b="0">
+                <a:solidFill>
+                  <a:srgbClr val="333333"/>
+                </a:solidFill>
+                <a:latin typeface="Consolas"/>
+              </a:defRPr>
+            </a:pPr>
+            <a:r>
+              <a:t> *</a:t>
+            </a:r>
+          </a:p>
+          <a:p>
+            <a:pPr>
+              <a:lnSpc>
+                <a:spcPts val="2200"/>
+              </a:lnSpc>
+              <a:spcAft>
+                <a:spcPts val="400"/>
+              </a:spcAft>
+              <a:defRPr sz="2000" b="0">
+                <a:solidFill>
+                  <a:srgbClr val="333333"/>
+                </a:solidFill>
+                <a:latin typeface="Consolas"/>
+              </a:defRPr>
+            </a:pPr>
+            <a:r>
+              <a:t> * UART agent: transaction, sequence, driver, monitor, scoreboard.</a:t>
+            </a:r>
+          </a:p>
+          <a:p>
+            <a:pPr>
+              <a:lnSpc>
+                <a:spcPts val="2200"/>
+              </a:lnSpc>
+              <a:spcAft>
+                <a:spcPts val="400"/>
+              </a:spcAft>
+              <a:defRPr sz="2000" b="0">
+                <a:solidFill>
+                  <a:srgbClr val="333333"/>
+                </a:solidFill>
+                <a:latin typeface="Consolas"/>
+              </a:defRPr>
+            </a:pPr>
+            <a:r>
+              <a:t> * Loopback: TX output -&gt; RX input; scoreboard checks TX (monitor) and</a:t>
+            </a:r>
+          </a:p>
+          <a:p>
+            <a:pPr>
+              <a:lnSpc>
+                <a:spcPts val="2200"/>
+              </a:lnSpc>
+              <a:spcAft>
+                <a:spcPts val="400"/>
+              </a:spcAft>
+              <a:defRPr sz="2000" b="0">
+                <a:solidFill>
+                  <a:srgbClr val="333333"/>
+                </a:solidFill>
+                <a:latin typeface="Consolas"/>
+              </a:defRPr>
+            </a:pPr>
+            <a:r>
+              <a:t>RX (hook).</a:t>
+            </a:r>
+          </a:p>
+          <a:p>
+            <a:pPr>
+              <a:lnSpc>
+                <a:spcPts val="2200"/>
+              </a:lnSpc>
+              <a:spcAft>
+                <a:spcPts val="400"/>
+              </a:spcAft>
+              <a:defRPr sz="2000" b="0">
+                <a:solidFill>
+                  <a:srgbClr val="333333"/>
+                </a:solidFill>
+                <a:latin typeface="Consolas"/>
+              </a:defRPr>
+            </a:pPr>
+            <a:r>
+              <a:t> */</a:t>
+            </a:r>
+          </a:p>
+          <a:p>
+            <a:pPr>
+              <a:lnSpc>
+                <a:spcPts val="2200"/>
+              </a:lnSpc>
+              <a:spcAft>
+                <a:spcPts val="400"/>
+              </a:spcAft>
+              <a:defRPr sz="2000" b="0">
+                <a:solidFill>
+                  <a:srgbClr val="333333"/>
+                </a:solidFill>
+                <a:latin typeface="Consolas"/>
+              </a:defRPr>
+            </a:pPr>
+          </a:p>
+          <a:p>
+            <a:pPr>
+              <a:lnSpc>
+                <a:spcPts val="2200"/>
+              </a:lnSpc>
+              <a:spcAft>
+                <a:spcPts val="400"/>
+              </a:spcAft>
+              <a:defRPr sz="2000" b="0">
+                <a:solidFill>
+                  <a:srgbClr val="333333"/>
+                </a:solidFill>
+                <a:latin typeface="Consolas"/>
+              </a:defRPr>
+            </a:pPr>
+            <a:r>
+              <a:t>`include "uvm_macros.svh"</a:t>
+            </a:r>
+          </a:p>
+          <a:p>
+            <a:pPr>
+              <a:lnSpc>
+                <a:spcPts val="2200"/>
+              </a:lnSpc>
+              <a:spcAft>
+                <a:spcPts val="400"/>
+              </a:spcAft>
+              <a:defRPr sz="2000" b="0">
+                <a:solidFill>
+                  <a:srgbClr val="333333"/>
+                </a:solidFill>
+                <a:latin typeface="Consolas"/>
+              </a:defRPr>
+            </a:pPr>
+            <a:r>
+              <a:t>import uvm_pkg::*;</a:t>
+            </a:r>
+          </a:p>
+          <a:p>
+            <a:pPr>
+              <a:lnSpc>
+                <a:spcPts val="2200"/>
+              </a:lnSpc>
+              <a:spcAft>
+                <a:spcPts val="400"/>
+              </a:spcAft>
+              <a:defRPr sz="2000" b="0">
+                <a:solidFill>
+                  <a:srgbClr val="333333"/>
+                </a:solidFill>
+                <a:latin typeface="Consolas"/>
+              </a:defRPr>
+            </a:pPr>
+          </a:p>
+          <a:p>
+            <a:pPr>
+              <a:lnSpc>
+                <a:spcPts val="2200"/>
+              </a:lnSpc>
+              <a:spcAft>
+                <a:spcPts val="400"/>
+              </a:spcAft>
+              <a:defRPr sz="2000" b="0">
+                <a:solidFill>
+                  <a:srgbClr val="333333"/>
+                </a:solidFill>
+                <a:latin typeface="Consolas"/>
+              </a:defRPr>
+            </a:pPr>
+            <a:r>
+              <a:t>`timescale 1ns/1ps</a:t>
+            </a:r>
+          </a:p>
+          <a:p>
+            <a:pPr>
+              <a:lnSpc>
+                <a:spcPts val="2200"/>
+              </a:lnSpc>
+              <a:spcAft>
+                <a:spcPts val="400"/>
+              </a:spcAft>
+              <a:defRPr sz="2000" b="0">
+                <a:solidFill>
+                  <a:srgbClr val="333333"/>
+                </a:solidFill>
+                <a:latin typeface="Consolas"/>
+              </a:defRPr>
+            </a:pPr>
+          </a:p>
+          <a:p>
+            <a:pPr>
+              <a:lnSpc>
+                <a:spcPts val="2200"/>
+              </a:lnSpc>
+              <a:spcAft>
+                <a:spcPts val="400"/>
+              </a:spcAft>
+              <a:defRPr sz="2000" b="0">
+                <a:solidFill>
+                  <a:srgbClr val="333333"/>
+                </a:solidFill>
+                <a:latin typeface="Consolas"/>
+              </a:defRPr>
+            </a:pPr>
+            <a:r>
+              <a:t>// ---------------------------------------------------------------------</a:t>
+            </a:r>
+          </a:p>
+          <a:p>
+            <a:pPr>
+              <a:lnSpc>
+                <a:spcPts val="2200"/>
+              </a:lnSpc>
+              <a:spcAft>
+                <a:spcPts val="400"/>
+              </a:spcAft>
+              <a:defRPr sz="2000" b="0">
+                <a:solidFill>
+                  <a:srgbClr val="333333"/>
+                </a:solidFill>
+                <a:latin typeface="Consolas"/>
+              </a:defRPr>
+            </a:pPr>
+            <a:r>
+              <a:t>--------</a:t>
+            </a:r>
+          </a:p>
+          <a:p>
+            <a:pPr>
+              <a:lnSpc>
+                <a:spcPts val="2200"/>
+              </a:lnSpc>
+              <a:spcAft>
+                <a:spcPts val="400"/>
+              </a:spcAft>
+              <a:defRPr sz="2000" b="0">
+                <a:solidFill>
+                  <a:srgbClr val="333333"/>
+                </a:solidFill>
+                <a:latin typeface="Consolas"/>
+              </a:defRPr>
+            </a:pPr>
+            <a:r>
+              <a:t>// Interface</a:t>
+            </a:r>
+          </a:p>
+          <a:p>
+            <a:pPr>
+              <a:lnSpc>
+                <a:spcPts val="2200"/>
+              </a:lnSpc>
+              <a:spcAft>
+                <a:spcPts val="400"/>
+              </a:spcAft>
+              <a:defRPr sz="2000" b="0">
+                <a:solidFill>
+                  <a:srgbClr val="333333"/>
+                </a:solidFill>
+                <a:latin typeface="Consolas"/>
+              </a:defRPr>
+            </a:pPr>
+            <a:r>
+              <a:t>// ---------------------------------------------------------------------</a:t>
+            </a:r>
+          </a:p>
+          <a:p>
+            <a:pPr>
+              <a:lnSpc>
+                <a:spcPts val="2200"/>
+              </a:lnSpc>
+              <a:spcAft>
+                <a:spcPts val="400"/>
+              </a:spcAft>
+              <a:defRPr sz="2000" b="0">
+                <a:solidFill>
+                  <a:srgbClr val="333333"/>
+                </a:solidFill>
+                <a:latin typeface="Consolas"/>
+              </a:defRPr>
+            </a:pPr>
+            <a:r>
+              <a:t>--------</a:t>
+            </a:r>
+          </a:p>
+        </p:txBody>
+      </p:sp>
+      <p:sp>
+        <p:nvSpPr>
+          <p:cNvPr id="4" name="TextBox 3"/>
           <p:cNvSpPr txBox="1"/>
           <p:nvPr/>
         </p:nvSpPr>
@@ -5541,8 +6804,8 @@
         </p:nvSpPr>
         <p:spPr>
           <a:xfrm>
-            <a:off x="548640" y="411480"/>
-            <a:ext cx="11064240" cy="777240"/>
+            <a:off x="548640" y="2743200"/>
+            <a:ext cx="11064240" cy="1371600"/>
           </a:xfrm>
           <a:prstGeom prst="rect">
             <a:avLst/>
@@ -5555,11 +6818,11 @@
           </a:bodyPr>
           <a:lstStyle/>
           <a:p>
-            <a:pPr>
-              <a:lnSpc>
-                <a:spcPts val="2200"/>
-              </a:lnSpc>
-              <a:defRPr sz="2800" b="1">
+            <a:pPr algn="ctr">
+              <a:lnSpc>
+                <a:spcPts val="2200"/>
+              </a:lnSpc>
+              <a:defRPr sz="3600" b="1">
                 <a:solidFill>
                   <a:srgbClr val="1A1A2E"/>
                 </a:solidFill>
@@ -5567,7 +6830,7 @@
               </a:defRPr>
             </a:pPr>
             <a:r>
-              <a:t>1. Directed UART regression</a:t>
+              <a:t>Execution &amp; simulation flow</a:t>
             </a:r>
           </a:p>
         </p:txBody>
@@ -5575,67 +6838,6 @@
       <p:sp>
         <p:nvSpPr>
           <p:cNvPr id="3" name="TextBox 2"/>
-          <p:cNvSpPr txBox="1"/>
-          <p:nvPr/>
-        </p:nvSpPr>
-        <p:spPr>
-          <a:xfrm>
-            <a:off x="548640" y="1234440"/>
-            <a:ext cx="11064240" cy="4937760"/>
-          </a:xfrm>
-          <a:prstGeom prst="rect">
-            <a:avLst/>
-          </a:prstGeom>
-          <a:noFill/>
-        </p:spPr>
-        <p:txBody>
-          <a:bodyPr wrap="square">
-            <a:noAutofit/>
-          </a:bodyPr>
-          <a:lstStyle/>
-          <a:p>
-            <a:pPr>
-              <a:lnSpc>
-                <a:spcPts val="2200"/>
-              </a:lnSpc>
-              <a:spcAft>
-                <a:spcPts val="1000"/>
-              </a:spcAft>
-              <a:defRPr sz="2000" b="0">
-                <a:solidFill>
-                  <a:srgbClr val="333333"/>
-                </a:solidFill>
-                <a:latin typeface="Calibri"/>
-              </a:defRPr>
-            </a:pPr>
-            <a:r>
-              <a:t>• Sequence sends 0x00, 0x01, 0x55, 0xAA, 0xFF —</a:t>
-            </a:r>
-          </a:p>
-          <a:p>
-            <a:pPr>
-              <a:lnSpc>
-                <a:spcPts val="2200"/>
-              </a:lnSpc>
-              <a:spcAft>
-                <a:spcPts val="1000"/>
-              </a:spcAft>
-              <a:defRPr sz="2000" b="0">
-                <a:solidFill>
-                  <a:srgbClr val="333333"/>
-                </a:solidFill>
-                <a:latin typeface="Calibri"/>
-              </a:defRPr>
-            </a:pPr>
-            <a:r>
-              <a:t>      repeatable regression before randomization.</a:t>
-            </a:r>
-          </a:p>
-        </p:txBody>
-      </p:sp>
-      <p:sp>
-        <p:nvSpPr>
-          <p:cNvPr id="4" name="TextBox 3"/>
           <p:cNvSpPr txBox="1"/>
           <p:nvPr/>
         </p:nvSpPr>
@@ -5724,7 +6926,7 @@
               </a:defRPr>
             </a:pPr>
             <a:r>
-              <a:t>2. Scoreboard strategy</a:t>
+              <a:t>How the example runs (toolchain)</a:t>
             </a:r>
           </a:p>
         </p:txBody>
@@ -5766,7 +6968,7 @@
               </a:defRPr>
             </a:pPr>
             <a:r>
-              <a:t>• Expected queue loaded in test; compare to monitor-</a:t>
+              <a:t>• Makefile: Verilator + UVM_HOME compile RTL,</a:t>
             </a:r>
           </a:p>
           <a:p>
@@ -5785,7 +6987,7 @@
               </a:defRPr>
             </a:pPr>
             <a:r>
-              <a:t>      reconstructed TX and to RX hook data.</a:t>
+              <a:t>      interface, and test_*.sv</a:t>
             </a:r>
           </a:p>
           <a:p>
@@ -5804,7 +7006,7 @@
               </a:defRPr>
             </a:pPr>
             <a:r>
-              <a:t>• Fail fast on mismatch; read UVM SCOREBOARD summary</a:t>
+              <a:t>• UVM phases: build → connect → run_test → report</a:t>
             </a:r>
           </a:p>
           <a:p>
@@ -5823,7 +7025,121 @@
               </a:defRPr>
             </a:pPr>
             <a:r>
-              <a:t>      at end of run.</a:t>
+              <a:t>      (same pattern as Module 2)</a:t>
+            </a:r>
+          </a:p>
+          <a:p>
+            <a:pPr>
+              <a:lnSpc>
+                <a:spcPts val="2200"/>
+              </a:lnSpc>
+              <a:spcAft>
+                <a:spcPts val="1000"/>
+              </a:spcAft>
+              <a:defRPr sz="2000" b="0">
+                <a:solidFill>
+                  <a:srgbClr val="333333"/>
+                </a:solidFill>
+                <a:latin typeface="Calibri"/>
+              </a:defRPr>
+            </a:pPr>
+            <a:r>
+              <a:t>• Sequence → driver → DUT → monitor → scoreboard (read</a:t>
+            </a:r>
+          </a:p>
+          <a:p>
+            <a:pPr>
+              <a:lnSpc>
+                <a:spcPts val="2200"/>
+              </a:lnSpc>
+              <a:spcAft>
+                <a:spcPts val="1000"/>
+              </a:spcAft>
+              <a:defRPr sz="2000" b="0">
+                <a:solidFill>
+                  <a:srgbClr val="333333"/>
+                </a:solidFill>
+                <a:latin typeface="Calibri"/>
+              </a:defRPr>
+            </a:pPr>
+            <a:r>
+              <a:t>      SCOREBOARD at end)</a:t>
+            </a:r>
+          </a:p>
+          <a:p>
+            <a:pPr>
+              <a:lnSpc>
+                <a:spcPts val="2200"/>
+              </a:lnSpc>
+              <a:spcAft>
+                <a:spcPts val="1000"/>
+              </a:spcAft>
+              <a:defRPr sz="2000" b="0">
+                <a:solidFill>
+                  <a:srgbClr val="333333"/>
+                </a:solidFill>
+                <a:latin typeface="Calibri"/>
+              </a:defRPr>
+            </a:pPr>
+            <a:r>
+              <a:t>• Typical command: make SIM=verilator TEST=test_* (see</a:t>
+            </a:r>
+          </a:p>
+          <a:p>
+            <a:pPr>
+              <a:lnSpc>
+                <a:spcPts val="2200"/>
+              </a:lnSpc>
+              <a:spcAft>
+                <a:spcPts val="1000"/>
+              </a:spcAft>
+              <a:defRPr sz="2000" b="0">
+                <a:solidFill>
+                  <a:srgbClr val="333333"/>
+                </a:solidFill>
+                <a:latin typeface="Calibri"/>
+              </a:defRPr>
+            </a:pPr>
+            <a:r>
+              <a:t>      module4 demo slide)</a:t>
+            </a:r>
+          </a:p>
+          <a:p>
+            <a:pPr>
+              <a:lnSpc>
+                <a:spcPts val="2200"/>
+              </a:lnSpc>
+              <a:spcAft>
+                <a:spcPts val="1000"/>
+              </a:spcAft>
+              <a:defRPr sz="2000" b="0">
+                <a:solidFill>
+                  <a:srgbClr val="333333"/>
+                </a:solidFill>
+                <a:latin typeface="Calibri"/>
+              </a:defRPr>
+            </a:pPr>
+            <a:r>
+              <a:t>• Loopback / hooks connect monitor observations to</a:t>
+            </a:r>
+          </a:p>
+          <a:p>
+            <a:pPr>
+              <a:lnSpc>
+                <a:spcPts val="2200"/>
+              </a:lnSpc>
+              <a:spcAft>
+                <a:spcPts val="1000"/>
+              </a:spcAft>
+              <a:defRPr sz="2000" b="0">
+                <a:solidFill>
+                  <a:srgbClr val="333333"/>
+                </a:solidFill>
+                <a:latin typeface="Calibri"/>
+              </a:defRPr>
+            </a:pPr>
+            <a:r>
+              <a:t>      scoreboard checks</a:t>
             </a:r>
           </a:p>
         </p:txBody>
@@ -5919,7 +7235,7 @@
               </a:defRPr>
             </a:pPr>
             <a:r>
-              <a:t>3. What to add next</a:t>
+              <a:t>Example directory layout</a:t>
             </a:r>
           </a:p>
         </p:txBody>
@@ -5961,7 +7277,7 @@
               </a:defRPr>
             </a:pPr>
             <a:r>
-              <a:t>• Random baud, framing-error injection, coverage on</a:t>
+              <a:t>• dut/: uart_tx.v, uart_rx.v, baud_gen.v (same as</a:t>
             </a:r>
           </a:p>
           <a:p>
@@ -5980,7 +7296,7 @@
               </a:defRPr>
             </a:pPr>
             <a:r>
-              <a:t>      `busy` / `data_valid`.</a:t>
+              <a:t>      Module 3)</a:t>
             </a:r>
           </a:p>
           <a:p>
@@ -5999,7 +7315,7 @@
               </a:defRPr>
             </a:pPr>
             <a:r>
-              <a:t>• See [LEARNING_GUIDE_PROTOCOLS_AND_UVM.md §</a:t>
+              <a:t>• test_uart_uvm.sv: Interface, UartTxTransaction,</a:t>
             </a:r>
           </a:p>
           <a:p>
@@ -6018,26 +7334,7 @@
               </a:defRPr>
             </a:pPr>
             <a:r>
-              <a:t>      6](LEARNING_GUIDE_PROTOCOLS_AND_UVM.md#6-uart-uvm-</a:t>
-            </a:r>
-          </a:p>
-          <a:p>
-            <a:pPr>
-              <a:lnSpc>
-                <a:spcPts val="2200"/>
-              </a:lnSpc>
-              <a:spcAft>
-                <a:spcPts val="1000"/>
-              </a:spcAft>
-              <a:defRPr sz="2000" b="0">
-                <a:solidFill>
-                  <a:srgbClr val="333333"/>
-                </a:solidFill>
-                <a:latin typeface="Calibri"/>
-              </a:defRPr>
-            </a:pPr>
-            <a:r>
-              <a:t>      mappin…</a:t>
+              <a:t>      UartTxSequence, UartTxDriver, UartTxMonitor, UartTx…</a:t>
             </a:r>
           </a:p>
         </p:txBody>
@@ -6107,8 +7404,8 @@
         </p:nvSpPr>
         <p:spPr>
           <a:xfrm>
-            <a:off x="548640" y="2743200"/>
-            <a:ext cx="11064240" cy="1371600"/>
+            <a:off x="548640" y="411480"/>
+            <a:ext cx="11064240" cy="777240"/>
           </a:xfrm>
           <a:prstGeom prst="rect">
             <a:avLst/>
@@ -6121,11 +7418,11 @@
           </a:bodyPr>
           <a:lstStyle/>
           <a:p>
-            <a:pPr algn="ctr">
-              <a:lnSpc>
-                <a:spcPts val="2200"/>
-              </a:lnSpc>
-              <a:defRPr sz="3600" b="1">
+            <a:pPr>
+              <a:lnSpc>
+                <a:spcPts val="2200"/>
+              </a:lnSpc>
+              <a:defRPr sz="2800" b="1">
                 <a:solidFill>
                   <a:srgbClr val="1A1A2E"/>
                 </a:solidFill>
@@ -6133,7 +7430,7 @@
               </a:defRPr>
             </a:pPr>
             <a:r>
-              <a:t>Syllabus topics</a:t>
+              <a:t>Makefile — UVM UART sim</a:t>
             </a:r>
           </a:p>
         </p:txBody>
@@ -6141,6 +7438,364 @@
       <p:sp>
         <p:nvSpPr>
           <p:cNvPr id="3" name="TextBox 2"/>
+          <p:cNvSpPr txBox="1"/>
+          <p:nvPr/>
+        </p:nvSpPr>
+        <p:spPr>
+          <a:xfrm>
+            <a:off x="548640" y="1143000"/>
+            <a:ext cx="11064240" cy="5029200"/>
+          </a:xfrm>
+          <a:prstGeom prst="rect">
+            <a:avLst/>
+          </a:prstGeom>
+          <a:solidFill>
+            <a:srgbClr val="F4F4F4"/>
+          </a:solidFill>
+        </p:spPr>
+        <p:txBody>
+          <a:bodyPr wrap="square">
+            <a:noAutofit/>
+          </a:bodyPr>
+          <a:lstStyle/>
+          <a:p>
+            <a:pPr>
+              <a:lnSpc>
+                <a:spcPts val="2200"/>
+              </a:lnSpc>
+              <a:spcAft>
+                <a:spcPts val="400"/>
+              </a:spcAft>
+              <a:defRPr sz="2000" b="0">
+                <a:solidFill>
+                  <a:srgbClr val="333333"/>
+                </a:solidFill>
+                <a:latin typeface="Consolas"/>
+              </a:defRPr>
+            </a:pPr>
+            <a:r>
+              <a:t># Makefile for Module 4 UART UVM test</a:t>
+            </a:r>
+          </a:p>
+          <a:p>
+            <a:pPr>
+              <a:lnSpc>
+                <a:spcPts val="2200"/>
+              </a:lnSpc>
+              <a:spcAft>
+                <a:spcPts val="400"/>
+              </a:spcAft>
+              <a:defRPr sz="2000" b="0">
+                <a:solidFill>
+                  <a:srgbClr val="333333"/>
+                </a:solidFill>
+                <a:latin typeface="Consolas"/>
+              </a:defRPr>
+            </a:pPr>
+            <a:r>
+              <a:t>#</a:t>
+            </a:r>
+          </a:p>
+          <a:p>
+            <a:pPr>
+              <a:lnSpc>
+                <a:spcPts val="2200"/>
+              </a:lnSpc>
+              <a:spcAft>
+                <a:spcPts val="400"/>
+              </a:spcAft>
+              <a:defRPr sz="2000" b="0">
+                <a:solidFill>
+                  <a:srgbClr val="333333"/>
+                </a:solidFill>
+                <a:latin typeface="Consolas"/>
+              </a:defRPr>
+            </a:pPr>
+            <a:r>
+              <a:t># Usage:</a:t>
+            </a:r>
+          </a:p>
+          <a:p>
+            <a:pPr>
+              <a:lnSpc>
+                <a:spcPts val="2200"/>
+              </a:lnSpc>
+              <a:spcAft>
+                <a:spcPts val="400"/>
+              </a:spcAft>
+              <a:defRPr sz="2000" b="0">
+                <a:solidFill>
+                  <a:srgbClr val="333333"/>
+                </a:solidFill>
+                <a:latin typeface="Consolas"/>
+              </a:defRPr>
+            </a:pPr>
+            <a:r>
+              <a:t>#   make SIM=verilator TEST=test_uart_uvm</a:t>
+            </a:r>
+          </a:p>
+          <a:p>
+            <a:pPr>
+              <a:lnSpc>
+                <a:spcPts val="2200"/>
+              </a:lnSpc>
+              <a:spcAft>
+                <a:spcPts val="400"/>
+              </a:spcAft>
+              <a:defRPr sz="2000" b="0">
+                <a:solidFill>
+                  <a:srgbClr val="333333"/>
+                </a:solidFill>
+                <a:latin typeface="Consolas"/>
+              </a:defRPr>
+            </a:pPr>
+            <a:r>
+              <a:t>#</a:t>
+            </a:r>
+          </a:p>
+          <a:p>
+            <a:pPr>
+              <a:lnSpc>
+                <a:spcPts val="2200"/>
+              </a:lnSpc>
+              <a:spcAft>
+                <a:spcPts val="400"/>
+              </a:spcAft>
+              <a:defRPr sz="2000" b="0">
+                <a:solidFill>
+                  <a:srgbClr val="333333"/>
+                </a:solidFill>
+                <a:latin typeface="Consolas"/>
+              </a:defRPr>
+            </a:pPr>
+          </a:p>
+          <a:p>
+            <a:pPr>
+              <a:lnSpc>
+                <a:spcPts val="2200"/>
+              </a:lnSpc>
+              <a:spcAft>
+                <a:spcPts val="400"/>
+              </a:spcAft>
+              <a:defRPr sz="2000" b="0">
+                <a:solidFill>
+                  <a:srgbClr val="333333"/>
+                </a:solidFill>
+                <a:latin typeface="Consolas"/>
+              </a:defRPr>
+            </a:pPr>
+            <a:r>
+              <a:t>SIM ?= verilator</a:t>
+            </a:r>
+          </a:p>
+          <a:p>
+            <a:pPr>
+              <a:lnSpc>
+                <a:spcPts val="2200"/>
+              </a:lnSpc>
+              <a:spcAft>
+                <a:spcPts val="400"/>
+              </a:spcAft>
+              <a:defRPr sz="2000" b="0">
+                <a:solidFill>
+                  <a:srgbClr val="333333"/>
+                </a:solidFill>
+                <a:latin typeface="Consolas"/>
+              </a:defRPr>
+            </a:pPr>
+            <a:r>
+              <a:t>TEST ?= test_uart_uvm</a:t>
+            </a:r>
+          </a:p>
+          <a:p>
+            <a:pPr>
+              <a:lnSpc>
+                <a:spcPts val="2200"/>
+              </a:lnSpc>
+              <a:spcAft>
+                <a:spcPts val="400"/>
+              </a:spcAft>
+              <a:defRPr sz="2000" b="0">
+                <a:solidFill>
+                  <a:srgbClr val="333333"/>
+                </a:solidFill>
+                <a:latin typeface="Consolas"/>
+              </a:defRPr>
+            </a:pPr>
+          </a:p>
+          <a:p>
+            <a:pPr>
+              <a:lnSpc>
+                <a:spcPts val="2200"/>
+              </a:lnSpc>
+              <a:spcAft>
+                <a:spcPts val="400"/>
+              </a:spcAft>
+              <a:defRPr sz="2000" b="0">
+                <a:solidFill>
+                  <a:srgbClr val="333333"/>
+                </a:solidFill>
+                <a:latin typeface="Consolas"/>
+              </a:defRPr>
+            </a:pPr>
+            <a:r>
+              <a:t># Prefer externally-set UVM_HOME, but fall back to vendored UVM.</a:t>
+            </a:r>
+          </a:p>
+          <a:p>
+            <a:pPr>
+              <a:lnSpc>
+                <a:spcPts val="2200"/>
+              </a:lnSpc>
+              <a:spcAft>
+                <a:spcPts val="400"/>
+              </a:spcAft>
+              <a:defRPr sz="2000" b="0">
+                <a:solidFill>
+                  <a:srgbClr val="333333"/>
+                </a:solidFill>
+                <a:latin typeface="Consolas"/>
+              </a:defRPr>
+            </a:pPr>
+            <a:r>
+              <a:t># From module4/examples/uart_uvm, repo root is ../../..</a:t>
+            </a:r>
+          </a:p>
+          <a:p>
+            <a:pPr>
+              <a:lnSpc>
+                <a:spcPts val="2200"/>
+              </a:lnSpc>
+              <a:spcAft>
+                <a:spcPts val="400"/>
+              </a:spcAft>
+              <a:defRPr sz="2000" b="0">
+                <a:solidFill>
+                  <a:srgbClr val="333333"/>
+                </a:solidFill>
+                <a:latin typeface="Consolas"/>
+              </a:defRPr>
+            </a:pPr>
+            <a:r>
+              <a:t>UVM_HOME ?= $(shell echo $$UVM_HOME)</a:t>
+            </a:r>
+          </a:p>
+          <a:p>
+            <a:pPr>
+              <a:lnSpc>
+                <a:spcPts val="2200"/>
+              </a:lnSpc>
+              <a:spcAft>
+                <a:spcPts val="400"/>
+              </a:spcAft>
+              <a:defRPr sz="2000" b="0">
+                <a:solidFill>
+                  <a:srgbClr val="333333"/>
+                </a:solidFill>
+                <a:latin typeface="Consolas"/>
+              </a:defRPr>
+            </a:pPr>
+            <a:r>
+              <a:t>UVM_HOME_FALLBACK := ../../../tools/uvm-2017/1800.2-2017-1.0</a:t>
+            </a:r>
+          </a:p>
+          <a:p>
+            <a:pPr>
+              <a:lnSpc>
+                <a:spcPts val="2200"/>
+              </a:lnSpc>
+              <a:spcAft>
+                <a:spcPts val="400"/>
+              </a:spcAft>
+              <a:defRPr sz="2000" b="0">
+                <a:solidFill>
+                  <a:srgbClr val="333333"/>
+                </a:solidFill>
+                <a:latin typeface="Consolas"/>
+              </a:defRPr>
+            </a:pPr>
+            <a:r>
+              <a:t>UVM_HOME_FALLBACK_ALT :=</a:t>
+            </a:r>
+          </a:p>
+          <a:p>
+            <a:pPr>
+              <a:lnSpc>
+                <a:spcPts val="2200"/>
+              </a:lnSpc>
+              <a:spcAft>
+                <a:spcPts val="400"/>
+              </a:spcAft>
+              <a:defRPr sz="2000" b="0">
+                <a:solidFill>
+                  <a:srgbClr val="333333"/>
+                </a:solidFill>
+                <a:latin typeface="Consolas"/>
+              </a:defRPr>
+            </a:pPr>
+            <a:r>
+              <a:t>../../../tools/learn_uvm2017_sv_verilator/tools/uvm-2017/1800.2-2017-1.0</a:t>
+            </a:r>
+          </a:p>
+          <a:p>
+            <a:pPr>
+              <a:lnSpc>
+                <a:spcPts val="2200"/>
+              </a:lnSpc>
+              <a:spcAft>
+                <a:spcPts val="400"/>
+              </a:spcAft>
+              <a:defRPr sz="2000" b="0">
+                <a:solidFill>
+                  <a:srgbClr val="333333"/>
+                </a:solidFill>
+                <a:latin typeface="Consolas"/>
+              </a:defRPr>
+            </a:pPr>
+          </a:p>
+          <a:p>
+            <a:pPr>
+              <a:lnSpc>
+                <a:spcPts val="2200"/>
+              </a:lnSpc>
+              <a:spcAft>
+                <a:spcPts val="400"/>
+              </a:spcAft>
+              <a:defRPr sz="2000" b="0">
+                <a:solidFill>
+                  <a:srgbClr val="333333"/>
+                </a:solidFill>
+                <a:latin typeface="Consolas"/>
+              </a:defRPr>
+            </a:pPr>
+            <a:r>
+              <a:t>ifeq ($(UVM_HOME),)</a:t>
+            </a:r>
+          </a:p>
+          <a:p>
+            <a:pPr>
+              <a:lnSpc>
+                <a:spcPts val="2200"/>
+              </a:lnSpc>
+              <a:spcAft>
+                <a:spcPts val="400"/>
+              </a:spcAft>
+              <a:defRPr sz="2000" b="0">
+                <a:solidFill>
+                  <a:srgbClr val="333333"/>
+                </a:solidFill>
+                <a:latin typeface="Consolas"/>
+              </a:defRPr>
+            </a:pPr>
+            <a:r>
+              <a:t># ...</a:t>
+            </a:r>
+          </a:p>
+        </p:txBody>
+      </p:sp>
+      <p:sp>
+        <p:nvSpPr>
+          <p:cNvPr id="4" name="TextBox 3"/>
           <p:cNvSpPr txBox="1"/>
           <p:nvPr/>
         </p:nvSpPr>
@@ -6436,8 +8091,8 @@
         </p:nvSpPr>
         <p:spPr>
           <a:xfrm>
-            <a:off x="548640" y="411480"/>
-            <a:ext cx="11064240" cy="777240"/>
+            <a:off x="548640" y="2743200"/>
+            <a:ext cx="11064240" cy="1371600"/>
           </a:xfrm>
           <a:prstGeom prst="rect">
             <a:avLst/>
@@ -6450,11 +8105,11 @@
           </a:bodyPr>
           <a:lstStyle/>
           <a:p>
-            <a:pPr>
-              <a:lnSpc>
-                <a:spcPts val="2200"/>
-              </a:lnSpc>
-              <a:defRPr sz="2800" b="1">
+            <a:pPr algn="ctr">
+              <a:lnSpc>
+                <a:spcPts val="2200"/>
+              </a:lnSpc>
+              <a:defRPr sz="3600" b="1">
                 <a:solidFill>
                   <a:srgbClr val="1A1A2E"/>
                 </a:solidFill>
@@ -6462,7 +8117,7 @@
               </a:defRPr>
             </a:pPr>
             <a:r>
-              <a:t>1. UART protocol recap (8N1)</a:t>
+              <a:t>Key files to study</a:t>
             </a:r>
           </a:p>
         </p:txBody>
@@ -6470,105 +8125,6 @@
       <p:sp>
         <p:nvSpPr>
           <p:cNvPr id="3" name="TextBox 2"/>
-          <p:cNvSpPr txBox="1"/>
-          <p:nvPr/>
-        </p:nvSpPr>
-        <p:spPr>
-          <a:xfrm>
-            <a:off x="548640" y="1234440"/>
-            <a:ext cx="11064240" cy="4937760"/>
-          </a:xfrm>
-          <a:prstGeom prst="rect">
-            <a:avLst/>
-          </a:prstGeom>
-          <a:noFill/>
-        </p:spPr>
-        <p:txBody>
-          <a:bodyPr wrap="square">
-            <a:noAutofit/>
-          </a:bodyPr>
-          <a:lstStyle/>
-          <a:p>
-            <a:pPr>
-              <a:lnSpc>
-                <a:spcPts val="2200"/>
-              </a:lnSpc>
-              <a:spcAft>
-                <a:spcPts val="1000"/>
-              </a:spcAft>
-              <a:defRPr sz="2000" b="0">
-                <a:solidFill>
-                  <a:srgbClr val="333333"/>
-                </a:solidFill>
-                <a:latin typeface="Calibri"/>
-              </a:defRPr>
-            </a:pPr>
-            <a:r>
-              <a:t>• One byte = start (0) + 8 data (LSB first) + stop</a:t>
-            </a:r>
-          </a:p>
-          <a:p>
-            <a:pPr>
-              <a:lnSpc>
-                <a:spcPts val="2200"/>
-              </a:lnSpc>
-              <a:spcAft>
-                <a:spcPts val="1000"/>
-              </a:spcAft>
-              <a:defRPr sz="2000" b="0">
-                <a:solidFill>
-                  <a:srgbClr val="333333"/>
-                </a:solidFill>
-                <a:latin typeface="Calibri"/>
-              </a:defRPr>
-            </a:pPr>
-            <a:r>
-              <a:t>      (1); `baud_tick` times each bit.</a:t>
-            </a:r>
-          </a:p>
-          <a:p>
-            <a:pPr>
-              <a:lnSpc>
-                <a:spcPts val="2200"/>
-              </a:lnSpc>
-              <a:spcAft>
-                <a:spcPts val="1000"/>
-              </a:spcAft>
-              <a:defRPr sz="2000" b="0">
-                <a:solidFill>
-                  <a:srgbClr val="333333"/>
-                </a:solidFill>
-                <a:latin typeface="Calibri"/>
-              </a:defRPr>
-            </a:pPr>
-            <a:r>
-              <a:t>• Driver/monitor must follow the same rules as the</a:t>
-            </a:r>
-          </a:p>
-          <a:p>
-            <a:pPr>
-              <a:lnSpc>
-                <a:spcPts val="2200"/>
-              </a:lnSpc>
-              <a:spcAft>
-                <a:spcPts val="1000"/>
-              </a:spcAft>
-              <a:defRPr sz="2000" b="0">
-                <a:solidFill>
-                  <a:srgbClr val="333333"/>
-                </a:solidFill>
-                <a:latin typeface="Calibri"/>
-              </a:defRPr>
-            </a:pPr>
-            <a:r>
-              <a:t>      RTL.</a:t>
-            </a:r>
-          </a:p>
-        </p:txBody>
-      </p:sp>
-      <p:sp>
-        <p:nvSpPr>
-          <p:cNvPr id="4" name="TextBox 3"/>
           <p:cNvSpPr txBox="1"/>
           <p:nvPr/>
         </p:nvSpPr>
@@ -6657,7 +8213,7 @@
               </a:defRPr>
             </a:pPr>
             <a:r>
-              <a:t>2. Toolchain</a:t>
+              <a:t>Open these in the repo</a:t>
             </a:r>
           </a:p>
         </p:txBody>
@@ -6699,7 +8255,7 @@
               </a:defRPr>
             </a:pPr>
             <a:r>
-              <a:t>• Verilator `-sv`, `--timing`, UVM includes; `make</a:t>
+              <a:t>• `module4/examples/uart_uvm/dut/` — same UART RTL as</a:t>
             </a:r>
           </a:p>
           <a:p>
@@ -6718,7 +8274,83 @@
               </a:defRPr>
             </a:pPr>
             <a:r>
-              <a:t>      SIM=verilator TEST=test_uart_uvm`; `+UVM_TESTNAME=…</a:t>
+              <a:t>      Module 3</a:t>
+            </a:r>
+          </a:p>
+          <a:p>
+            <a:pPr>
+              <a:lnSpc>
+                <a:spcPts val="2200"/>
+              </a:lnSpc>
+              <a:spcAft>
+                <a:spcPts val="1000"/>
+              </a:spcAft>
+              <a:defRPr sz="2000" b="0">
+                <a:solidFill>
+                  <a:srgbClr val="333333"/>
+                </a:solidFill>
+                <a:latin typeface="Calibri"/>
+              </a:defRPr>
+            </a:pPr>
+            <a:r>
+              <a:t>• `module4/examples/uart_uvm/test_uart_uvm.sv` —</a:t>
+            </a:r>
+          </a:p>
+          <a:p>
+            <a:pPr>
+              <a:lnSpc>
+                <a:spcPts val="2200"/>
+              </a:lnSpc>
+              <a:spcAft>
+                <a:spcPts val="1000"/>
+              </a:spcAft>
+              <a:defRPr sz="2000" b="0">
+                <a:solidFill>
+                  <a:srgbClr val="333333"/>
+                </a:solidFill>
+                <a:latin typeface="Calibri"/>
+              </a:defRPr>
+            </a:pPr>
+            <a:r>
+              <a:t>      agent, env, loopback hooks</a:t>
+            </a:r>
+          </a:p>
+          <a:p>
+            <a:pPr>
+              <a:lnSpc>
+                <a:spcPts val="2200"/>
+              </a:lnSpc>
+              <a:spcAft>
+                <a:spcPts val="1000"/>
+              </a:spcAft>
+              <a:defRPr sz="2000" b="0">
+                <a:solidFill>
+                  <a:srgbClr val="333333"/>
+                </a:solidFill>
+                <a:latin typeface="Calibri"/>
+              </a:defRPr>
+            </a:pPr>
+            <a:r>
+              <a:t>• `docs/LEARNING_GUIDE_PROTOCOLS_AND_UVM.md` — § 6</a:t>
+            </a:r>
+          </a:p>
+          <a:p>
+            <a:pPr>
+              <a:lnSpc>
+                <a:spcPts val="2200"/>
+              </a:lnSpc>
+              <a:spcAft>
+                <a:spcPts val="1000"/>
+              </a:spcAft>
+              <a:defRPr sz="2000" b="0">
+                <a:solidFill>
+                  <a:srgbClr val="333333"/>
+                </a:solidFill>
+                <a:latin typeface="Calibri"/>
+              </a:defRPr>
+            </a:pPr>
+            <a:r>
+              <a:t>      UART UVM mapping</a:t>
             </a:r>
           </a:p>
         </p:txBody>
@@ -6814,7 +8446,7 @@
               </a:defRPr>
             </a:pPr>
             <a:r>
-              <a:t>Hands-on examples</a:t>
+              <a:t>Verification &amp; testing methods</a:t>
             </a:r>
           </a:p>
         </p:txBody>
@@ -6910,7 +8542,7 @@
               </a:defRPr>
             </a:pPr>
             <a:r>
-              <a:t>Module 4 self-check</a:t>
+              <a:t>1. Directed UART regression</a:t>
             </a:r>
           </a:p>
         </p:txBody>
@@ -6923,15 +8555,13 @@
         </p:nvSpPr>
         <p:spPr>
           <a:xfrm>
-            <a:off x="548640" y="1051560"/>
-            <a:ext cx="11064240" cy="914400"/>
+            <a:off x="548640" y="1234440"/>
+            <a:ext cx="5303520" cy="4754880"/>
           </a:xfrm>
           <a:prstGeom prst="rect">
             <a:avLst/>
           </a:prstGeom>
-          <a:solidFill>
-            <a:srgbClr val="F4F4F4"/>
-          </a:solidFill>
+          <a:noFill/>
         </p:spPr>
         <p:txBody>
           <a:bodyPr wrap="square">
@@ -6944,24 +8574,62 @@
                 <a:spcPts val="2200"/>
               </a:lnSpc>
               <a:spcAft>
-                <a:spcPts val="200"/>
-              </a:spcAft>
-              <a:defRPr sz="2000" b="0">
-                <a:solidFill>
-                  <a:srgbClr val="333333"/>
-                </a:solidFill>
-                <a:latin typeface="Consolas"/>
-              </a:defRPr>
-            </a:pPr>
-            <a:r>
-              <a:t>$ ./scripts/module4.sh --help</a:t>
+                <a:spcPts val="1000"/>
+              </a:spcAft>
+              <a:defRPr sz="2000" b="0">
+                <a:solidFill>
+                  <a:srgbClr val="333333"/>
+                </a:solidFill>
+                <a:latin typeface="Calibri"/>
+              </a:defRPr>
+            </a:pPr>
+            <a:r>
+              <a:t>• Sequence sends 0x00, 0x01, 0x55,</a:t>
+            </a:r>
+          </a:p>
+          <a:p>
+            <a:pPr>
+              <a:lnSpc>
+                <a:spcPts val="2200"/>
+              </a:lnSpc>
+              <a:spcAft>
+                <a:spcPts val="1000"/>
+              </a:spcAft>
+              <a:defRPr sz="2000" b="0">
+                <a:solidFill>
+                  <a:srgbClr val="333333"/>
+                </a:solidFill>
+                <a:latin typeface="Calibri"/>
+              </a:defRPr>
+            </a:pPr>
+            <a:r>
+              <a:t>      0xAA, 0xFF — repeatable</a:t>
+            </a:r>
+          </a:p>
+          <a:p>
+            <a:pPr>
+              <a:lnSpc>
+                <a:spcPts val="2200"/>
+              </a:lnSpc>
+              <a:spcAft>
+                <a:spcPts val="1000"/>
+              </a:spcAft>
+              <a:defRPr sz="2000" b="0">
+                <a:solidFill>
+                  <a:srgbClr val="333333"/>
+                </a:solidFill>
+                <a:latin typeface="Calibri"/>
+              </a:defRPr>
+            </a:pPr>
+            <a:r>
+              <a:t>      regression before randomization.</a:t>
             </a:r>
           </a:p>
         </p:txBody>
       </p:sp>
       <p:pic>
         <p:nvPicPr>
-          <p:cNvPr id="4" name="Picture 3" descr="module4_check.png"/>
+          <p:cNvPr id="4" name="Picture 3" descr="testing_methods.png"/>
           <p:cNvPicPr>
             <a:picLocks noChangeAspect="1"/>
           </p:cNvPicPr>
@@ -6975,8 +8643,8 @@
         </p:blipFill>
         <p:spPr>
           <a:xfrm>
-            <a:off x="548640" y="1965960"/>
-            <a:ext cx="7071358" cy="3977639"/>
+            <a:off x="6172200" y="2094547"/>
+            <a:ext cx="5394960" cy="3034665"/>
           </a:xfrm>
           <a:prstGeom prst="rect">
             <a:avLst/>
@@ -7074,7 +8742,7 @@
               </a:defRPr>
             </a:pPr>
             <a:r>
-              <a:t>Exercise scaffold</a:t>
+              <a:t>2. Scoreboard strategy</a:t>
             </a:r>
           </a:p>
         </p:txBody>
@@ -7087,15 +8755,13 @@
         </p:nvSpPr>
         <p:spPr>
           <a:xfrm>
-            <a:off x="548640" y="1143000"/>
-            <a:ext cx="11064240" cy="5029200"/>
+            <a:off x="548640" y="1234440"/>
+            <a:ext cx="5303520" cy="4754880"/>
           </a:xfrm>
           <a:prstGeom prst="rect">
             <a:avLst/>
           </a:prstGeom>
-          <a:solidFill>
-            <a:srgbClr val="F4F4F4"/>
-          </a:solidFill>
+          <a:noFill/>
         </p:spPr>
         <p:txBody>
           <a:bodyPr wrap="square">
@@ -7108,24 +8774,143 @@
                 <a:spcPts val="2200"/>
               </a:lnSpc>
               <a:spcAft>
-                <a:spcPts val="400"/>
-              </a:spcAft>
-              <a:defRPr sz="2000" b="0">
-                <a:solidFill>
-                  <a:srgbClr val="333333"/>
-                </a:solidFill>
-                <a:latin typeface="Consolas"/>
-              </a:defRPr>
-            </a:pPr>
-            <a:r>
-              <a:t>./scripts/module4.sh --scaffold</a:t>
-            </a:r>
-          </a:p>
-        </p:txBody>
-      </p:sp>
-      <p:sp>
-        <p:nvSpPr>
-          <p:cNvPr id="4" name="TextBox 3"/>
+                <a:spcPts val="1000"/>
+              </a:spcAft>
+              <a:defRPr sz="2000" b="0">
+                <a:solidFill>
+                  <a:srgbClr val="333333"/>
+                </a:solidFill>
+                <a:latin typeface="Calibri"/>
+              </a:defRPr>
+            </a:pPr>
+            <a:r>
+              <a:t>• Expected queue loaded in test;</a:t>
+            </a:r>
+          </a:p>
+          <a:p>
+            <a:pPr>
+              <a:lnSpc>
+                <a:spcPts val="2200"/>
+              </a:lnSpc>
+              <a:spcAft>
+                <a:spcPts val="1000"/>
+              </a:spcAft>
+              <a:defRPr sz="2000" b="0">
+                <a:solidFill>
+                  <a:srgbClr val="333333"/>
+                </a:solidFill>
+                <a:latin typeface="Calibri"/>
+              </a:defRPr>
+            </a:pPr>
+            <a:r>
+              <a:t>      compare to monitor-reconstructed</a:t>
+            </a:r>
+          </a:p>
+          <a:p>
+            <a:pPr>
+              <a:lnSpc>
+                <a:spcPts val="2200"/>
+              </a:lnSpc>
+              <a:spcAft>
+                <a:spcPts val="1000"/>
+              </a:spcAft>
+              <a:defRPr sz="2000" b="0">
+                <a:solidFill>
+                  <a:srgbClr val="333333"/>
+                </a:solidFill>
+                <a:latin typeface="Calibri"/>
+              </a:defRPr>
+            </a:pPr>
+            <a:r>
+              <a:t>      TX and to RX hook data.</a:t>
+            </a:r>
+          </a:p>
+          <a:p>
+            <a:pPr>
+              <a:lnSpc>
+                <a:spcPts val="2200"/>
+              </a:lnSpc>
+              <a:spcAft>
+                <a:spcPts val="1000"/>
+              </a:spcAft>
+              <a:defRPr sz="2000" b="0">
+                <a:solidFill>
+                  <a:srgbClr val="333333"/>
+                </a:solidFill>
+                <a:latin typeface="Calibri"/>
+              </a:defRPr>
+            </a:pPr>
+            <a:r>
+              <a:t>• Fail fast on mismatch; read UVM</a:t>
+            </a:r>
+          </a:p>
+          <a:p>
+            <a:pPr>
+              <a:lnSpc>
+                <a:spcPts val="2200"/>
+              </a:lnSpc>
+              <a:spcAft>
+                <a:spcPts val="1000"/>
+              </a:spcAft>
+              <a:defRPr sz="2000" b="0">
+                <a:solidFill>
+                  <a:srgbClr val="333333"/>
+                </a:solidFill>
+                <a:latin typeface="Calibri"/>
+              </a:defRPr>
+            </a:pPr>
+            <a:r>
+              <a:t>      SCOREBOARD summary at end of</a:t>
+            </a:r>
+          </a:p>
+          <a:p>
+            <a:pPr>
+              <a:lnSpc>
+                <a:spcPts val="2200"/>
+              </a:lnSpc>
+              <a:spcAft>
+                <a:spcPts val="1000"/>
+              </a:spcAft>
+              <a:defRPr sz="2000" b="0">
+                <a:solidFill>
+                  <a:srgbClr val="333333"/>
+                </a:solidFill>
+                <a:latin typeface="Calibri"/>
+              </a:defRPr>
+            </a:pPr>
+            <a:r>
+              <a:t>      run.</a:t>
+            </a:r>
+          </a:p>
+        </p:txBody>
+      </p:sp>
+      <p:pic>
+        <p:nvPicPr>
+          <p:cNvPr id="4" name="Picture 3" descr="testing_methods.png"/>
+          <p:cNvPicPr>
+            <a:picLocks noChangeAspect="1"/>
+          </p:cNvPicPr>
+          <p:nvPr/>
+        </p:nvPicPr>
+        <p:blipFill>
+          <a:blip r:embed="rId2"/>
+          <a:stretch>
+            <a:fillRect/>
+          </a:stretch>
+        </p:blipFill>
+        <p:spPr>
+          <a:xfrm>
+            <a:off x="6172200" y="2094547"/>
+            <a:ext cx="5394960" cy="3034665"/>
+          </a:xfrm>
+          <a:prstGeom prst="rect">
+            <a:avLst/>
+          </a:prstGeom>
+        </p:spPr>
+      </p:pic>
+      <p:sp>
+        <p:nvSpPr>
+          <p:cNvPr id="5" name="TextBox 4"/>
           <p:cNvSpPr txBox="1"/>
           <p:nvPr/>
         </p:nvSpPr>
@@ -7214,7 +8999,7 @@
               </a:defRPr>
             </a:pPr>
             <a:r>
-              <a:t>Example 1: UART UVM</a:t>
+              <a:t>3. What to add next</a:t>
             </a:r>
           </a:p>
         </p:txBody>
@@ -7228,7 +9013,7 @@
         <p:spPr>
           <a:xfrm>
             <a:off x="548640" y="1234440"/>
-            <a:ext cx="11064240" cy="4937760"/>
+            <a:ext cx="5303520" cy="4754880"/>
           </a:xfrm>
           <a:prstGeom prst="rect">
             <a:avLst/>
@@ -7256,7 +9041,7 @@
               </a:defRPr>
             </a:pPr>
             <a:r>
-              <a:t>• UVM phases and reporting (DRIVER, MONITOR,</a:t>
+              <a:t>• Random baud, framing-error</a:t>
             </a:r>
           </a:p>
           <a:p>
@@ -7275,7 +9060,7 @@
               </a:defRPr>
             </a:pPr>
             <a:r>
-              <a:t>      SCOREBOARD).</a:t>
+              <a:t>      injection, coverage on `busy` /</a:t>
             </a:r>
           </a:p>
           <a:p>
@@ -7294,7 +9079,7 @@
               </a:defRPr>
             </a:pPr>
             <a:r>
-              <a:t>• TX and RX scoreboard checks (TX: monitor observes</a:t>
+              <a:t>      `data_valid`.</a:t>
             </a:r>
           </a:p>
           <a:p>
@@ -7313,7 +9098,7 @@
               </a:defRPr>
             </a:pPr>
             <a:r>
-              <a:t>      serial line; RX: loopback byte checked via scoreb…</a:t>
+              <a:t>• See [LEARNING_GUIDE_PROTOCOLS_AN</a:t>
             </a:r>
           </a:p>
           <a:p>
@@ -7332,7 +9117,7 @@
               </a:defRPr>
             </a:pPr>
             <a:r>
-              <a:t>• Final scoreboard summary (TX/RX matches and</a:t>
+              <a:t>      D_UVM.md § 6](LEARNING_GUIDE_PRO</a:t>
             </a:r>
           </a:p>
           <a:p>
@@ -7351,14 +9136,57 @@
               </a:defRPr>
             </a:pPr>
             <a:r>
-              <a:t>      mismatches).</a:t>
-            </a:r>
-          </a:p>
-        </p:txBody>
-      </p:sp>
-      <p:sp>
-        <p:nvSpPr>
-          <p:cNvPr id="4" name="TextBox 3"/>
+              <a:t>      TOCOLS_AND_UVM.md#6-uart-uvm-</a:t>
+            </a:r>
+          </a:p>
+          <a:p>
+            <a:pPr>
+              <a:lnSpc>
+                <a:spcPts val="2200"/>
+              </a:lnSpc>
+              <a:spcAft>
+                <a:spcPts val="1000"/>
+              </a:spcAft>
+              <a:defRPr sz="2000" b="0">
+                <a:solidFill>
+                  <a:srgbClr val="333333"/>
+                </a:solidFill>
+                <a:latin typeface="Calibri"/>
+              </a:defRPr>
+            </a:pPr>
+            <a:r>
+              <a:t>      mappin…</a:t>
+            </a:r>
+          </a:p>
+        </p:txBody>
+      </p:sp>
+      <p:pic>
+        <p:nvPicPr>
+          <p:cNvPr id="4" name="Picture 3" descr="testing_methods.png"/>
+          <p:cNvPicPr>
+            <a:picLocks noChangeAspect="1"/>
+          </p:cNvPicPr>
+          <p:nvPr/>
+        </p:nvPicPr>
+        <p:blipFill>
+          <a:blip r:embed="rId2"/>
+          <a:stretch>
+            <a:fillRect/>
+          </a:stretch>
+        </p:blipFill>
+        <p:spPr>
+          <a:xfrm>
+            <a:off x="6172200" y="2094547"/>
+            <a:ext cx="5394960" cy="3034665"/>
+          </a:xfrm>
+          <a:prstGeom prst="rect">
+            <a:avLst/>
+          </a:prstGeom>
+        </p:spPr>
+      </p:pic>
+      <p:sp>
+        <p:nvSpPr>
+          <p:cNvPr id="5" name="TextBox 4"/>
           <p:cNvSpPr txBox="1"/>
           <p:nvPr/>
         </p:nvSpPr>
@@ -7447,7 +9275,7 @@
               </a:defRPr>
             </a:pPr>
             <a:r>
-              <a:t>Demo: UART UVM</a:t>
+              <a:t>Scoreboard — TX/RX check</a:t>
             </a:r>
           </a:p>
         </p:txBody>
@@ -7460,8 +9288,8 @@
         </p:nvSpPr>
         <p:spPr>
           <a:xfrm>
-            <a:off x="548640" y="1051560"/>
-            <a:ext cx="11064240" cy="914400"/>
+            <a:off x="548640" y="1143000"/>
+            <a:ext cx="11064240" cy="5029200"/>
           </a:xfrm>
           <a:prstGeom prst="rect">
             <a:avLst/>
@@ -7481,7 +9309,7 @@
                 <a:spcPts val="2200"/>
               </a:lnSpc>
               <a:spcAft>
-                <a:spcPts val="200"/>
+                <a:spcPts val="400"/>
               </a:spcAft>
               <a:defRPr sz="2000" b="0">
                 <a:solidFill>
@@ -7491,38 +9319,325 @@
               </a:defRPr>
             </a:pPr>
             <a:r>
-              <a:t>$ ./scripts/module4.sh --run</a:t>
-            </a:r>
-          </a:p>
-        </p:txBody>
-      </p:sp>
-      <p:pic>
-        <p:nvPicPr>
-          <p:cNvPr id="4" name="Picture 3" descr="uart_uvm.png"/>
-          <p:cNvPicPr>
-            <a:picLocks noChangeAspect="1"/>
-          </p:cNvPicPr>
-          <p:nvPr/>
-        </p:nvPicPr>
-        <p:blipFill>
-          <a:blip r:embed="rId2"/>
-          <a:stretch>
-            <a:fillRect/>
-          </a:stretch>
-        </p:blipFill>
-        <p:spPr>
-          <a:xfrm>
-            <a:off x="548640" y="1965960"/>
-            <a:ext cx="7071358" cy="3977639"/>
-          </a:xfrm>
-          <a:prstGeom prst="rect">
-            <a:avLst/>
-          </a:prstGeom>
-        </p:spPr>
-      </p:pic>
-      <p:sp>
-        <p:nvSpPr>
-          <p:cNvPr id="5" name="TextBox 4"/>
+              <a:t>imp = new("imp", this);</a:t>
+            </a:r>
+          </a:p>
+          <a:p>
+            <a:pPr>
+              <a:lnSpc>
+                <a:spcPts val="2200"/>
+              </a:lnSpc>
+              <a:spcAft>
+                <a:spcPts val="400"/>
+              </a:spcAft>
+              <a:defRPr sz="2000" b="0">
+                <a:solidFill>
+                  <a:srgbClr val="333333"/>
+                </a:solidFill>
+                <a:latin typeface="Consolas"/>
+              </a:defRPr>
+            </a:pPr>
+            <a:r>
+              <a:t>    endfunction</a:t>
+            </a:r>
+          </a:p>
+          <a:p>
+            <a:pPr>
+              <a:lnSpc>
+                <a:spcPts val="2200"/>
+              </a:lnSpc>
+              <a:spcAft>
+                <a:spcPts val="400"/>
+              </a:spcAft>
+              <a:defRPr sz="2000" b="0">
+                <a:solidFill>
+                  <a:srgbClr val="333333"/>
+                </a:solidFill>
+                <a:latin typeface="Consolas"/>
+              </a:defRPr>
+            </a:pPr>
+          </a:p>
+          <a:p>
+            <a:pPr>
+              <a:lnSpc>
+                <a:spcPts val="2200"/>
+              </a:lnSpc>
+              <a:spcAft>
+                <a:spcPts val="400"/>
+              </a:spcAft>
+              <a:defRPr sz="2000" b="0">
+                <a:solidFill>
+                  <a:srgbClr val="333333"/>
+                </a:solidFill>
+                <a:latin typeface="Consolas"/>
+              </a:defRPr>
+            </a:pPr>
+            <a:r>
+              <a:t>    function void add_expected(UartTxTransaction txn);</a:t>
+            </a:r>
+          </a:p>
+          <a:p>
+            <a:pPr>
+              <a:lnSpc>
+                <a:spcPts val="2200"/>
+              </a:lnSpc>
+              <a:spcAft>
+                <a:spcPts val="400"/>
+              </a:spcAft>
+              <a:defRPr sz="2000" b="0">
+                <a:solidFill>
+                  <a:srgbClr val="333333"/>
+                </a:solidFill>
+                <a:latin typeface="Consolas"/>
+              </a:defRPr>
+            </a:pPr>
+            <a:r>
+              <a:t>        expected_queue.push_back(txn);</a:t>
+            </a:r>
+          </a:p>
+          <a:p>
+            <a:pPr>
+              <a:lnSpc>
+                <a:spcPts val="2200"/>
+              </a:lnSpc>
+              <a:spcAft>
+                <a:spcPts val="400"/>
+              </a:spcAft>
+              <a:defRPr sz="2000" b="0">
+                <a:solidFill>
+                  <a:srgbClr val="333333"/>
+                </a:solidFill>
+                <a:latin typeface="Consolas"/>
+              </a:defRPr>
+            </a:pPr>
+            <a:r>
+              <a:t>    endfunction</a:t>
+            </a:r>
+          </a:p>
+          <a:p>
+            <a:pPr>
+              <a:lnSpc>
+                <a:spcPts val="2200"/>
+              </a:lnSpc>
+              <a:spcAft>
+                <a:spcPts val="400"/>
+              </a:spcAft>
+              <a:defRPr sz="2000" b="0">
+                <a:solidFill>
+                  <a:srgbClr val="333333"/>
+                </a:solidFill>
+                <a:latin typeface="Consolas"/>
+              </a:defRPr>
+            </a:pPr>
+          </a:p>
+          <a:p>
+            <a:pPr>
+              <a:lnSpc>
+                <a:spcPts val="2200"/>
+              </a:lnSpc>
+              <a:spcAft>
+                <a:spcPts val="400"/>
+              </a:spcAft>
+              <a:defRPr sz="2000" b="0">
+                <a:solidFill>
+                  <a:srgbClr val="333333"/>
+                </a:solidFill>
+                <a:latin typeface="Consolas"/>
+              </a:defRPr>
+            </a:pPr>
+            <a:r>
+              <a:t>    function void write(UartTxTransaction txn);</a:t>
+            </a:r>
+          </a:p>
+          <a:p>
+            <a:pPr>
+              <a:lnSpc>
+                <a:spcPts val="2200"/>
+              </a:lnSpc>
+              <a:spcAft>
+                <a:spcPts val="400"/>
+              </a:spcAft>
+              <a:defRPr sz="2000" b="0">
+                <a:solidFill>
+                  <a:srgbClr val="333333"/>
+                </a:solidFill>
+                <a:latin typeface="Consolas"/>
+              </a:defRPr>
+            </a:pPr>
+            <a:r>
+              <a:t>        UartTxTransaction exp;</a:t>
+            </a:r>
+          </a:p>
+          <a:p>
+            <a:pPr>
+              <a:lnSpc>
+                <a:spcPts val="2200"/>
+              </a:lnSpc>
+              <a:spcAft>
+                <a:spcPts val="400"/>
+              </a:spcAft>
+              <a:defRPr sz="2000" b="0">
+                <a:solidFill>
+                  <a:srgbClr val="333333"/>
+                </a:solidFill>
+                <a:latin typeface="Consolas"/>
+              </a:defRPr>
+            </a:pPr>
+            <a:r>
+              <a:t>        if (expected_queue.size() == 0) begin</a:t>
+            </a:r>
+          </a:p>
+          <a:p>
+            <a:pPr>
+              <a:lnSpc>
+                <a:spcPts val="2200"/>
+              </a:lnSpc>
+              <a:spcAft>
+                <a:spcPts val="400"/>
+              </a:spcAft>
+              <a:defRPr sz="2000" b="0">
+                <a:solidFill>
+                  <a:srgbClr val="333333"/>
+                </a:solidFill>
+                <a:latin typeface="Consolas"/>
+              </a:defRPr>
+            </a:pPr>
+            <a:r>
+              <a:t>            `uvm_warning("SCOREBOARD", "No expected transaction</a:t>
+            </a:r>
+          </a:p>
+          <a:p>
+            <a:pPr>
+              <a:lnSpc>
+                <a:spcPts val="2200"/>
+              </a:lnSpc>
+              <a:spcAft>
+                <a:spcPts val="400"/>
+              </a:spcAft>
+              <a:defRPr sz="2000" b="0">
+                <a:solidFill>
+                  <a:srgbClr val="333333"/>
+                </a:solidFill>
+                <a:latin typeface="Consolas"/>
+              </a:defRPr>
+            </a:pPr>
+            <a:r>
+              <a:t>available")</a:t>
+            </a:r>
+          </a:p>
+          <a:p>
+            <a:pPr>
+              <a:lnSpc>
+                <a:spcPts val="2200"/>
+              </a:lnSpc>
+              <a:spcAft>
+                <a:spcPts val="400"/>
+              </a:spcAft>
+              <a:defRPr sz="2000" b="0">
+                <a:solidFill>
+                  <a:srgbClr val="333333"/>
+                </a:solidFill>
+                <a:latin typeface="Consolas"/>
+              </a:defRPr>
+            </a:pPr>
+            <a:r>
+              <a:t>            return;</a:t>
+            </a:r>
+          </a:p>
+          <a:p>
+            <a:pPr>
+              <a:lnSpc>
+                <a:spcPts val="2200"/>
+              </a:lnSpc>
+              <a:spcAft>
+                <a:spcPts val="400"/>
+              </a:spcAft>
+              <a:defRPr sz="2000" b="0">
+                <a:solidFill>
+                  <a:srgbClr val="333333"/>
+                </a:solidFill>
+                <a:latin typeface="Consolas"/>
+              </a:defRPr>
+            </a:pPr>
+            <a:r>
+              <a:t>        end</a:t>
+            </a:r>
+          </a:p>
+          <a:p>
+            <a:pPr>
+              <a:lnSpc>
+                <a:spcPts val="2200"/>
+              </a:lnSpc>
+              <a:spcAft>
+                <a:spcPts val="400"/>
+              </a:spcAft>
+              <a:defRPr sz="2000" b="0">
+                <a:solidFill>
+                  <a:srgbClr val="333333"/>
+                </a:solidFill>
+                <a:latin typeface="Consolas"/>
+              </a:defRPr>
+            </a:pPr>
+          </a:p>
+          <a:p>
+            <a:pPr>
+              <a:lnSpc>
+                <a:spcPts val="2200"/>
+              </a:lnSpc>
+              <a:spcAft>
+                <a:spcPts val="400"/>
+              </a:spcAft>
+              <a:defRPr sz="2000" b="0">
+                <a:solidFill>
+                  <a:srgbClr val="333333"/>
+                </a:solidFill>
+                <a:latin typeface="Consolas"/>
+              </a:defRPr>
+            </a:pPr>
+            <a:r>
+              <a:t>        exp = expected_queue.pop_front();</a:t>
+            </a:r>
+          </a:p>
+          <a:p>
+            <a:pPr>
+              <a:lnSpc>
+                <a:spcPts val="2200"/>
+              </a:lnSpc>
+              <a:spcAft>
+                <a:spcPts val="400"/>
+              </a:spcAft>
+              <a:defRPr sz="2000" b="0">
+                <a:solidFill>
+                  <a:srgbClr val="333333"/>
+                </a:solidFill>
+                <a:latin typeface="Consolas"/>
+              </a:defRPr>
+            </a:pPr>
+          </a:p>
+          <a:p>
+            <a:pPr>
+              <a:lnSpc>
+                <a:spcPts val="2200"/>
+              </a:lnSpc>
+              <a:spcAft>
+                <a:spcPts val="400"/>
+              </a:spcAft>
+              <a:defRPr sz="2000" b="0">
+                <a:solidFill>
+                  <a:srgbClr val="333333"/>
+                </a:solidFill>
+                <a:latin typeface="Consolas"/>
+              </a:defRPr>
+            </a:pPr>
+            <a:r>
+              <a:t># ...</a:t>
+            </a:r>
+          </a:p>
+        </p:txBody>
+      </p:sp>
+      <p:sp>
+        <p:nvSpPr>
+          <p:cNvPr id="4" name="TextBox 3"/>
           <p:cNvSpPr txBox="1"/>
           <p:nvPr/>
         </p:nvSpPr>
@@ -7611,7 +9726,7 @@
               </a:defRPr>
             </a:pPr>
             <a:r>
-              <a:t>Practice &amp; assessment</a:t>
+              <a:t>Syllabus topics</a:t>
             </a:r>
           </a:p>
         </p:txBody>
@@ -7707,7 +9822,7 @@
               </a:defRPr>
             </a:pPr>
             <a:r>
-              <a:t>What you should know</a:t>
+              <a:t>1. UART protocol recap (8N1)</a:t>
             </a:r>
           </a:p>
         </p:txBody>
@@ -7749,7 +9864,7 @@
               </a:defRPr>
             </a:pPr>
             <a:r>
-              <a:t>• Describe the UART UVM agent (transaction, sequence,</a:t>
+              <a:t>• One byte = start (0) + 8 data (LSB first) + stop</a:t>
             </a:r>
           </a:p>
           <a:p>
@@ -7768,7 +9883,7 @@
               </a:defRPr>
             </a:pPr>
             <a:r>
-              <a:t>      driver, monitor, scoreboard).</a:t>
+              <a:t>      (1); `baud_tick` times each bit.</a:t>
             </a:r>
           </a:p>
           <a:p>
@@ -7787,7 +9902,7 @@
               </a:defRPr>
             </a:pPr>
             <a:r>
-              <a:t>• Explain loopback (TX→RX) and how TX and RX are both</a:t>
+              <a:t>• Driver/monitor must follow the same rules as the</a:t>
             </a:r>
           </a:p>
           <a:p>
@@ -7806,64 +9921,7 @@
               </a:defRPr>
             </a:pPr>
             <a:r>
-              <a:t>      checked in the scoreboard.</a:t>
-            </a:r>
-          </a:p>
-          <a:p>
-            <a:pPr>
-              <a:lnSpc>
-                <a:spcPts val="2200"/>
-              </a:lnSpc>
-              <a:spcAft>
-                <a:spcPts val="1000"/>
-              </a:spcAft>
-              <a:defRPr sz="2000" b="0">
-                <a:solidFill>
-                  <a:srgbClr val="333333"/>
-                </a:solidFill>
-                <a:latin typeface="Calibri"/>
-              </a:defRPr>
-            </a:pPr>
-            <a:r>
-              <a:t>• Run the uart_uvm example and interpret UVM output.</a:t>
-            </a:r>
-          </a:p>
-          <a:p>
-            <a:pPr>
-              <a:lnSpc>
-                <a:spcPts val="2200"/>
-              </a:lnSpc>
-              <a:spcAft>
-                <a:spcPts val="1000"/>
-              </a:spcAft>
-              <a:defRPr sz="2000" b="0">
-                <a:solidFill>
-                  <a:srgbClr val="333333"/>
-                </a:solidFill>
-                <a:latin typeface="Calibri"/>
-              </a:defRPr>
-            </a:pPr>
-            <a:r>
-              <a:t>• Ready for Module 5: SPI protocol + RTL + basic</a:t>
-            </a:r>
-          </a:p>
-          <a:p>
-            <a:pPr>
-              <a:lnSpc>
-                <a:spcPts val="2200"/>
-              </a:lnSpc>
-              <a:spcAft>
-                <a:spcPts val="1000"/>
-              </a:spcAft>
-              <a:defRPr sz="2000" b="0">
-                <a:solidFill>
-                  <a:srgbClr val="333333"/>
-                </a:solidFill>
-                <a:latin typeface="Calibri"/>
-              </a:defRPr>
-            </a:pPr>
-            <a:r>
-              <a:t>      testbench.</a:t>
+              <a:t>      RTL.</a:t>
             </a:r>
           </a:p>
         </p:txBody>
@@ -7959,7 +10017,7 @@
               </a:defRPr>
             </a:pPr>
             <a:r>
-              <a:t>Exercises</a:t>
+              <a:t>2. Toolchain</a:t>
             </a:r>
           </a:p>
         </p:txBody>
@@ -8001,7 +10059,7 @@
               </a:defRPr>
             </a:pPr>
             <a:r>
-              <a:t>• Run uart_uvm</a:t>
+              <a:t>• Verilator `-sv`, `--timing`, UVM includes; `make</a:t>
             </a:r>
           </a:p>
           <a:p>
@@ -8020,45 +10078,7 @@
               </a:defRPr>
             </a:pPr>
             <a:r>
-              <a:t>• Trace one transaction</a:t>
-            </a:r>
-          </a:p>
-          <a:p>
-            <a:pPr>
-              <a:lnSpc>
-                <a:spcPts val="2200"/>
-              </a:lnSpc>
-              <a:spcAft>
-                <a:spcPts val="1000"/>
-              </a:spcAft>
-              <a:defRPr sz="2000" b="0">
-                <a:solidFill>
-                  <a:srgbClr val="333333"/>
-                </a:solidFill>
-                <a:latin typeface="Calibri"/>
-              </a:defRPr>
-            </a:pPr>
-            <a:r>
-              <a:t>• Change the sequence</a:t>
-            </a:r>
-          </a:p>
-          <a:p>
-            <a:pPr>
-              <a:lnSpc>
-                <a:spcPts val="2200"/>
-              </a:lnSpc>
-              <a:spcAft>
-                <a:spcPts val="1000"/>
-              </a:spcAft>
-              <a:defRPr sz="2000" b="0">
-                <a:solidFill>
-                  <a:srgbClr val="333333"/>
-                </a:solidFill>
-                <a:latin typeface="Calibri"/>
-              </a:defRPr>
-            </a:pPr>
-            <a:r>
-              <a:t>• Optional: Loopback path</a:t>
+              <a:t>      SIM=verilator TEST=test_uart_uvm`; `+UVM_TESTNAME=…</a:t>
             </a:r>
           </a:p>
         </p:txBody>
@@ -8323,8 +10343,8 @@
         </p:nvSpPr>
         <p:spPr>
           <a:xfrm>
-            <a:off x="548640" y="411480"/>
-            <a:ext cx="11064240" cy="777240"/>
+            <a:off x="548640" y="2743200"/>
+            <a:ext cx="11064240" cy="1371600"/>
           </a:xfrm>
           <a:prstGeom prst="rect">
             <a:avLst/>
@@ -8337,11 +10357,11 @@
           </a:bodyPr>
           <a:lstStyle/>
           <a:p>
-            <a:pPr>
-              <a:lnSpc>
-                <a:spcPts val="2200"/>
-              </a:lnSpc>
-              <a:defRPr sz="2800" b="1">
+            <a:pPr algn="ctr">
+              <a:lnSpc>
+                <a:spcPts val="2200"/>
+              </a:lnSpc>
+              <a:defRPr sz="3600" b="1">
                 <a:solidFill>
                   <a:srgbClr val="1A1A2E"/>
                 </a:solidFill>
@@ -8349,7 +10369,7 @@
               </a:defRPr>
             </a:pPr>
             <a:r>
-              <a:t>Assessment checklist</a:t>
+              <a:t>Hands-on examples</a:t>
             </a:r>
           </a:p>
         </p:txBody>
@@ -8357,181 +10377,6 @@
       <p:sp>
         <p:nvSpPr>
           <p:cNvPr id="3" name="TextBox 2"/>
-          <p:cNvSpPr txBox="1"/>
-          <p:nvPr/>
-        </p:nvSpPr>
-        <p:spPr>
-          <a:xfrm>
-            <a:off x="548640" y="1234440"/>
-            <a:ext cx="11064240" cy="4937760"/>
-          </a:xfrm>
-          <a:prstGeom prst="rect">
-            <a:avLst/>
-          </a:prstGeom>
-          <a:noFill/>
-        </p:spPr>
-        <p:txBody>
-          <a:bodyPr wrap="square">
-            <a:noAutofit/>
-          </a:bodyPr>
-          <a:lstStyle/>
-          <a:p>
-            <a:pPr>
-              <a:lnSpc>
-                <a:spcPts val="2200"/>
-              </a:lnSpc>
-              <a:spcAft>
-                <a:spcPts val="1000"/>
-              </a:spcAft>
-              <a:defRPr sz="2000" b="0">
-                <a:solidFill>
-                  <a:srgbClr val="333333"/>
-                </a:solidFill>
-                <a:latin typeface="Calibri"/>
-              </a:defRPr>
-            </a:pPr>
-            <a:r>
-              <a:t>• Can describe the UART UVM agent: transaction (one</a:t>
-            </a:r>
-          </a:p>
-          <a:p>
-            <a:pPr>
-              <a:lnSpc>
-                <a:spcPts val="2200"/>
-              </a:lnSpc>
-              <a:spcAft>
-                <a:spcPts val="1000"/>
-              </a:spcAft>
-              <a:defRPr sz="2000" b="0">
-                <a:solidFill>
-                  <a:srgbClr val="333333"/>
-                </a:solidFill>
-                <a:latin typeface="Calibri"/>
-              </a:defRPr>
-            </a:pPr>
-            <a:r>
-              <a:t>      byte), sequence, driver, monitor, scoreboard.</a:t>
-            </a:r>
-          </a:p>
-          <a:p>
-            <a:pPr>
-              <a:lnSpc>
-                <a:spcPts val="2200"/>
-              </a:lnSpc>
-              <a:spcAft>
-                <a:spcPts val="1000"/>
-              </a:spcAft>
-              <a:defRPr sz="2000" b="0">
-                <a:solidFill>
-                  <a:srgbClr val="333333"/>
-                </a:solidFill>
-                <a:latin typeface="Calibri"/>
-              </a:defRPr>
-            </a:pPr>
-            <a:r>
-              <a:t>• Can explain loopback and how TX and RX are both</a:t>
-            </a:r>
-          </a:p>
-          <a:p>
-            <a:pPr>
-              <a:lnSpc>
-                <a:spcPts val="2200"/>
-              </a:lnSpc>
-              <a:spcAft>
-                <a:spcPts val="1000"/>
-              </a:spcAft>
-              <a:defRPr sz="2000" b="0">
-                <a:solidFill>
-                  <a:srgbClr val="333333"/>
-                </a:solidFill>
-                <a:latin typeface="Calibri"/>
-              </a:defRPr>
-            </a:pPr>
-            <a:r>
-              <a:t>      checked.</a:t>
-            </a:r>
-          </a:p>
-          <a:p>
-            <a:pPr>
-              <a:lnSpc>
-                <a:spcPts val="2200"/>
-              </a:lnSpc>
-              <a:spcAft>
-                <a:spcPts val="1000"/>
-              </a:spcAft>
-              <a:defRPr sz="2000" b="0">
-                <a:solidFill>
-                  <a:srgbClr val="333333"/>
-                </a:solidFill>
-                <a:latin typeface="Calibri"/>
-              </a:defRPr>
-            </a:pPr>
-            <a:r>
-              <a:t>• Can run uart_uvm and interpret UVM output (phases,</a:t>
-            </a:r>
-          </a:p>
-          <a:p>
-            <a:pPr>
-              <a:lnSpc>
-                <a:spcPts val="2200"/>
-              </a:lnSpc>
-              <a:spcAft>
-                <a:spcPts val="1000"/>
-              </a:spcAft>
-              <a:defRPr sz="2000" b="0">
-                <a:solidFill>
-                  <a:srgbClr val="333333"/>
-                </a:solidFill>
-                <a:latin typeface="Calibri"/>
-              </a:defRPr>
-            </a:pPr>
-            <a:r>
-              <a:t>      scoreboard summary).</a:t>
-            </a:r>
-          </a:p>
-          <a:p>
-            <a:pPr>
-              <a:lnSpc>
-                <a:spcPts val="2200"/>
-              </a:lnSpc>
-              <a:spcAft>
-                <a:spcPts val="1000"/>
-              </a:spcAft>
-              <a:defRPr sz="2000" b="0">
-                <a:solidFill>
-                  <a:srgbClr val="333333"/>
-                </a:solidFill>
-                <a:latin typeface="Calibri"/>
-              </a:defRPr>
-            </a:pPr>
-            <a:r>
-              <a:t>• Ready for Module 5: SPI protocol + RTL + basic</a:t>
-            </a:r>
-          </a:p>
-          <a:p>
-            <a:pPr>
-              <a:lnSpc>
-                <a:spcPts val="2200"/>
-              </a:lnSpc>
-              <a:spcAft>
-                <a:spcPts val="1000"/>
-              </a:spcAft>
-              <a:defRPr sz="2000" b="0">
-                <a:solidFill>
-                  <a:srgbClr val="333333"/>
-                </a:solidFill>
-                <a:latin typeface="Calibri"/>
-              </a:defRPr>
-            </a:pPr>
-            <a:r>
-              <a:t>      testbench.</a:t>
-            </a:r>
-          </a:p>
-        </p:txBody>
-      </p:sp>
-      <p:sp>
-        <p:nvSpPr>
-          <p:cNvPr id="4" name="TextBox 3"/>
           <p:cNvSpPr txBox="1"/>
           <p:nvPr/>
         </p:nvSpPr>
@@ -8620,7 +10465,7 @@
               </a:defRPr>
             </a:pPr>
             <a:r>
-              <a:t>Summary &amp; next steps</a:t>
+              <a:t>Module 4 self-check</a:t>
             </a:r>
           </a:p>
         </p:txBody>
@@ -8633,8 +10478,76 @@
         </p:nvSpPr>
         <p:spPr>
           <a:xfrm>
-            <a:off x="548640" y="1234440"/>
-            <a:ext cx="11064240" cy="4937760"/>
+            <a:off x="548640" y="1051560"/>
+            <a:ext cx="11064240" cy="914400"/>
+          </a:xfrm>
+          <a:prstGeom prst="rect">
+            <a:avLst/>
+          </a:prstGeom>
+          <a:solidFill>
+            <a:srgbClr val="F4F4F4"/>
+          </a:solidFill>
+        </p:spPr>
+        <p:txBody>
+          <a:bodyPr wrap="square">
+            <a:noAutofit/>
+          </a:bodyPr>
+          <a:lstStyle/>
+          <a:p>
+            <a:pPr>
+              <a:lnSpc>
+                <a:spcPts val="2200"/>
+              </a:lnSpc>
+              <a:spcAft>
+                <a:spcPts val="200"/>
+              </a:spcAft>
+              <a:defRPr sz="2000" b="0">
+                <a:solidFill>
+                  <a:srgbClr val="333333"/>
+                </a:solidFill>
+                <a:latin typeface="Consolas"/>
+              </a:defRPr>
+            </a:pPr>
+            <a:r>
+              <a:t>$ ./scripts/module4.sh --help</a:t>
+            </a:r>
+          </a:p>
+        </p:txBody>
+      </p:sp>
+      <p:pic>
+        <p:nvPicPr>
+          <p:cNvPr id="4" name="Picture 3" descr="module4_check.png"/>
+          <p:cNvPicPr>
+            <a:picLocks noChangeAspect="1"/>
+          </p:cNvPicPr>
+          <p:nvPr/>
+        </p:nvPicPr>
+        <p:blipFill>
+          <a:blip r:embed="rId2"/>
+          <a:stretch>
+            <a:fillRect/>
+          </a:stretch>
+        </p:blipFill>
+        <p:spPr>
+          <a:xfrm>
+            <a:off x="548640" y="1965960"/>
+            <a:ext cx="7071358" cy="3977639"/>
+          </a:xfrm>
+          <a:prstGeom prst="rect">
+            <a:avLst/>
+          </a:prstGeom>
+        </p:spPr>
+      </p:pic>
+      <p:sp>
+        <p:nvSpPr>
+          <p:cNvPr id="5" name="TextBox 4"/>
+          <p:cNvSpPr txBox="1"/>
+          <p:nvPr/>
+        </p:nvSpPr>
+        <p:spPr>
+          <a:xfrm>
+            <a:off x="548640" y="6355080"/>
+            <a:ext cx="11064240" cy="320040"/>
           </a:xfrm>
           <a:prstGeom prst="rect">
             <a:avLst/>
@@ -8647,6 +10560,102 @@
           </a:bodyPr>
           <a:lstStyle/>
           <a:p>
+            <a:pPr algn="r">
+              <a:lnSpc>
+                <a:spcPts val="2200"/>
+              </a:lnSpc>
+              <a:defRPr sz="1000" b="0">
+                <a:solidFill>
+                  <a:srgbClr val="666666"/>
+                </a:solidFill>
+                <a:latin typeface="Calibri"/>
+              </a:defRPr>
+            </a:pPr>
+            <a:r>
+              <a:t>learn_uart_spi_i2c / Module 4</a:t>
+            </a:r>
+          </a:p>
+        </p:txBody>
+      </p:sp>
+    </p:spTree>
+  </p:cSld>
+  <p:clrMapOvr>
+    <a:masterClrMapping/>
+  </p:clrMapOvr>
+</p:sld>
+</file>
+
+<file path=ppt/slides/slide32.xml><?xml version="1.0" encoding="utf-8"?>
+<p:sld xmlns:a="http://schemas.openxmlformats.org/drawingml/2006/main" xmlns:p="http://schemas.openxmlformats.org/presentationml/2006/main" xmlns:r="http://schemas.openxmlformats.org/officeDocument/2006/relationships">
+  <p:cSld>
+    <p:spTree>
+      <p:nvGrpSpPr>
+        <p:cNvPr id="1" name=""/>
+        <p:cNvGrpSpPr/>
+        <p:nvPr/>
+      </p:nvGrpSpPr>
+      <p:grpSpPr/>
+      <p:sp>
+        <p:nvSpPr>
+          <p:cNvPr id="2" name="TextBox 1"/>
+          <p:cNvSpPr txBox="1"/>
+          <p:nvPr/>
+        </p:nvSpPr>
+        <p:spPr>
+          <a:xfrm>
+            <a:off x="548640" y="411480"/>
+            <a:ext cx="11064240" cy="777240"/>
+          </a:xfrm>
+          <a:prstGeom prst="rect">
+            <a:avLst/>
+          </a:prstGeom>
+          <a:noFill/>
+        </p:spPr>
+        <p:txBody>
+          <a:bodyPr wrap="square">
+            <a:noAutofit/>
+          </a:bodyPr>
+          <a:lstStyle/>
+          <a:p>
+            <a:pPr>
+              <a:lnSpc>
+                <a:spcPts val="2200"/>
+              </a:lnSpc>
+              <a:defRPr sz="2800" b="1">
+                <a:solidFill>
+                  <a:srgbClr val="1A1A2E"/>
+                </a:solidFill>
+                <a:latin typeface="Calibri"/>
+              </a:defRPr>
+            </a:pPr>
+            <a:r>
+              <a:t>Example 1: UART UVM agent</a:t>
+            </a:r>
+          </a:p>
+        </p:txBody>
+      </p:sp>
+      <p:sp>
+        <p:nvSpPr>
+          <p:cNvPr id="3" name="TextBox 2"/>
+          <p:cNvSpPr txBox="1"/>
+          <p:nvPr/>
+        </p:nvSpPr>
+        <p:spPr>
+          <a:xfrm>
+            <a:off x="548640" y="1234440"/>
+            <a:ext cx="11064240" cy="4937760"/>
+          </a:xfrm>
+          <a:prstGeom prst="rect">
+            <a:avLst/>
+          </a:prstGeom>
+          <a:noFill/>
+        </p:spPr>
+        <p:txBody>
+          <a:bodyPr wrap="square">
+            <a:noAutofit/>
+          </a:bodyPr>
+          <a:lstStyle/>
+          <a:p>
             <a:pPr>
               <a:lnSpc>
                 <a:spcPts val="2200"/>
@@ -8662,7 +10671,7 @@
               </a:defRPr>
             </a:pPr>
             <a:r>
-              <a:t>• Extend UART verification to **UVM+SV** — UART agent</a:t>
+              <a:t>• Same UART DUT as Module 3 with a full UVM agent</a:t>
             </a:r>
           </a:p>
           <a:p>
@@ -8681,7 +10690,7 @@
               </a:defRPr>
             </a:pPr>
             <a:r>
-              <a:t>      (transaction, sequence, driver, monitor, scoreb…</a:t>
+              <a:t>      (sequence, driver, monitor, scoreboard)</a:t>
             </a:r>
           </a:p>
           <a:p>
@@ -8700,7 +10709,7 @@
               </a:defRPr>
             </a:pPr>
             <a:r>
-              <a:t>• Complete module4/CHECKLIST.md</a:t>
+              <a:t>• Monitor reconstructs bytes from the serial `tx` line</a:t>
             </a:r>
           </a:p>
           <a:p>
@@ -8719,7 +10728,7 @@
               </a:defRPr>
             </a:pPr>
             <a:r>
-              <a:t>• Review module4/EXAMPLES.md and run each lab</a:t>
+              <a:t>• Loopback RX checking via `check_rx_byte` in the</a:t>
             </a:r>
           </a:p>
           <a:p>
@@ -8738,7 +10747,1105 @@
               </a:defRPr>
             </a:pPr>
             <a:r>
-              <a:t>• Next: SPI</a:t>
+              <a:t>      scoreboard</a:t>
+            </a:r>
+          </a:p>
+        </p:txBody>
+      </p:sp>
+      <p:sp>
+        <p:nvSpPr>
+          <p:cNvPr id="4" name="TextBox 3"/>
+          <p:cNvSpPr txBox="1"/>
+          <p:nvPr/>
+        </p:nvSpPr>
+        <p:spPr>
+          <a:xfrm>
+            <a:off x="548640" y="6355080"/>
+            <a:ext cx="11064240" cy="320040"/>
+          </a:xfrm>
+          <a:prstGeom prst="rect">
+            <a:avLst/>
+          </a:prstGeom>
+          <a:noFill/>
+        </p:spPr>
+        <p:txBody>
+          <a:bodyPr wrap="square">
+            <a:noAutofit/>
+          </a:bodyPr>
+          <a:lstStyle/>
+          <a:p>
+            <a:pPr algn="r">
+              <a:lnSpc>
+                <a:spcPts val="2200"/>
+              </a:lnSpc>
+              <a:defRPr sz="1000" b="0">
+                <a:solidFill>
+                  <a:srgbClr val="666666"/>
+                </a:solidFill>
+                <a:latin typeface="Calibri"/>
+              </a:defRPr>
+            </a:pPr>
+            <a:r>
+              <a:t>learn_uart_spi_i2c / Module 4</a:t>
+            </a:r>
+          </a:p>
+        </p:txBody>
+      </p:sp>
+    </p:spTree>
+  </p:cSld>
+  <p:clrMapOvr>
+    <a:masterClrMapping/>
+  </p:clrMapOvr>
+</p:sld>
+</file>
+
+<file path=ppt/slides/slide33.xml><?xml version="1.0" encoding="utf-8"?>
+<p:sld xmlns:a="http://schemas.openxmlformats.org/drawingml/2006/main" xmlns:p="http://schemas.openxmlformats.org/presentationml/2006/main" xmlns:r="http://schemas.openxmlformats.org/officeDocument/2006/relationships">
+  <p:cSld>
+    <p:spTree>
+      <p:nvGrpSpPr>
+        <p:cNvPr id="1" name=""/>
+        <p:cNvGrpSpPr/>
+        <p:nvPr/>
+      </p:nvGrpSpPr>
+      <p:grpSpPr/>
+      <p:sp>
+        <p:nvSpPr>
+          <p:cNvPr id="2" name="TextBox 1"/>
+          <p:cNvSpPr txBox="1"/>
+          <p:nvPr/>
+        </p:nvSpPr>
+        <p:spPr>
+          <a:xfrm>
+            <a:off x="548640" y="411480"/>
+            <a:ext cx="11064240" cy="777240"/>
+          </a:xfrm>
+          <a:prstGeom prst="rect">
+            <a:avLst/>
+          </a:prstGeom>
+          <a:noFill/>
+        </p:spPr>
+        <p:txBody>
+          <a:bodyPr wrap="square">
+            <a:noAutofit/>
+          </a:bodyPr>
+          <a:lstStyle/>
+          <a:p>
+            <a:pPr>
+              <a:lnSpc>
+                <a:spcPts val="2200"/>
+              </a:lnSpc>
+              <a:defRPr sz="2800" b="1">
+                <a:solidFill>
+                  <a:srgbClr val="1A1A2E"/>
+                </a:solidFill>
+                <a:latin typeface="Calibri"/>
+              </a:defRPr>
+            </a:pPr>
+            <a:r>
+              <a:t>Demo: UART UVM agent</a:t>
+            </a:r>
+          </a:p>
+        </p:txBody>
+      </p:sp>
+      <p:sp>
+        <p:nvSpPr>
+          <p:cNvPr id="3" name="TextBox 2"/>
+          <p:cNvSpPr txBox="1"/>
+          <p:nvPr/>
+        </p:nvSpPr>
+        <p:spPr>
+          <a:xfrm>
+            <a:off x="548640" y="1051560"/>
+            <a:ext cx="11064240" cy="914400"/>
+          </a:xfrm>
+          <a:prstGeom prst="rect">
+            <a:avLst/>
+          </a:prstGeom>
+          <a:solidFill>
+            <a:srgbClr val="F4F4F4"/>
+          </a:solidFill>
+        </p:spPr>
+        <p:txBody>
+          <a:bodyPr wrap="square">
+            <a:noAutofit/>
+          </a:bodyPr>
+          <a:lstStyle/>
+          <a:p>
+            <a:pPr>
+              <a:lnSpc>
+                <a:spcPts val="2200"/>
+              </a:lnSpc>
+              <a:spcAft>
+                <a:spcPts val="200"/>
+              </a:spcAft>
+              <a:defRPr sz="2000" b="0">
+                <a:solidFill>
+                  <a:srgbClr val="333333"/>
+                </a:solidFill>
+                <a:latin typeface="Consolas"/>
+              </a:defRPr>
+            </a:pPr>
+            <a:r>
+              <a:t>$ cd module4/examples/uart_uvm &amp;&amp; make SIM=verilator</a:t>
+            </a:r>
+          </a:p>
+          <a:p>
+            <a:pPr>
+              <a:lnSpc>
+                <a:spcPts val="2200"/>
+              </a:lnSpc>
+              <a:spcAft>
+                <a:spcPts val="200"/>
+              </a:spcAft>
+              <a:defRPr sz="2000" b="0">
+                <a:solidFill>
+                  <a:srgbClr val="333333"/>
+                </a:solidFill>
+                <a:latin typeface="Consolas"/>
+              </a:defRPr>
+            </a:pPr>
+            <a:r>
+              <a:t>      TEST=test_uart_uvm</a:t>
+            </a:r>
+          </a:p>
+        </p:txBody>
+      </p:sp>
+      <p:pic>
+        <p:nvPicPr>
+          <p:cNvPr id="4" name="Picture 3" descr="ex01_uart_uvm.png"/>
+          <p:cNvPicPr>
+            <a:picLocks noChangeAspect="1"/>
+          </p:cNvPicPr>
+          <p:nvPr/>
+        </p:nvPicPr>
+        <p:blipFill>
+          <a:blip r:embed="rId2"/>
+          <a:stretch>
+            <a:fillRect/>
+          </a:stretch>
+        </p:blipFill>
+        <p:spPr>
+          <a:xfrm>
+            <a:off x="548640" y="1965960"/>
+            <a:ext cx="7071358" cy="3977639"/>
+          </a:xfrm>
+          <a:prstGeom prst="rect">
+            <a:avLst/>
+          </a:prstGeom>
+        </p:spPr>
+      </p:pic>
+      <p:sp>
+        <p:nvSpPr>
+          <p:cNvPr id="5" name="TextBox 4"/>
+          <p:cNvSpPr txBox="1"/>
+          <p:nvPr/>
+        </p:nvSpPr>
+        <p:spPr>
+          <a:xfrm>
+            <a:off x="548640" y="6355080"/>
+            <a:ext cx="11064240" cy="320040"/>
+          </a:xfrm>
+          <a:prstGeom prst="rect">
+            <a:avLst/>
+          </a:prstGeom>
+          <a:noFill/>
+        </p:spPr>
+        <p:txBody>
+          <a:bodyPr wrap="square">
+            <a:noAutofit/>
+          </a:bodyPr>
+          <a:lstStyle/>
+          <a:p>
+            <a:pPr algn="r">
+              <a:lnSpc>
+                <a:spcPts val="2200"/>
+              </a:lnSpc>
+              <a:defRPr sz="1000" b="0">
+                <a:solidFill>
+                  <a:srgbClr val="666666"/>
+                </a:solidFill>
+                <a:latin typeface="Calibri"/>
+              </a:defRPr>
+            </a:pPr>
+            <a:r>
+              <a:t>learn_uart_spi_i2c / Module 4</a:t>
+            </a:r>
+          </a:p>
+        </p:txBody>
+      </p:sp>
+    </p:spTree>
+  </p:cSld>
+  <p:clrMapOvr>
+    <a:masterClrMapping/>
+  </p:clrMapOvr>
+</p:sld>
+</file>
+
+<file path=ppt/slides/slide34.xml><?xml version="1.0" encoding="utf-8"?>
+<p:sld xmlns:a="http://schemas.openxmlformats.org/drawingml/2006/main" xmlns:p="http://schemas.openxmlformats.org/presentationml/2006/main" xmlns:r="http://schemas.openxmlformats.org/officeDocument/2006/relationships">
+  <p:cSld>
+    <p:spTree>
+      <p:nvGrpSpPr>
+        <p:cNvPr id="1" name=""/>
+        <p:cNvGrpSpPr/>
+        <p:nvPr/>
+      </p:nvGrpSpPr>
+      <p:grpSpPr/>
+      <p:sp>
+        <p:nvSpPr>
+          <p:cNvPr id="2" name="TextBox 1"/>
+          <p:cNvSpPr txBox="1"/>
+          <p:nvPr/>
+        </p:nvSpPr>
+        <p:spPr>
+          <a:xfrm>
+            <a:off x="548640" y="2743200"/>
+            <a:ext cx="11064240" cy="1371600"/>
+          </a:xfrm>
+          <a:prstGeom prst="rect">
+            <a:avLst/>
+          </a:prstGeom>
+          <a:noFill/>
+        </p:spPr>
+        <p:txBody>
+          <a:bodyPr wrap="square">
+            <a:noAutofit/>
+          </a:bodyPr>
+          <a:lstStyle/>
+          <a:p>
+            <a:pPr algn="ctr">
+              <a:lnSpc>
+                <a:spcPts val="2200"/>
+              </a:lnSpc>
+              <a:defRPr sz="3600" b="1">
+                <a:solidFill>
+                  <a:srgbClr val="1A1A2E"/>
+                </a:solidFill>
+                <a:latin typeface="Calibri"/>
+              </a:defRPr>
+            </a:pPr>
+            <a:r>
+              <a:t>Key concepts</a:t>
+            </a:r>
+          </a:p>
+        </p:txBody>
+      </p:sp>
+      <p:sp>
+        <p:nvSpPr>
+          <p:cNvPr id="3" name="TextBox 2"/>
+          <p:cNvSpPr txBox="1"/>
+          <p:nvPr/>
+        </p:nvSpPr>
+        <p:spPr>
+          <a:xfrm>
+            <a:off x="548640" y="6355080"/>
+            <a:ext cx="11064240" cy="320040"/>
+          </a:xfrm>
+          <a:prstGeom prst="rect">
+            <a:avLst/>
+          </a:prstGeom>
+          <a:noFill/>
+        </p:spPr>
+        <p:txBody>
+          <a:bodyPr wrap="square">
+            <a:noAutofit/>
+          </a:bodyPr>
+          <a:lstStyle/>
+          <a:p>
+            <a:pPr algn="r">
+              <a:lnSpc>
+                <a:spcPts val="2200"/>
+              </a:lnSpc>
+              <a:defRPr sz="1000" b="0">
+                <a:solidFill>
+                  <a:srgbClr val="666666"/>
+                </a:solidFill>
+                <a:latin typeface="Calibri"/>
+              </a:defRPr>
+            </a:pPr>
+            <a:r>
+              <a:t>learn_uart_spi_i2c / Module 4</a:t>
+            </a:r>
+          </a:p>
+        </p:txBody>
+      </p:sp>
+    </p:spTree>
+  </p:cSld>
+  <p:clrMapOvr>
+    <a:masterClrMapping/>
+  </p:clrMapOvr>
+</p:sld>
+</file>
+
+<file path=ppt/slides/slide35.xml><?xml version="1.0" encoding="utf-8"?>
+<p:sld xmlns:a="http://schemas.openxmlformats.org/drawingml/2006/main" xmlns:p="http://schemas.openxmlformats.org/presentationml/2006/main" xmlns:r="http://schemas.openxmlformats.org/officeDocument/2006/relationships">
+  <p:cSld>
+    <p:spTree>
+      <p:nvGrpSpPr>
+        <p:cNvPr id="1" name=""/>
+        <p:cNvGrpSpPr/>
+        <p:nvPr/>
+      </p:nvGrpSpPr>
+      <p:grpSpPr/>
+      <p:sp>
+        <p:nvSpPr>
+          <p:cNvPr id="2" name="TextBox 1"/>
+          <p:cNvSpPr txBox="1"/>
+          <p:nvPr/>
+        </p:nvSpPr>
+        <p:spPr>
+          <a:xfrm>
+            <a:off x="548640" y="411480"/>
+            <a:ext cx="11064240" cy="777240"/>
+          </a:xfrm>
+          <a:prstGeom prst="rect">
+            <a:avLst/>
+          </a:prstGeom>
+          <a:noFill/>
+        </p:spPr>
+        <p:txBody>
+          <a:bodyPr wrap="square">
+            <a:noAutofit/>
+          </a:bodyPr>
+          <a:lstStyle/>
+          <a:p>
+            <a:pPr>
+              <a:lnSpc>
+                <a:spcPts val="2200"/>
+              </a:lnSpc>
+              <a:defRPr sz="2800" b="1">
+                <a:solidFill>
+                  <a:srgbClr val="1A1A2E"/>
+                </a:solidFill>
+                <a:latin typeface="Calibri"/>
+              </a:defRPr>
+            </a:pPr>
+            <a:r>
+              <a:t>1. Reuse DUT, upgrade TB</a:t>
+            </a:r>
+          </a:p>
+        </p:txBody>
+      </p:sp>
+      <p:sp>
+        <p:nvSpPr>
+          <p:cNvPr id="3" name="TextBox 2"/>
+          <p:cNvSpPr txBox="1"/>
+          <p:nvPr/>
+        </p:nvSpPr>
+        <p:spPr>
+          <a:xfrm>
+            <a:off x="548640" y="1234440"/>
+            <a:ext cx="11064240" cy="4937760"/>
+          </a:xfrm>
+          <a:prstGeom prst="rect">
+            <a:avLst/>
+          </a:prstGeom>
+          <a:noFill/>
+        </p:spPr>
+        <p:txBody>
+          <a:bodyPr wrap="square">
+            <a:noAutofit/>
+          </a:bodyPr>
+          <a:lstStyle/>
+          <a:p>
+            <a:pPr>
+              <a:lnSpc>
+                <a:spcPts val="2200"/>
+              </a:lnSpc>
+              <a:spcAft>
+                <a:spcPts val="1000"/>
+              </a:spcAft>
+              <a:defRPr sz="2000" b="0">
+                <a:solidFill>
+                  <a:srgbClr val="333333"/>
+                </a:solidFill>
+                <a:latin typeface="Calibri"/>
+              </a:defRPr>
+            </a:pPr>
+            <a:r>
+              <a:t>• RTL unchanged from baseline; UVM replaces directed</a:t>
+            </a:r>
+          </a:p>
+          <a:p>
+            <a:pPr>
+              <a:lnSpc>
+                <a:spcPts val="2200"/>
+              </a:lnSpc>
+              <a:spcAft>
+                <a:spcPts val="1000"/>
+              </a:spcAft>
+              <a:defRPr sz="2000" b="0">
+                <a:solidFill>
+                  <a:srgbClr val="333333"/>
+                </a:solidFill>
+                <a:latin typeface="Calibri"/>
+              </a:defRPr>
+            </a:pPr>
+            <a:r>
+              <a:t>      `initial` stimulus.</a:t>
+            </a:r>
+          </a:p>
+        </p:txBody>
+      </p:sp>
+      <p:sp>
+        <p:nvSpPr>
+          <p:cNvPr id="4" name="TextBox 3"/>
+          <p:cNvSpPr txBox="1"/>
+          <p:nvPr/>
+        </p:nvSpPr>
+        <p:spPr>
+          <a:xfrm>
+            <a:off x="548640" y="6355080"/>
+            <a:ext cx="11064240" cy="320040"/>
+          </a:xfrm>
+          <a:prstGeom prst="rect">
+            <a:avLst/>
+          </a:prstGeom>
+          <a:noFill/>
+        </p:spPr>
+        <p:txBody>
+          <a:bodyPr wrap="square">
+            <a:noAutofit/>
+          </a:bodyPr>
+          <a:lstStyle/>
+          <a:p>
+            <a:pPr algn="r">
+              <a:lnSpc>
+                <a:spcPts val="2200"/>
+              </a:lnSpc>
+              <a:defRPr sz="1000" b="0">
+                <a:solidFill>
+                  <a:srgbClr val="666666"/>
+                </a:solidFill>
+                <a:latin typeface="Calibri"/>
+              </a:defRPr>
+            </a:pPr>
+            <a:r>
+              <a:t>learn_uart_spi_i2c / Module 4</a:t>
+            </a:r>
+          </a:p>
+        </p:txBody>
+      </p:sp>
+    </p:spTree>
+  </p:cSld>
+  <p:clrMapOvr>
+    <a:masterClrMapping/>
+  </p:clrMapOvr>
+</p:sld>
+</file>
+
+<file path=ppt/slides/slide36.xml><?xml version="1.0" encoding="utf-8"?>
+<p:sld xmlns:a="http://schemas.openxmlformats.org/drawingml/2006/main" xmlns:p="http://schemas.openxmlformats.org/presentationml/2006/main" xmlns:r="http://schemas.openxmlformats.org/officeDocument/2006/relationships">
+  <p:cSld>
+    <p:spTree>
+      <p:nvGrpSpPr>
+        <p:cNvPr id="1" name=""/>
+        <p:cNvGrpSpPr/>
+        <p:nvPr/>
+      </p:nvGrpSpPr>
+      <p:grpSpPr/>
+      <p:sp>
+        <p:nvSpPr>
+          <p:cNvPr id="2" name="TextBox 1"/>
+          <p:cNvSpPr txBox="1"/>
+          <p:nvPr/>
+        </p:nvSpPr>
+        <p:spPr>
+          <a:xfrm>
+            <a:off x="548640" y="411480"/>
+            <a:ext cx="11064240" cy="777240"/>
+          </a:xfrm>
+          <a:prstGeom prst="rect">
+            <a:avLst/>
+          </a:prstGeom>
+          <a:noFill/>
+        </p:spPr>
+        <p:txBody>
+          <a:bodyPr wrap="square">
+            <a:noAutofit/>
+          </a:bodyPr>
+          <a:lstStyle/>
+          <a:p>
+            <a:pPr>
+              <a:lnSpc>
+                <a:spcPts val="2200"/>
+              </a:lnSpc>
+              <a:defRPr sz="2800" b="1">
+                <a:solidFill>
+                  <a:srgbClr val="1A1A2E"/>
+                </a:solidFill>
+                <a:latin typeface="Calibri"/>
+              </a:defRPr>
+            </a:pPr>
+            <a:r>
+              <a:t>2. Dual path checking</a:t>
+            </a:r>
+          </a:p>
+        </p:txBody>
+      </p:sp>
+      <p:sp>
+        <p:nvSpPr>
+          <p:cNvPr id="3" name="TextBox 2"/>
+          <p:cNvSpPr txBox="1"/>
+          <p:nvPr/>
+        </p:nvSpPr>
+        <p:spPr>
+          <a:xfrm>
+            <a:off x="548640" y="1234440"/>
+            <a:ext cx="11064240" cy="4937760"/>
+          </a:xfrm>
+          <a:prstGeom prst="rect">
+            <a:avLst/>
+          </a:prstGeom>
+          <a:noFill/>
+        </p:spPr>
+        <p:txBody>
+          <a:bodyPr wrap="square">
+            <a:noAutofit/>
+          </a:bodyPr>
+          <a:lstStyle/>
+          <a:p>
+            <a:pPr>
+              <a:lnSpc>
+                <a:spcPts val="2200"/>
+              </a:lnSpc>
+              <a:spcAft>
+                <a:spcPts val="1000"/>
+              </a:spcAft>
+              <a:defRPr sz="2000" b="0">
+                <a:solidFill>
+                  <a:srgbClr val="333333"/>
+                </a:solidFill>
+                <a:latin typeface="Calibri"/>
+              </a:defRPr>
+            </a:pPr>
+            <a:r>
+              <a:t>• TX monitor reconstructs serial bytes; RX hook checks</a:t>
+            </a:r>
+          </a:p>
+          <a:p>
+            <a:pPr>
+              <a:lnSpc>
+                <a:spcPts val="2200"/>
+              </a:lnSpc>
+              <a:spcAft>
+                <a:spcPts val="1000"/>
+              </a:spcAft>
+              <a:defRPr sz="2000" b="0">
+                <a:solidFill>
+                  <a:srgbClr val="333333"/>
+                </a:solidFill>
+                <a:latin typeface="Calibri"/>
+              </a:defRPr>
+            </a:pPr>
+            <a:r>
+              <a:t>      loopback `data_valid`.</a:t>
+            </a:r>
+          </a:p>
+        </p:txBody>
+      </p:sp>
+      <p:sp>
+        <p:nvSpPr>
+          <p:cNvPr id="4" name="TextBox 3"/>
+          <p:cNvSpPr txBox="1"/>
+          <p:nvPr/>
+        </p:nvSpPr>
+        <p:spPr>
+          <a:xfrm>
+            <a:off x="548640" y="6355080"/>
+            <a:ext cx="11064240" cy="320040"/>
+          </a:xfrm>
+          <a:prstGeom prst="rect">
+            <a:avLst/>
+          </a:prstGeom>
+          <a:noFill/>
+        </p:spPr>
+        <p:txBody>
+          <a:bodyPr wrap="square">
+            <a:noAutofit/>
+          </a:bodyPr>
+          <a:lstStyle/>
+          <a:p>
+            <a:pPr algn="r">
+              <a:lnSpc>
+                <a:spcPts val="2200"/>
+              </a:lnSpc>
+              <a:defRPr sz="1000" b="0">
+                <a:solidFill>
+                  <a:srgbClr val="666666"/>
+                </a:solidFill>
+                <a:latin typeface="Calibri"/>
+              </a:defRPr>
+            </a:pPr>
+            <a:r>
+              <a:t>learn_uart_spi_i2c / Module 4</a:t>
+            </a:r>
+          </a:p>
+        </p:txBody>
+      </p:sp>
+    </p:spTree>
+  </p:cSld>
+  <p:clrMapOvr>
+    <a:masterClrMapping/>
+  </p:clrMapOvr>
+</p:sld>
+</file>
+
+<file path=ppt/slides/slide37.xml><?xml version="1.0" encoding="utf-8"?>
+<p:sld xmlns:a="http://schemas.openxmlformats.org/drawingml/2006/main" xmlns:p="http://schemas.openxmlformats.org/presentationml/2006/main" xmlns:r="http://schemas.openxmlformats.org/officeDocument/2006/relationships">
+  <p:cSld>
+    <p:spTree>
+      <p:nvGrpSpPr>
+        <p:cNvPr id="1" name=""/>
+        <p:cNvGrpSpPr/>
+        <p:nvPr/>
+      </p:nvGrpSpPr>
+      <p:grpSpPr/>
+      <p:sp>
+        <p:nvSpPr>
+          <p:cNvPr id="2" name="TextBox 1"/>
+          <p:cNvSpPr txBox="1"/>
+          <p:nvPr/>
+        </p:nvSpPr>
+        <p:spPr>
+          <a:xfrm>
+            <a:off x="548640" y="2743200"/>
+            <a:ext cx="11064240" cy="1371600"/>
+          </a:xfrm>
+          <a:prstGeom prst="rect">
+            <a:avLst/>
+          </a:prstGeom>
+          <a:noFill/>
+        </p:spPr>
+        <p:txBody>
+          <a:bodyPr wrap="square">
+            <a:noAutofit/>
+          </a:bodyPr>
+          <a:lstStyle/>
+          <a:p>
+            <a:pPr algn="ctr">
+              <a:lnSpc>
+                <a:spcPts val="2200"/>
+              </a:lnSpc>
+              <a:defRPr sz="3600" b="1">
+                <a:solidFill>
+                  <a:srgbClr val="1A1A2E"/>
+                </a:solidFill>
+                <a:latin typeface="Calibri"/>
+              </a:defRPr>
+            </a:pPr>
+            <a:r>
+              <a:t>Common pitfalls</a:t>
+            </a:r>
+          </a:p>
+        </p:txBody>
+      </p:sp>
+      <p:sp>
+        <p:nvSpPr>
+          <p:cNvPr id="3" name="TextBox 2"/>
+          <p:cNvSpPr txBox="1"/>
+          <p:nvPr/>
+        </p:nvSpPr>
+        <p:spPr>
+          <a:xfrm>
+            <a:off x="548640" y="6355080"/>
+            <a:ext cx="11064240" cy="320040"/>
+          </a:xfrm>
+          <a:prstGeom prst="rect">
+            <a:avLst/>
+          </a:prstGeom>
+          <a:noFill/>
+        </p:spPr>
+        <p:txBody>
+          <a:bodyPr wrap="square">
+            <a:noAutofit/>
+          </a:bodyPr>
+          <a:lstStyle/>
+          <a:p>
+            <a:pPr algn="r">
+              <a:lnSpc>
+                <a:spcPts val="2200"/>
+              </a:lnSpc>
+              <a:defRPr sz="1000" b="0">
+                <a:solidFill>
+                  <a:srgbClr val="666666"/>
+                </a:solidFill>
+                <a:latin typeface="Calibri"/>
+              </a:defRPr>
+            </a:pPr>
+            <a:r>
+              <a:t>learn_uart_spi_i2c / Module 4</a:t>
+            </a:r>
+          </a:p>
+        </p:txBody>
+      </p:sp>
+    </p:spTree>
+  </p:cSld>
+  <p:clrMapOvr>
+    <a:masterClrMapping/>
+  </p:clrMapOvr>
+</p:sld>
+</file>
+
+<file path=ppt/slides/slide38.xml><?xml version="1.0" encoding="utf-8"?>
+<p:sld xmlns:a="http://schemas.openxmlformats.org/drawingml/2006/main" xmlns:p="http://schemas.openxmlformats.org/presentationml/2006/main" xmlns:r="http://schemas.openxmlformats.org/officeDocument/2006/relationships">
+  <p:cSld>
+    <p:spTree>
+      <p:nvGrpSpPr>
+        <p:cNvPr id="1" name=""/>
+        <p:cNvGrpSpPr/>
+        <p:nvPr/>
+      </p:nvGrpSpPr>
+      <p:grpSpPr/>
+      <p:sp>
+        <p:nvSpPr>
+          <p:cNvPr id="2" name="TextBox 1"/>
+          <p:cNvSpPr txBox="1"/>
+          <p:nvPr/>
+        </p:nvSpPr>
+        <p:spPr>
+          <a:xfrm>
+            <a:off x="548640" y="411480"/>
+            <a:ext cx="11064240" cy="777240"/>
+          </a:xfrm>
+          <a:prstGeom prst="rect">
+            <a:avLst/>
+          </a:prstGeom>
+          <a:noFill/>
+        </p:spPr>
+        <p:txBody>
+          <a:bodyPr wrap="square">
+            <a:noAutofit/>
+          </a:bodyPr>
+          <a:lstStyle/>
+          <a:p>
+            <a:pPr>
+              <a:lnSpc>
+                <a:spcPts val="2200"/>
+              </a:lnSpc>
+              <a:defRPr sz="2800" b="1">
+                <a:solidFill>
+                  <a:srgbClr val="1A1A2E"/>
+                </a:solidFill>
+                <a:latin typeface="Calibri"/>
+              </a:defRPr>
+            </a:pPr>
+            <a:r>
+              <a:t>Monitor baud mismatch</a:t>
+            </a:r>
+          </a:p>
+        </p:txBody>
+      </p:sp>
+      <p:sp>
+        <p:nvSpPr>
+          <p:cNvPr id="3" name="TextBox 2"/>
+          <p:cNvSpPr txBox="1"/>
+          <p:nvPr/>
+        </p:nvSpPr>
+        <p:spPr>
+          <a:xfrm>
+            <a:off x="548640" y="1234440"/>
+            <a:ext cx="11064240" cy="4937760"/>
+          </a:xfrm>
+          <a:prstGeom prst="rect">
+            <a:avLst/>
+          </a:prstGeom>
+          <a:noFill/>
+        </p:spPr>
+        <p:txBody>
+          <a:bodyPr wrap="square">
+            <a:noAutofit/>
+          </a:bodyPr>
+          <a:lstStyle/>
+          <a:p>
+            <a:pPr>
+              <a:lnSpc>
+                <a:spcPts val="2200"/>
+              </a:lnSpc>
+              <a:spcAft>
+                <a:spcPts val="1000"/>
+              </a:spcAft>
+              <a:defRPr sz="2000" b="0">
+                <a:solidFill>
+                  <a:srgbClr val="333333"/>
+                </a:solidFill>
+                <a:latin typeface="Calibri"/>
+              </a:defRPr>
+            </a:pPr>
+            <a:r>
+              <a:t>• Mistake: Sampling `tx` at system clock instead of</a:t>
+            </a:r>
+          </a:p>
+          <a:p>
+            <a:pPr>
+              <a:lnSpc>
+                <a:spcPts val="2200"/>
+              </a:lnSpc>
+              <a:spcAft>
+                <a:spcPts val="1000"/>
+              </a:spcAft>
+              <a:defRPr sz="2000" b="0">
+                <a:solidFill>
+                  <a:srgbClr val="333333"/>
+                </a:solidFill>
+                <a:latin typeface="Calibri"/>
+              </a:defRPr>
+            </a:pPr>
+            <a:r>
+              <a:t>      `baud_tick` times.</a:t>
+            </a:r>
+          </a:p>
+          <a:p>
+            <a:pPr>
+              <a:lnSpc>
+                <a:spcPts val="2200"/>
+              </a:lnSpc>
+              <a:spcAft>
+                <a:spcPts val="1000"/>
+              </a:spcAft>
+              <a:defRPr sz="2000" b="0">
+                <a:solidFill>
+                  <a:srgbClr val="333333"/>
+                </a:solidFill>
+                <a:latin typeface="Calibri"/>
+              </a:defRPr>
+            </a:pPr>
+            <a:r>
+              <a:t>• Correct: One sample per `baud_tick` per UART rules</a:t>
+            </a:r>
+          </a:p>
+          <a:p>
+            <a:pPr>
+              <a:lnSpc>
+                <a:spcPts val="2200"/>
+              </a:lnSpc>
+              <a:spcAft>
+                <a:spcPts val="1000"/>
+              </a:spcAft>
+              <a:defRPr sz="2000" b="0">
+                <a:solidFill>
+                  <a:srgbClr val="333333"/>
+                </a:solidFill>
+                <a:latin typeface="Calibri"/>
+              </a:defRPr>
+            </a:pPr>
+            <a:r>
+              <a:t>      (as in UartTxMonitor).</a:t>
+            </a:r>
+          </a:p>
+          <a:p>
+            <a:pPr>
+              <a:lnSpc>
+                <a:spcPts val="2200"/>
+              </a:lnSpc>
+              <a:spcAft>
+                <a:spcPts val="1000"/>
+              </a:spcAft>
+              <a:defRPr sz="2000" b="0">
+                <a:solidFill>
+                  <a:srgbClr val="333333"/>
+                </a:solidFill>
+                <a:latin typeface="Calibri"/>
+              </a:defRPr>
+            </a:pPr>
+            <a:r>
+              <a:t>• Why: Reconstructed byte will not match driven data.</a:t>
+            </a:r>
+          </a:p>
+        </p:txBody>
+      </p:sp>
+      <p:sp>
+        <p:nvSpPr>
+          <p:cNvPr id="4" name="TextBox 3"/>
+          <p:cNvSpPr txBox="1"/>
+          <p:nvPr/>
+        </p:nvSpPr>
+        <p:spPr>
+          <a:xfrm>
+            <a:off x="548640" y="6355080"/>
+            <a:ext cx="11064240" cy="320040"/>
+          </a:xfrm>
+          <a:prstGeom prst="rect">
+            <a:avLst/>
+          </a:prstGeom>
+          <a:noFill/>
+        </p:spPr>
+        <p:txBody>
+          <a:bodyPr wrap="square">
+            <a:noAutofit/>
+          </a:bodyPr>
+          <a:lstStyle/>
+          <a:p>
+            <a:pPr algn="r">
+              <a:lnSpc>
+                <a:spcPts val="2200"/>
+              </a:lnSpc>
+              <a:defRPr sz="1000" b="0">
+                <a:solidFill>
+                  <a:srgbClr val="666666"/>
+                </a:solidFill>
+                <a:latin typeface="Calibri"/>
+              </a:defRPr>
+            </a:pPr>
+            <a:r>
+              <a:t>learn_uart_spi_i2c / Module 4</a:t>
+            </a:r>
+          </a:p>
+        </p:txBody>
+      </p:sp>
+    </p:spTree>
+  </p:cSld>
+  <p:clrMapOvr>
+    <a:masterClrMapping/>
+  </p:clrMapOvr>
+</p:sld>
+</file>
+
+<file path=ppt/slides/slide39.xml><?xml version="1.0" encoding="utf-8"?>
+<p:sld xmlns:a="http://schemas.openxmlformats.org/drawingml/2006/main" xmlns:p="http://schemas.openxmlformats.org/presentationml/2006/main" xmlns:r="http://schemas.openxmlformats.org/officeDocument/2006/relationships">
+  <p:cSld>
+    <p:spTree>
+      <p:nvGrpSpPr>
+        <p:cNvPr id="1" name=""/>
+        <p:cNvGrpSpPr/>
+        <p:nvPr/>
+      </p:nvGrpSpPr>
+      <p:grpSpPr/>
+      <p:sp>
+        <p:nvSpPr>
+          <p:cNvPr id="2" name="TextBox 1"/>
+          <p:cNvSpPr txBox="1"/>
+          <p:nvPr/>
+        </p:nvSpPr>
+        <p:spPr>
+          <a:xfrm>
+            <a:off x="548640" y="411480"/>
+            <a:ext cx="11064240" cy="777240"/>
+          </a:xfrm>
+          <a:prstGeom prst="rect">
+            <a:avLst/>
+          </a:prstGeom>
+          <a:noFill/>
+        </p:spPr>
+        <p:txBody>
+          <a:bodyPr wrap="square">
+            <a:noAutofit/>
+          </a:bodyPr>
+          <a:lstStyle/>
+          <a:p>
+            <a:pPr>
+              <a:lnSpc>
+                <a:spcPts val="2200"/>
+              </a:lnSpc>
+              <a:defRPr sz="2800" b="1">
+                <a:solidFill>
+                  <a:srgbClr val="1A1A2E"/>
+                </a:solidFill>
+                <a:latin typeface="Calibri"/>
+              </a:defRPr>
+            </a:pPr>
+            <a:r>
+              <a:t>Forgetting loopback RX check</a:t>
+            </a:r>
+          </a:p>
+        </p:txBody>
+      </p:sp>
+      <p:sp>
+        <p:nvSpPr>
+          <p:cNvPr id="3" name="TextBox 2"/>
+          <p:cNvSpPr txBox="1"/>
+          <p:nvPr/>
+        </p:nvSpPr>
+        <p:spPr>
+          <a:xfrm>
+            <a:off x="548640" y="1234440"/>
+            <a:ext cx="11064240" cy="4937760"/>
+          </a:xfrm>
+          <a:prstGeom prst="rect">
+            <a:avLst/>
+          </a:prstGeom>
+          <a:noFill/>
+        </p:spPr>
+        <p:txBody>
+          <a:bodyPr wrap="square">
+            <a:noAutofit/>
+          </a:bodyPr>
+          <a:lstStyle/>
+          <a:p>
+            <a:pPr>
+              <a:lnSpc>
+                <a:spcPts val="2200"/>
+              </a:lnSpc>
+              <a:spcAft>
+                <a:spcPts val="1000"/>
+              </a:spcAft>
+              <a:defRPr sz="2000" b="0">
+                <a:solidFill>
+                  <a:srgbClr val="333333"/>
+                </a:solidFill>
+                <a:latin typeface="Calibri"/>
+              </a:defRPr>
+            </a:pPr>
+            <a:r>
+              <a:t>• Mistake: Scoreboard only compares TX monitor output.</a:t>
+            </a:r>
+          </a:p>
+          <a:p>
+            <a:pPr>
+              <a:lnSpc>
+                <a:spcPts val="2200"/>
+              </a:lnSpc>
+              <a:spcAft>
+                <a:spcPts val="1000"/>
+              </a:spcAft>
+              <a:defRPr sz="2000" b="0">
+                <a:solidFill>
+                  <a:srgbClr val="333333"/>
+                </a:solidFill>
+                <a:latin typeface="Calibri"/>
+              </a:defRPr>
+            </a:pPr>
+            <a:r>
+              <a:t>• Correct: Also call `check_rx_byte` when `data_valid`</a:t>
+            </a:r>
+          </a:p>
+          <a:p>
+            <a:pPr>
+              <a:lnSpc>
+                <a:spcPts val="2200"/>
+              </a:lnSpc>
+              <a:spcAft>
+                <a:spcPts val="1000"/>
+              </a:spcAft>
+              <a:defRPr sz="2000" b="0">
+                <a:solidFill>
+                  <a:srgbClr val="333333"/>
+                </a:solidFill>
+                <a:latin typeface="Calibri"/>
+              </a:defRPr>
+            </a:pPr>
+            <a:r>
+              <a:t>      asserts.</a:t>
+            </a:r>
+          </a:p>
+          <a:p>
+            <a:pPr>
+              <a:lnSpc>
+                <a:spcPts val="2200"/>
+              </a:lnSpc>
+              <a:spcAft>
+                <a:spcPts val="1000"/>
+              </a:spcAft>
+              <a:defRPr sz="2000" b="0">
+                <a:solidFill>
+                  <a:srgbClr val="333333"/>
+                </a:solidFill>
+                <a:latin typeface="Calibri"/>
+              </a:defRPr>
+            </a:pPr>
+            <a:r>
+              <a:t>• Why: TX path can pass while RX is broken.</a:t>
             </a:r>
           </a:p>
         </p:txBody>
@@ -8949,6 +12056,1034 @@
 </p:sld>
 </file>
 
+<file path=ppt/slides/slide40.xml><?xml version="1.0" encoding="utf-8"?>
+<p:sld xmlns:a="http://schemas.openxmlformats.org/drawingml/2006/main" xmlns:p="http://schemas.openxmlformats.org/presentationml/2006/main" xmlns:r="http://schemas.openxmlformats.org/officeDocument/2006/relationships">
+  <p:cSld>
+    <p:spTree>
+      <p:nvGrpSpPr>
+        <p:cNvPr id="1" name=""/>
+        <p:cNvGrpSpPr/>
+        <p:nvPr/>
+      </p:nvGrpSpPr>
+      <p:grpSpPr/>
+      <p:sp>
+        <p:nvSpPr>
+          <p:cNvPr id="2" name="TextBox 1"/>
+          <p:cNvSpPr txBox="1"/>
+          <p:nvPr/>
+        </p:nvSpPr>
+        <p:spPr>
+          <a:xfrm>
+            <a:off x="548640" y="2743200"/>
+            <a:ext cx="11064240" cy="1371600"/>
+          </a:xfrm>
+          <a:prstGeom prst="rect">
+            <a:avLst/>
+          </a:prstGeom>
+          <a:noFill/>
+        </p:spPr>
+        <p:txBody>
+          <a:bodyPr wrap="square">
+            <a:noAutofit/>
+          </a:bodyPr>
+          <a:lstStyle/>
+          <a:p>
+            <a:pPr algn="ctr">
+              <a:lnSpc>
+                <a:spcPts val="2200"/>
+              </a:lnSpc>
+              <a:defRPr sz="3600" b="1">
+                <a:solidFill>
+                  <a:srgbClr val="1A1A2E"/>
+                </a:solidFill>
+                <a:latin typeface="Calibri"/>
+              </a:defRPr>
+            </a:pPr>
+            <a:r>
+              <a:t>Practice &amp; assessment</a:t>
+            </a:r>
+          </a:p>
+        </p:txBody>
+      </p:sp>
+      <p:sp>
+        <p:nvSpPr>
+          <p:cNvPr id="3" name="TextBox 2"/>
+          <p:cNvSpPr txBox="1"/>
+          <p:nvPr/>
+        </p:nvSpPr>
+        <p:spPr>
+          <a:xfrm>
+            <a:off x="548640" y="6355080"/>
+            <a:ext cx="11064240" cy="320040"/>
+          </a:xfrm>
+          <a:prstGeom prst="rect">
+            <a:avLst/>
+          </a:prstGeom>
+          <a:noFill/>
+        </p:spPr>
+        <p:txBody>
+          <a:bodyPr wrap="square">
+            <a:noAutofit/>
+          </a:bodyPr>
+          <a:lstStyle/>
+          <a:p>
+            <a:pPr algn="r">
+              <a:lnSpc>
+                <a:spcPts val="2200"/>
+              </a:lnSpc>
+              <a:defRPr sz="1000" b="0">
+                <a:solidFill>
+                  <a:srgbClr val="666666"/>
+                </a:solidFill>
+                <a:latin typeface="Calibri"/>
+              </a:defRPr>
+            </a:pPr>
+            <a:r>
+              <a:t>learn_uart_spi_i2c / Module 4</a:t>
+            </a:r>
+          </a:p>
+        </p:txBody>
+      </p:sp>
+    </p:spTree>
+  </p:cSld>
+  <p:clrMapOvr>
+    <a:masterClrMapping/>
+  </p:clrMapOvr>
+</p:sld>
+</file>
+
+<file path=ppt/slides/slide41.xml><?xml version="1.0" encoding="utf-8"?>
+<p:sld xmlns:a="http://schemas.openxmlformats.org/drawingml/2006/main" xmlns:p="http://schemas.openxmlformats.org/presentationml/2006/main" xmlns:r="http://schemas.openxmlformats.org/officeDocument/2006/relationships">
+  <p:cSld>
+    <p:spTree>
+      <p:nvGrpSpPr>
+        <p:cNvPr id="1" name=""/>
+        <p:cNvGrpSpPr/>
+        <p:nvPr/>
+      </p:nvGrpSpPr>
+      <p:grpSpPr/>
+      <p:sp>
+        <p:nvSpPr>
+          <p:cNvPr id="2" name="TextBox 1"/>
+          <p:cNvSpPr txBox="1"/>
+          <p:nvPr/>
+        </p:nvSpPr>
+        <p:spPr>
+          <a:xfrm>
+            <a:off x="548640" y="411480"/>
+            <a:ext cx="11064240" cy="777240"/>
+          </a:xfrm>
+          <a:prstGeom prst="rect">
+            <a:avLst/>
+          </a:prstGeom>
+          <a:noFill/>
+        </p:spPr>
+        <p:txBody>
+          <a:bodyPr wrap="square">
+            <a:noAutofit/>
+          </a:bodyPr>
+          <a:lstStyle/>
+          <a:p>
+            <a:pPr>
+              <a:lnSpc>
+                <a:spcPts val="2200"/>
+              </a:lnSpc>
+              <a:defRPr sz="2800" b="1">
+                <a:solidFill>
+                  <a:srgbClr val="1A1A2E"/>
+                </a:solidFill>
+                <a:latin typeface="Calibri"/>
+              </a:defRPr>
+            </a:pPr>
+            <a:r>
+              <a:t>What you should know</a:t>
+            </a:r>
+          </a:p>
+        </p:txBody>
+      </p:sp>
+      <p:sp>
+        <p:nvSpPr>
+          <p:cNvPr id="3" name="TextBox 2"/>
+          <p:cNvSpPr txBox="1"/>
+          <p:nvPr/>
+        </p:nvSpPr>
+        <p:spPr>
+          <a:xfrm>
+            <a:off x="548640" y="1234440"/>
+            <a:ext cx="11064240" cy="4937760"/>
+          </a:xfrm>
+          <a:prstGeom prst="rect">
+            <a:avLst/>
+          </a:prstGeom>
+          <a:noFill/>
+        </p:spPr>
+        <p:txBody>
+          <a:bodyPr wrap="square">
+            <a:noAutofit/>
+          </a:bodyPr>
+          <a:lstStyle/>
+          <a:p>
+            <a:pPr>
+              <a:lnSpc>
+                <a:spcPts val="2200"/>
+              </a:lnSpc>
+              <a:spcAft>
+                <a:spcPts val="1000"/>
+              </a:spcAft>
+              <a:defRPr sz="2000" b="0">
+                <a:solidFill>
+                  <a:srgbClr val="333333"/>
+                </a:solidFill>
+                <a:latin typeface="Calibri"/>
+              </a:defRPr>
+            </a:pPr>
+            <a:r>
+              <a:t>• Describe the UART UVM agent (transaction, sequence,</a:t>
+            </a:r>
+          </a:p>
+          <a:p>
+            <a:pPr>
+              <a:lnSpc>
+                <a:spcPts val="2200"/>
+              </a:lnSpc>
+              <a:spcAft>
+                <a:spcPts val="1000"/>
+              </a:spcAft>
+              <a:defRPr sz="2000" b="0">
+                <a:solidFill>
+                  <a:srgbClr val="333333"/>
+                </a:solidFill>
+                <a:latin typeface="Calibri"/>
+              </a:defRPr>
+            </a:pPr>
+            <a:r>
+              <a:t>      driver, monitor, scoreboard).</a:t>
+            </a:r>
+          </a:p>
+          <a:p>
+            <a:pPr>
+              <a:lnSpc>
+                <a:spcPts val="2200"/>
+              </a:lnSpc>
+              <a:spcAft>
+                <a:spcPts val="1000"/>
+              </a:spcAft>
+              <a:defRPr sz="2000" b="0">
+                <a:solidFill>
+                  <a:srgbClr val="333333"/>
+                </a:solidFill>
+                <a:latin typeface="Calibri"/>
+              </a:defRPr>
+            </a:pPr>
+            <a:r>
+              <a:t>• Explain loopback (TX→RX) and how TX and RX are both</a:t>
+            </a:r>
+          </a:p>
+          <a:p>
+            <a:pPr>
+              <a:lnSpc>
+                <a:spcPts val="2200"/>
+              </a:lnSpc>
+              <a:spcAft>
+                <a:spcPts val="1000"/>
+              </a:spcAft>
+              <a:defRPr sz="2000" b="0">
+                <a:solidFill>
+                  <a:srgbClr val="333333"/>
+                </a:solidFill>
+                <a:latin typeface="Calibri"/>
+              </a:defRPr>
+            </a:pPr>
+            <a:r>
+              <a:t>      checked in the scoreboard.</a:t>
+            </a:r>
+          </a:p>
+          <a:p>
+            <a:pPr>
+              <a:lnSpc>
+                <a:spcPts val="2200"/>
+              </a:lnSpc>
+              <a:spcAft>
+                <a:spcPts val="1000"/>
+              </a:spcAft>
+              <a:defRPr sz="2000" b="0">
+                <a:solidFill>
+                  <a:srgbClr val="333333"/>
+                </a:solidFill>
+                <a:latin typeface="Calibri"/>
+              </a:defRPr>
+            </a:pPr>
+            <a:r>
+              <a:t>• Run the uart_uvm example and interpret UVM output.</a:t>
+            </a:r>
+          </a:p>
+          <a:p>
+            <a:pPr>
+              <a:lnSpc>
+                <a:spcPts val="2200"/>
+              </a:lnSpc>
+              <a:spcAft>
+                <a:spcPts val="1000"/>
+              </a:spcAft>
+              <a:defRPr sz="2000" b="0">
+                <a:solidFill>
+                  <a:srgbClr val="333333"/>
+                </a:solidFill>
+                <a:latin typeface="Calibri"/>
+              </a:defRPr>
+            </a:pPr>
+            <a:r>
+              <a:t>• Ready for Module 5: SPI protocol + RTL + basic</a:t>
+            </a:r>
+          </a:p>
+          <a:p>
+            <a:pPr>
+              <a:lnSpc>
+                <a:spcPts val="2200"/>
+              </a:lnSpc>
+              <a:spcAft>
+                <a:spcPts val="1000"/>
+              </a:spcAft>
+              <a:defRPr sz="2000" b="0">
+                <a:solidFill>
+                  <a:srgbClr val="333333"/>
+                </a:solidFill>
+                <a:latin typeface="Calibri"/>
+              </a:defRPr>
+            </a:pPr>
+            <a:r>
+              <a:t>      testbench.</a:t>
+            </a:r>
+          </a:p>
+        </p:txBody>
+      </p:sp>
+      <p:sp>
+        <p:nvSpPr>
+          <p:cNvPr id="4" name="TextBox 3"/>
+          <p:cNvSpPr txBox="1"/>
+          <p:nvPr/>
+        </p:nvSpPr>
+        <p:spPr>
+          <a:xfrm>
+            <a:off x="548640" y="6355080"/>
+            <a:ext cx="11064240" cy="320040"/>
+          </a:xfrm>
+          <a:prstGeom prst="rect">
+            <a:avLst/>
+          </a:prstGeom>
+          <a:noFill/>
+        </p:spPr>
+        <p:txBody>
+          <a:bodyPr wrap="square">
+            <a:noAutofit/>
+          </a:bodyPr>
+          <a:lstStyle/>
+          <a:p>
+            <a:pPr algn="r">
+              <a:lnSpc>
+                <a:spcPts val="2200"/>
+              </a:lnSpc>
+              <a:defRPr sz="1000" b="0">
+                <a:solidFill>
+                  <a:srgbClr val="666666"/>
+                </a:solidFill>
+                <a:latin typeface="Calibri"/>
+              </a:defRPr>
+            </a:pPr>
+            <a:r>
+              <a:t>learn_uart_spi_i2c / Module 4</a:t>
+            </a:r>
+          </a:p>
+        </p:txBody>
+      </p:sp>
+    </p:spTree>
+  </p:cSld>
+  <p:clrMapOvr>
+    <a:masterClrMapping/>
+  </p:clrMapOvr>
+</p:sld>
+</file>
+
+<file path=ppt/slides/slide42.xml><?xml version="1.0" encoding="utf-8"?>
+<p:sld xmlns:a="http://schemas.openxmlformats.org/drawingml/2006/main" xmlns:p="http://schemas.openxmlformats.org/presentationml/2006/main" xmlns:r="http://schemas.openxmlformats.org/officeDocument/2006/relationships">
+  <p:cSld>
+    <p:spTree>
+      <p:nvGrpSpPr>
+        <p:cNvPr id="1" name=""/>
+        <p:cNvGrpSpPr/>
+        <p:nvPr/>
+      </p:nvGrpSpPr>
+      <p:grpSpPr/>
+      <p:sp>
+        <p:nvSpPr>
+          <p:cNvPr id="2" name="TextBox 1"/>
+          <p:cNvSpPr txBox="1"/>
+          <p:nvPr/>
+        </p:nvSpPr>
+        <p:spPr>
+          <a:xfrm>
+            <a:off x="548640" y="411480"/>
+            <a:ext cx="11064240" cy="777240"/>
+          </a:xfrm>
+          <a:prstGeom prst="rect">
+            <a:avLst/>
+          </a:prstGeom>
+          <a:noFill/>
+        </p:spPr>
+        <p:txBody>
+          <a:bodyPr wrap="square">
+            <a:noAutofit/>
+          </a:bodyPr>
+          <a:lstStyle/>
+          <a:p>
+            <a:pPr>
+              <a:lnSpc>
+                <a:spcPts val="2200"/>
+              </a:lnSpc>
+              <a:defRPr sz="2800" b="1">
+                <a:solidFill>
+                  <a:srgbClr val="1A1A2E"/>
+                </a:solidFill>
+                <a:latin typeface="Calibri"/>
+              </a:defRPr>
+            </a:pPr>
+            <a:r>
+              <a:t>Exercises</a:t>
+            </a:r>
+          </a:p>
+        </p:txBody>
+      </p:sp>
+      <p:sp>
+        <p:nvSpPr>
+          <p:cNvPr id="3" name="TextBox 2"/>
+          <p:cNvSpPr txBox="1"/>
+          <p:nvPr/>
+        </p:nvSpPr>
+        <p:spPr>
+          <a:xfrm>
+            <a:off x="548640" y="1234440"/>
+            <a:ext cx="11064240" cy="4937760"/>
+          </a:xfrm>
+          <a:prstGeom prst="rect">
+            <a:avLst/>
+          </a:prstGeom>
+          <a:noFill/>
+        </p:spPr>
+        <p:txBody>
+          <a:bodyPr wrap="square">
+            <a:noAutofit/>
+          </a:bodyPr>
+          <a:lstStyle/>
+          <a:p>
+            <a:pPr>
+              <a:lnSpc>
+                <a:spcPts val="2200"/>
+              </a:lnSpc>
+              <a:spcAft>
+                <a:spcPts val="1000"/>
+              </a:spcAft>
+              <a:defRPr sz="2000" b="0">
+                <a:solidFill>
+                  <a:srgbClr val="333333"/>
+                </a:solidFill>
+                <a:latin typeface="Calibri"/>
+              </a:defRPr>
+            </a:pPr>
+            <a:r>
+              <a:t>• Run uart_uvm</a:t>
+            </a:r>
+          </a:p>
+          <a:p>
+            <a:pPr>
+              <a:lnSpc>
+                <a:spcPts val="2200"/>
+              </a:lnSpc>
+              <a:spcAft>
+                <a:spcPts val="1000"/>
+              </a:spcAft>
+              <a:defRPr sz="2000" b="0">
+                <a:solidFill>
+                  <a:srgbClr val="333333"/>
+                </a:solidFill>
+                <a:latin typeface="Calibri"/>
+              </a:defRPr>
+            </a:pPr>
+            <a:r>
+              <a:t>• Trace one transaction</a:t>
+            </a:r>
+          </a:p>
+          <a:p>
+            <a:pPr>
+              <a:lnSpc>
+                <a:spcPts val="2200"/>
+              </a:lnSpc>
+              <a:spcAft>
+                <a:spcPts val="1000"/>
+              </a:spcAft>
+              <a:defRPr sz="2000" b="0">
+                <a:solidFill>
+                  <a:srgbClr val="333333"/>
+                </a:solidFill>
+                <a:latin typeface="Calibri"/>
+              </a:defRPr>
+            </a:pPr>
+            <a:r>
+              <a:t>• Change the sequence</a:t>
+            </a:r>
+          </a:p>
+          <a:p>
+            <a:pPr>
+              <a:lnSpc>
+                <a:spcPts val="2200"/>
+              </a:lnSpc>
+              <a:spcAft>
+                <a:spcPts val="1000"/>
+              </a:spcAft>
+              <a:defRPr sz="2000" b="0">
+                <a:solidFill>
+                  <a:srgbClr val="333333"/>
+                </a:solidFill>
+                <a:latin typeface="Calibri"/>
+              </a:defRPr>
+            </a:pPr>
+            <a:r>
+              <a:t>• Optional: Loopback path</a:t>
+            </a:r>
+          </a:p>
+        </p:txBody>
+      </p:sp>
+      <p:sp>
+        <p:nvSpPr>
+          <p:cNvPr id="4" name="TextBox 3"/>
+          <p:cNvSpPr txBox="1"/>
+          <p:nvPr/>
+        </p:nvSpPr>
+        <p:spPr>
+          <a:xfrm>
+            <a:off x="548640" y="6355080"/>
+            <a:ext cx="11064240" cy="320040"/>
+          </a:xfrm>
+          <a:prstGeom prst="rect">
+            <a:avLst/>
+          </a:prstGeom>
+          <a:noFill/>
+        </p:spPr>
+        <p:txBody>
+          <a:bodyPr wrap="square">
+            <a:noAutofit/>
+          </a:bodyPr>
+          <a:lstStyle/>
+          <a:p>
+            <a:pPr algn="r">
+              <a:lnSpc>
+                <a:spcPts val="2200"/>
+              </a:lnSpc>
+              <a:defRPr sz="1000" b="0">
+                <a:solidFill>
+                  <a:srgbClr val="666666"/>
+                </a:solidFill>
+                <a:latin typeface="Calibri"/>
+              </a:defRPr>
+            </a:pPr>
+            <a:r>
+              <a:t>learn_uart_spi_i2c / Module 4</a:t>
+            </a:r>
+          </a:p>
+        </p:txBody>
+      </p:sp>
+    </p:spTree>
+  </p:cSld>
+  <p:clrMapOvr>
+    <a:masterClrMapping/>
+  </p:clrMapOvr>
+</p:sld>
+</file>
+
+<file path=ppt/slides/slide43.xml><?xml version="1.0" encoding="utf-8"?>
+<p:sld xmlns:a="http://schemas.openxmlformats.org/drawingml/2006/main" xmlns:p="http://schemas.openxmlformats.org/presentationml/2006/main" xmlns:r="http://schemas.openxmlformats.org/officeDocument/2006/relationships">
+  <p:cSld>
+    <p:spTree>
+      <p:nvGrpSpPr>
+        <p:cNvPr id="1" name=""/>
+        <p:cNvGrpSpPr/>
+        <p:nvPr/>
+      </p:nvGrpSpPr>
+      <p:grpSpPr/>
+      <p:sp>
+        <p:nvSpPr>
+          <p:cNvPr id="2" name="TextBox 1"/>
+          <p:cNvSpPr txBox="1"/>
+          <p:nvPr/>
+        </p:nvSpPr>
+        <p:spPr>
+          <a:xfrm>
+            <a:off x="548640" y="411480"/>
+            <a:ext cx="11064240" cy="777240"/>
+          </a:xfrm>
+          <a:prstGeom prst="rect">
+            <a:avLst/>
+          </a:prstGeom>
+          <a:noFill/>
+        </p:spPr>
+        <p:txBody>
+          <a:bodyPr wrap="square">
+            <a:noAutofit/>
+          </a:bodyPr>
+          <a:lstStyle/>
+          <a:p>
+            <a:pPr>
+              <a:lnSpc>
+                <a:spcPts val="2200"/>
+              </a:lnSpc>
+              <a:defRPr sz="2800" b="1">
+                <a:solidFill>
+                  <a:srgbClr val="1A1A2E"/>
+                </a:solidFill>
+                <a:latin typeface="Calibri"/>
+              </a:defRPr>
+            </a:pPr>
+            <a:r>
+              <a:t>Assessment checklist</a:t>
+            </a:r>
+          </a:p>
+        </p:txBody>
+      </p:sp>
+      <p:sp>
+        <p:nvSpPr>
+          <p:cNvPr id="3" name="TextBox 2"/>
+          <p:cNvSpPr txBox="1"/>
+          <p:nvPr/>
+        </p:nvSpPr>
+        <p:spPr>
+          <a:xfrm>
+            <a:off x="548640" y="1234440"/>
+            <a:ext cx="11064240" cy="4937760"/>
+          </a:xfrm>
+          <a:prstGeom prst="rect">
+            <a:avLst/>
+          </a:prstGeom>
+          <a:noFill/>
+        </p:spPr>
+        <p:txBody>
+          <a:bodyPr wrap="square">
+            <a:noAutofit/>
+          </a:bodyPr>
+          <a:lstStyle/>
+          <a:p>
+            <a:pPr>
+              <a:lnSpc>
+                <a:spcPts val="2200"/>
+              </a:lnSpc>
+              <a:spcAft>
+                <a:spcPts val="1000"/>
+              </a:spcAft>
+              <a:defRPr sz="2000" b="0">
+                <a:solidFill>
+                  <a:srgbClr val="333333"/>
+                </a:solidFill>
+                <a:latin typeface="Calibri"/>
+              </a:defRPr>
+            </a:pPr>
+            <a:r>
+              <a:t>• Can describe the UART UVM agent: transaction (one</a:t>
+            </a:r>
+          </a:p>
+          <a:p>
+            <a:pPr>
+              <a:lnSpc>
+                <a:spcPts val="2200"/>
+              </a:lnSpc>
+              <a:spcAft>
+                <a:spcPts val="1000"/>
+              </a:spcAft>
+              <a:defRPr sz="2000" b="0">
+                <a:solidFill>
+                  <a:srgbClr val="333333"/>
+                </a:solidFill>
+                <a:latin typeface="Calibri"/>
+              </a:defRPr>
+            </a:pPr>
+            <a:r>
+              <a:t>      byte), sequence, driver, monitor, scoreboard.</a:t>
+            </a:r>
+          </a:p>
+          <a:p>
+            <a:pPr>
+              <a:lnSpc>
+                <a:spcPts val="2200"/>
+              </a:lnSpc>
+              <a:spcAft>
+                <a:spcPts val="1000"/>
+              </a:spcAft>
+              <a:defRPr sz="2000" b="0">
+                <a:solidFill>
+                  <a:srgbClr val="333333"/>
+                </a:solidFill>
+                <a:latin typeface="Calibri"/>
+              </a:defRPr>
+            </a:pPr>
+            <a:r>
+              <a:t>• Can explain loopback and how TX and RX are both</a:t>
+            </a:r>
+          </a:p>
+          <a:p>
+            <a:pPr>
+              <a:lnSpc>
+                <a:spcPts val="2200"/>
+              </a:lnSpc>
+              <a:spcAft>
+                <a:spcPts val="1000"/>
+              </a:spcAft>
+              <a:defRPr sz="2000" b="0">
+                <a:solidFill>
+                  <a:srgbClr val="333333"/>
+                </a:solidFill>
+                <a:latin typeface="Calibri"/>
+              </a:defRPr>
+            </a:pPr>
+            <a:r>
+              <a:t>      checked.</a:t>
+            </a:r>
+          </a:p>
+          <a:p>
+            <a:pPr>
+              <a:lnSpc>
+                <a:spcPts val="2200"/>
+              </a:lnSpc>
+              <a:spcAft>
+                <a:spcPts val="1000"/>
+              </a:spcAft>
+              <a:defRPr sz="2000" b="0">
+                <a:solidFill>
+                  <a:srgbClr val="333333"/>
+                </a:solidFill>
+                <a:latin typeface="Calibri"/>
+              </a:defRPr>
+            </a:pPr>
+            <a:r>
+              <a:t>• Can run uart_uvm and interpret UVM output (phases,</a:t>
+            </a:r>
+          </a:p>
+          <a:p>
+            <a:pPr>
+              <a:lnSpc>
+                <a:spcPts val="2200"/>
+              </a:lnSpc>
+              <a:spcAft>
+                <a:spcPts val="1000"/>
+              </a:spcAft>
+              <a:defRPr sz="2000" b="0">
+                <a:solidFill>
+                  <a:srgbClr val="333333"/>
+                </a:solidFill>
+                <a:latin typeface="Calibri"/>
+              </a:defRPr>
+            </a:pPr>
+            <a:r>
+              <a:t>      scoreboard summary).</a:t>
+            </a:r>
+          </a:p>
+          <a:p>
+            <a:pPr>
+              <a:lnSpc>
+                <a:spcPts val="2200"/>
+              </a:lnSpc>
+              <a:spcAft>
+                <a:spcPts val="1000"/>
+              </a:spcAft>
+              <a:defRPr sz="2000" b="0">
+                <a:solidFill>
+                  <a:srgbClr val="333333"/>
+                </a:solidFill>
+                <a:latin typeface="Calibri"/>
+              </a:defRPr>
+            </a:pPr>
+            <a:r>
+              <a:t>• Ready for Module 5: SPI protocol + RTL + basic</a:t>
+            </a:r>
+          </a:p>
+          <a:p>
+            <a:pPr>
+              <a:lnSpc>
+                <a:spcPts val="2200"/>
+              </a:lnSpc>
+              <a:spcAft>
+                <a:spcPts val="1000"/>
+              </a:spcAft>
+              <a:defRPr sz="2000" b="0">
+                <a:solidFill>
+                  <a:srgbClr val="333333"/>
+                </a:solidFill>
+                <a:latin typeface="Calibri"/>
+              </a:defRPr>
+            </a:pPr>
+            <a:r>
+              <a:t>      testbench.</a:t>
+            </a:r>
+          </a:p>
+        </p:txBody>
+      </p:sp>
+      <p:sp>
+        <p:nvSpPr>
+          <p:cNvPr id="4" name="TextBox 3"/>
+          <p:cNvSpPr txBox="1"/>
+          <p:nvPr/>
+        </p:nvSpPr>
+        <p:spPr>
+          <a:xfrm>
+            <a:off x="548640" y="6355080"/>
+            <a:ext cx="11064240" cy="320040"/>
+          </a:xfrm>
+          <a:prstGeom prst="rect">
+            <a:avLst/>
+          </a:prstGeom>
+          <a:noFill/>
+        </p:spPr>
+        <p:txBody>
+          <a:bodyPr wrap="square">
+            <a:noAutofit/>
+          </a:bodyPr>
+          <a:lstStyle/>
+          <a:p>
+            <a:pPr algn="r">
+              <a:lnSpc>
+                <a:spcPts val="2200"/>
+              </a:lnSpc>
+              <a:defRPr sz="1000" b="0">
+                <a:solidFill>
+                  <a:srgbClr val="666666"/>
+                </a:solidFill>
+                <a:latin typeface="Calibri"/>
+              </a:defRPr>
+            </a:pPr>
+            <a:r>
+              <a:t>learn_uart_spi_i2c / Module 4</a:t>
+            </a:r>
+          </a:p>
+        </p:txBody>
+      </p:sp>
+    </p:spTree>
+  </p:cSld>
+  <p:clrMapOvr>
+    <a:masterClrMapping/>
+  </p:clrMapOvr>
+</p:sld>
+</file>
+
+<file path=ppt/slides/slide44.xml><?xml version="1.0" encoding="utf-8"?>
+<p:sld xmlns:a="http://schemas.openxmlformats.org/drawingml/2006/main" xmlns:p="http://schemas.openxmlformats.org/presentationml/2006/main" xmlns:r="http://schemas.openxmlformats.org/officeDocument/2006/relationships">
+  <p:cSld>
+    <p:spTree>
+      <p:nvGrpSpPr>
+        <p:cNvPr id="1" name=""/>
+        <p:cNvGrpSpPr/>
+        <p:nvPr/>
+      </p:nvGrpSpPr>
+      <p:grpSpPr/>
+      <p:sp>
+        <p:nvSpPr>
+          <p:cNvPr id="2" name="TextBox 1"/>
+          <p:cNvSpPr txBox="1"/>
+          <p:nvPr/>
+        </p:nvSpPr>
+        <p:spPr>
+          <a:xfrm>
+            <a:off x="548640" y="411480"/>
+            <a:ext cx="11064240" cy="777240"/>
+          </a:xfrm>
+          <a:prstGeom prst="rect">
+            <a:avLst/>
+          </a:prstGeom>
+          <a:noFill/>
+        </p:spPr>
+        <p:txBody>
+          <a:bodyPr wrap="square">
+            <a:noAutofit/>
+          </a:bodyPr>
+          <a:lstStyle/>
+          <a:p>
+            <a:pPr>
+              <a:lnSpc>
+                <a:spcPts val="2200"/>
+              </a:lnSpc>
+              <a:defRPr sz="2800" b="1">
+                <a:solidFill>
+                  <a:srgbClr val="1A1A2E"/>
+                </a:solidFill>
+                <a:latin typeface="Calibri"/>
+              </a:defRPr>
+            </a:pPr>
+            <a:r>
+              <a:t>Summary &amp; next steps</a:t>
+            </a:r>
+          </a:p>
+        </p:txBody>
+      </p:sp>
+      <p:sp>
+        <p:nvSpPr>
+          <p:cNvPr id="3" name="TextBox 2"/>
+          <p:cNvSpPr txBox="1"/>
+          <p:nvPr/>
+        </p:nvSpPr>
+        <p:spPr>
+          <a:xfrm>
+            <a:off x="548640" y="1234440"/>
+            <a:ext cx="11064240" cy="4937760"/>
+          </a:xfrm>
+          <a:prstGeom prst="rect">
+            <a:avLst/>
+          </a:prstGeom>
+          <a:noFill/>
+        </p:spPr>
+        <p:txBody>
+          <a:bodyPr wrap="square">
+            <a:noAutofit/>
+          </a:bodyPr>
+          <a:lstStyle/>
+          <a:p>
+            <a:pPr>
+              <a:lnSpc>
+                <a:spcPts val="2200"/>
+              </a:lnSpc>
+              <a:spcAft>
+                <a:spcPts val="1000"/>
+              </a:spcAft>
+              <a:defRPr sz="2000" b="0">
+                <a:solidFill>
+                  <a:srgbClr val="333333"/>
+                </a:solidFill>
+                <a:latin typeface="Calibri"/>
+              </a:defRPr>
+            </a:pPr>
+            <a:r>
+              <a:t>• Extend UART verification to **UVM+SV** — UART agent</a:t>
+            </a:r>
+          </a:p>
+          <a:p>
+            <a:pPr>
+              <a:lnSpc>
+                <a:spcPts val="2200"/>
+              </a:lnSpc>
+              <a:spcAft>
+                <a:spcPts val="1000"/>
+              </a:spcAft>
+              <a:defRPr sz="2000" b="0">
+                <a:solidFill>
+                  <a:srgbClr val="333333"/>
+                </a:solidFill>
+                <a:latin typeface="Calibri"/>
+              </a:defRPr>
+            </a:pPr>
+            <a:r>
+              <a:t>      (transaction, sequence, driver, monitor, scoreb…</a:t>
+            </a:r>
+          </a:p>
+          <a:p>
+            <a:pPr>
+              <a:lnSpc>
+                <a:spcPts val="2200"/>
+              </a:lnSpc>
+              <a:spcAft>
+                <a:spcPts val="1000"/>
+              </a:spcAft>
+              <a:defRPr sz="2000" b="0">
+                <a:solidFill>
+                  <a:srgbClr val="333333"/>
+                </a:solidFill>
+                <a:latin typeface="Calibri"/>
+              </a:defRPr>
+            </a:pPr>
+            <a:r>
+              <a:t>• Complete module4/CHECKLIST.md</a:t>
+            </a:r>
+          </a:p>
+          <a:p>
+            <a:pPr>
+              <a:lnSpc>
+                <a:spcPts val="2200"/>
+              </a:lnSpc>
+              <a:spcAft>
+                <a:spcPts val="1000"/>
+              </a:spcAft>
+              <a:defRPr sz="2000" b="0">
+                <a:solidFill>
+                  <a:srgbClr val="333333"/>
+                </a:solidFill>
+                <a:latin typeface="Calibri"/>
+              </a:defRPr>
+            </a:pPr>
+            <a:r>
+              <a:t>• Review module4/EXAMPLES.md and run each lab</a:t>
+            </a:r>
+          </a:p>
+          <a:p>
+            <a:pPr>
+              <a:lnSpc>
+                <a:spcPts val="2200"/>
+              </a:lnSpc>
+              <a:spcAft>
+                <a:spcPts val="1000"/>
+              </a:spcAft>
+              <a:defRPr sz="2000" b="0">
+                <a:solidFill>
+                  <a:srgbClr val="333333"/>
+                </a:solidFill>
+                <a:latin typeface="Calibri"/>
+              </a:defRPr>
+            </a:pPr>
+            <a:r>
+              <a:t>• Next: SPI</a:t>
+            </a:r>
+          </a:p>
+        </p:txBody>
+      </p:sp>
+      <p:sp>
+        <p:nvSpPr>
+          <p:cNvPr id="4" name="TextBox 3"/>
+          <p:cNvSpPr txBox="1"/>
+          <p:nvPr/>
+        </p:nvSpPr>
+        <p:spPr>
+          <a:xfrm>
+            <a:off x="548640" y="6355080"/>
+            <a:ext cx="11064240" cy="320040"/>
+          </a:xfrm>
+          <a:prstGeom prst="rect">
+            <a:avLst/>
+          </a:prstGeom>
+          <a:noFill/>
+        </p:spPr>
+        <p:txBody>
+          <a:bodyPr wrap="square">
+            <a:noAutofit/>
+          </a:bodyPr>
+          <a:lstStyle/>
+          <a:p>
+            <a:pPr algn="r">
+              <a:lnSpc>
+                <a:spcPts val="2200"/>
+              </a:lnSpc>
+              <a:defRPr sz="1000" b="0">
+                <a:solidFill>
+                  <a:srgbClr val="666666"/>
+                </a:solidFill>
+                <a:latin typeface="Calibri"/>
+              </a:defRPr>
+            </a:pPr>
+            <a:r>
+              <a:t>learn_uart_spi_i2c / Module 4</a:t>
+            </a:r>
+          </a:p>
+        </p:txBody>
+      </p:sp>
+    </p:spTree>
+  </p:cSld>
+  <p:clrMapOvr>
+    <a:masterClrMapping/>
+  </p:clrMapOvr>
+</p:sld>
+</file>
+
 <file path=ppt/slides/slide5.xml><?xml version="1.0" encoding="utf-8"?>
 <p:sld xmlns:a="http://schemas.openxmlformats.org/drawingml/2006/main" xmlns:p="http://schemas.openxmlformats.org/presentationml/2006/main" xmlns:r="http://schemas.openxmlformats.org/officeDocument/2006/relationships">
   <p:cSld>
@@ -9575,14 +13710,189 @@
               </a:defRPr>
             </a:pPr>
             <a:r>
-              <a:t>RTL / block architecture</a:t>
+              <a:t>1. UART DUT (reused from Module 3)</a:t>
+            </a:r>
+          </a:p>
+        </p:txBody>
+      </p:sp>
+      <p:sp>
+        <p:nvSpPr>
+          <p:cNvPr id="3" name="TextBox 2"/>
+          <p:cNvSpPr txBox="1"/>
+          <p:nvPr/>
+        </p:nvSpPr>
+        <p:spPr>
+          <a:xfrm>
+            <a:off x="548640" y="1234440"/>
+            <a:ext cx="5303520" cy="4754880"/>
+          </a:xfrm>
+          <a:prstGeom prst="rect">
+            <a:avLst/>
+          </a:prstGeom>
+          <a:noFill/>
+        </p:spPr>
+        <p:txBody>
+          <a:bodyPr wrap="square">
+            <a:noAutofit/>
+          </a:bodyPr>
+          <a:lstStyle/>
+          <a:p>
+            <a:pPr>
+              <a:lnSpc>
+                <a:spcPts val="2200"/>
+              </a:lnSpc>
+              <a:spcAft>
+                <a:spcPts val="1000"/>
+              </a:spcAft>
+              <a:defRPr sz="2000" b="0">
+                <a:solidFill>
+                  <a:srgbClr val="333333"/>
+                </a:solidFill>
+                <a:latin typeface="Calibri"/>
+              </a:defRPr>
+            </a:pPr>
+            <a:r>
+              <a:t>• dut/: `uart_tx`, `uart_rx`,</a:t>
+            </a:r>
+          </a:p>
+          <a:p>
+            <a:pPr>
+              <a:lnSpc>
+                <a:spcPts val="2200"/>
+              </a:lnSpc>
+              <a:spcAft>
+                <a:spcPts val="1000"/>
+              </a:spcAft>
+              <a:defRPr sz="2000" b="0">
+                <a:solidFill>
+                  <a:srgbClr val="333333"/>
+                </a:solidFill>
+                <a:latin typeface="Calibri"/>
+              </a:defRPr>
+            </a:pPr>
+            <a:r>
+              <a:t>      `baud_gen` — identical RTL to</a:t>
+            </a:r>
+          </a:p>
+          <a:p>
+            <a:pPr>
+              <a:lnSpc>
+                <a:spcPts val="2200"/>
+              </a:lnSpc>
+              <a:spcAft>
+                <a:spcPts val="1000"/>
+              </a:spcAft>
+              <a:defRPr sz="2000" b="0">
+                <a:solidFill>
+                  <a:srgbClr val="333333"/>
+                </a:solidFill>
+                <a:latin typeface="Calibri"/>
+              </a:defRPr>
+            </a:pPr>
+            <a:r>
+              <a:t>      `uart_baseline`.</a:t>
+            </a:r>
+          </a:p>
+          <a:p>
+            <a:pPr>
+              <a:lnSpc>
+                <a:spcPts val="2200"/>
+              </a:lnSpc>
+              <a:spcAft>
+                <a:spcPts val="1000"/>
+              </a:spcAft>
+              <a:defRPr sz="2000" b="0">
+                <a:solidFill>
+                  <a:srgbClr val="333333"/>
+                </a:solidFill>
+                <a:latin typeface="Calibri"/>
+              </a:defRPr>
+            </a:pPr>
+            <a:r>
+              <a:t>• Loopback in top: `rx = tx` for</a:t>
+            </a:r>
+          </a:p>
+          <a:p>
+            <a:pPr>
+              <a:lnSpc>
+                <a:spcPts val="2200"/>
+              </a:lnSpc>
+              <a:spcAft>
+                <a:spcPts val="1000"/>
+              </a:spcAft>
+              <a:defRPr sz="2000" b="0">
+                <a:solidFill>
+                  <a:srgbClr val="333333"/>
+                </a:solidFill>
+                <a:latin typeface="Calibri"/>
+              </a:defRPr>
+            </a:pPr>
+            <a:r>
+              <a:t>      closed-loop checking.</a:t>
+            </a:r>
+          </a:p>
+          <a:p>
+            <a:pPr>
+              <a:lnSpc>
+                <a:spcPts val="2200"/>
+              </a:lnSpc>
+              <a:spcAft>
+                <a:spcPts val="1000"/>
+              </a:spcAft>
+              <a:defRPr sz="2000" b="0">
+                <a:solidFill>
+                  <a:srgbClr val="333333"/>
+                </a:solidFill>
+                <a:latin typeface="Calibri"/>
+              </a:defRPr>
+            </a:pPr>
+            <a:r>
+              <a:t>• Why reuse: Upgrade verification</a:t>
+            </a:r>
+          </a:p>
+          <a:p>
+            <a:pPr>
+              <a:lnSpc>
+                <a:spcPts val="2200"/>
+              </a:lnSpc>
+              <a:spcAft>
+                <a:spcPts val="1000"/>
+              </a:spcAft>
+              <a:defRPr sz="2000" b="0">
+                <a:solidFill>
+                  <a:srgbClr val="333333"/>
+                </a:solidFill>
+                <a:latin typeface="Calibri"/>
+              </a:defRPr>
+            </a:pPr>
+            <a:r>
+              <a:t>      (UVM) without touching proven</a:t>
+            </a:r>
+          </a:p>
+          <a:p>
+            <a:pPr>
+              <a:lnSpc>
+                <a:spcPts val="2200"/>
+              </a:lnSpc>
+              <a:spcAft>
+                <a:spcPts val="1000"/>
+              </a:spcAft>
+              <a:defRPr sz="2000" b="0">
+                <a:solidFill>
+                  <a:srgbClr val="333333"/>
+                </a:solidFill>
+                <a:latin typeface="Calibri"/>
+              </a:defRPr>
+            </a:pPr>
+            <a:r>
+              <a:t>      RTL.</a:t>
             </a:r>
           </a:p>
         </p:txBody>
       </p:sp>
       <p:pic>
         <p:nvPicPr>
-          <p:cNvPr id="3" name="Picture 2" descr="rtl_architecture.png"/>
+          <p:cNvPr id="4" name="Picture 3" descr="rtl_architecture.png"/>
           <p:cNvPicPr>
             <a:picLocks noChangeAspect="1"/>
           </p:cNvPicPr>
@@ -9596,53 +13906,14 @@
         </p:blipFill>
         <p:spPr>
           <a:xfrm>
-            <a:off x="548640" y="1143000"/>
-            <a:ext cx="8128000" cy="4572000"/>
+            <a:off x="6172200" y="2094547"/>
+            <a:ext cx="5394960" cy="3034665"/>
           </a:xfrm>
           <a:prstGeom prst="rect">
             <a:avLst/>
           </a:prstGeom>
         </p:spPr>
       </p:pic>
-      <p:sp>
-        <p:nvSpPr>
-          <p:cNvPr id="4" name="TextBox 3"/>
-          <p:cNvSpPr txBox="1"/>
-          <p:nvPr/>
-        </p:nvSpPr>
-        <p:spPr>
-          <a:xfrm>
-            <a:off x="548640" y="5897880"/>
-            <a:ext cx="11064240" cy="411480"/>
-          </a:xfrm>
-          <a:prstGeom prst="rect">
-            <a:avLst/>
-          </a:prstGeom>
-          <a:noFill/>
-        </p:spPr>
-        <p:txBody>
-          <a:bodyPr wrap="square">
-            <a:noAutofit/>
-          </a:bodyPr>
-          <a:lstStyle/>
-          <a:p>
-            <a:pPr>
-              <a:lnSpc>
-                <a:spcPts val="2200"/>
-              </a:lnSpc>
-              <a:defRPr sz="1200" b="0">
-                <a:solidFill>
-                  <a:srgbClr val="333333"/>
-                </a:solidFill>
-                <a:latin typeface="Calibri"/>
-              </a:defRPr>
-            </a:pPr>
-            <a:r>
-              <a:t>Module 4: DUT / block hierarchy (see module4/examples/).</a:t>
-            </a:r>
-          </a:p>
-        </p:txBody>
-      </p:sp>
       <p:sp>
         <p:nvSpPr>
           <p:cNvPr id="5" name="TextBox 4"/>
